--- a/public/fun/pack/pptx/review/보장점검양식_18_가족점검_바닷가등대.pptx
+++ b/public/fun/pack/pptx/review/보장점검양식_18_가족점검_바닷가등대.pptx
@@ -3286,14 +3286,6 @@
 <file path=ppt/slides/slide1.xml><?xml version="1.0" encoding="utf-8"?>
 <p:sld xmlns:a="http://schemas.openxmlformats.org/drawingml/2006/main" xmlns:p="http://schemas.openxmlformats.org/presentationml/2006/main" xmlns:r="http://schemas.openxmlformats.org/officeDocument/2006/relationships">
   <p:cSld>
-    <p:bg>
-      <p:bgPr>
-        <a:solidFill>
-          <a:srgbClr val="FFFFFF"/>
-        </a:solidFill>
-        <a:effectLst/>
-      </p:bgPr>
-    </p:bg>
     <p:spTree>
       <p:nvGrpSpPr>
         <p:cNvPr id="1" name=""/>
@@ -3301,151 +3293,30 @@
         <p:nvPr/>
       </p:nvGrpSpPr>
       <p:grpSpPr/>
-      <p:sp>
-        <p:nvSpPr>
-          <p:cNvPr id="3" name="장식"/>
-          <p:cNvSpPr/>
+      <p:pic>
+        <p:nvPicPr>
+          <p:cNvPr id="3" name="표지 그림" descr="review-18.jpg"/>
+          <p:cNvPicPr>
+            <a:picLocks noChangeAspect="1"/>
+          </p:cNvPicPr>
           <p:nvPr/>
-        </p:nvSpPr>
-        <p:spPr>
-          <a:xfrm>
-            <a:off x="0" y="2057400"/>
-            <a:ext cx="10241023" cy="1828800"/>
-          </a:xfrm>
-          <a:prstGeom prst="homePlate">
-            <a:avLst/>
-          </a:prstGeom>
-          <a:solidFill>
-            <a:srgbClr val="25799D"/>
-          </a:solidFill>
-          <a:ln>
-            <a:noFill/>
-          </a:ln>
-        </p:spPr>
-        <p:txBody>
-          <a:bodyPr rtlCol="0" anchor="ctr"/>
-          <a:lstStyle/>
-          <a:p>
-            <a:pPr algn="ctr"/>
-          </a:p>
-        </p:txBody>
-      </p:sp>
-      <p:sp>
-        <p:nvSpPr>
-          <p:cNvPr id="4" name="장식"/>
-          <p:cNvSpPr/>
-          <p:nvPr/>
-        </p:nvSpPr>
-        <p:spPr>
-          <a:xfrm>
-            <a:off x="0" y="3886200"/>
-            <a:ext cx="9509522" cy="64008"/>
+        </p:nvPicPr>
+        <p:blipFill>
+          <a:blip r:embed="rId2"/>
+          <a:stretch>
+            <a:fillRect/>
+          </a:stretch>
+        </p:blipFill>
+        <p:spPr>
+          <a:xfrm>
+            <a:off x="0" y="0"/>
+            <a:ext cx="12191695" cy="6858000"/>
           </a:xfrm>
           <a:prstGeom prst="rect">
             <a:avLst/>
           </a:prstGeom>
-          <a:solidFill>
-            <a:srgbClr val="913B4C"/>
-          </a:solidFill>
-          <a:ln>
-            <a:noFill/>
-          </a:ln>
-        </p:spPr>
-        <p:txBody>
-          <a:bodyPr rtlCol="0" anchor="ctr"/>
-          <a:lstStyle/>
-          <a:p>
-            <a:pPr algn="ctr"/>
-          </a:p>
-        </p:txBody>
-      </p:sp>
-      <p:sp>
-        <p:nvSpPr>
-          <p:cNvPr id="5" name="장식"/>
-          <p:cNvSpPr/>
-          <p:nvPr/>
-        </p:nvSpPr>
-        <p:spPr>
-          <a:xfrm>
-            <a:off x="9329659" y="672084"/>
-            <a:ext cx="2798064" cy="699516"/>
-          </a:xfrm>
-          <a:prstGeom prst="wave">
-            <a:avLst/>
-          </a:prstGeom>
-          <a:solidFill>
-            <a:srgbClr val="CCE9F5"/>
-          </a:solidFill>
-          <a:ln>
-            <a:noFill/>
-          </a:ln>
-        </p:spPr>
-        <p:txBody>
-          <a:bodyPr rtlCol="0" anchor="ctr"/>
-          <a:lstStyle/>
-          <a:p>
-            <a:pPr algn="ctr"/>
-          </a:p>
-        </p:txBody>
-      </p:sp>
-      <p:sp>
-        <p:nvSpPr>
-          <p:cNvPr id="6" name="장식"/>
-          <p:cNvSpPr/>
-          <p:nvPr/>
-        </p:nvSpPr>
-        <p:spPr>
-          <a:xfrm>
-            <a:off x="9329659" y="1278331"/>
-            <a:ext cx="2798064" cy="699516"/>
-          </a:xfrm>
-          <a:prstGeom prst="wave">
-            <a:avLst/>
-          </a:prstGeom>
-          <a:solidFill>
-            <a:srgbClr val="25799D"/>
-          </a:solidFill>
-          <a:ln>
-            <a:noFill/>
-          </a:ln>
-        </p:spPr>
-        <p:txBody>
-          <a:bodyPr rtlCol="0" anchor="ctr"/>
-          <a:lstStyle/>
-          <a:p>
-            <a:pPr algn="ctr"/>
-          </a:p>
-        </p:txBody>
-      </p:sp>
-      <p:sp>
-        <p:nvSpPr>
-          <p:cNvPr id="7" name="장식"/>
-          <p:cNvSpPr/>
-          <p:nvPr/>
-        </p:nvSpPr>
-        <p:spPr>
-          <a:xfrm>
-            <a:off x="9329659" y="1884578"/>
-            <a:ext cx="2798064" cy="699516"/>
-          </a:xfrm>
-          <a:prstGeom prst="wave">
-            <a:avLst/>
-          </a:prstGeom>
-          <a:solidFill>
-            <a:srgbClr val="913B4C"/>
-          </a:solidFill>
-          <a:ln>
-            <a:noFill/>
-          </a:ln>
-        </p:spPr>
-        <p:txBody>
-          <a:bodyPr rtlCol="0" anchor="ctr"/>
-          <a:lstStyle/>
-          <a:p>
-            <a:pPr algn="ctr"/>
-          </a:p>
-        </p:txBody>
-      </p:sp>
+        </p:spPr>
+      </p:pic>
       <p:sp>
         <p:nvSpPr>
           <p:cNvPr id="2" name="Title 1"/>
@@ -3458,8 +3329,8 @@
         </p:nvSpPr>
         <p:spPr>
           <a:xfrm>
-            <a:off x="731501" y="2167128"/>
-            <a:ext cx="8778020" cy="1609344"/>
+            <a:off x="853418" y="2057400"/>
+            <a:ext cx="6095847" cy="1554480"/>
           </a:xfrm>
         </p:spPr>
         <p:txBody>
@@ -3476,7 +3347,7 @@
             <a:r>
               <a:rPr sz="3600" b="1" i="0">
                 <a:solidFill>
-                  <a:srgbClr val="FFFFFF"/>
+                  <a:srgbClr val="11394A"/>
                 </a:solidFill>
               </a:rPr>
               <a:t>우리 보험 점검 시간</a:t>
@@ -3486,14 +3357,14 @@
       </p:sp>
       <p:sp>
         <p:nvSpPr>
-          <p:cNvPr id="8" name="한 줄 문구"/>
+          <p:cNvPr id="4" name="한 줄 문구"/>
           <p:cNvSpPr txBox="1"/>
           <p:nvPr/>
         </p:nvSpPr>
         <p:spPr>
           <a:xfrm>
-            <a:off x="731501" y="4160520"/>
-            <a:ext cx="8534186" cy="822960"/>
+            <a:off x="853418" y="3749039"/>
+            <a:ext cx="6095847" cy="822960"/>
           </a:xfrm>
           <a:prstGeom prst="rect">
             <a:avLst/>
@@ -3517,21 +3388,21 @@
                   <a:srgbClr val="11394A"/>
                 </a:solidFill>
               </a:rPr>
-              <a:t>등대처럼 길을 밝히는 점검표</a:t>
+              <a:t>누구 보험료가 얼마인지 한눈에 봅니다</a:t>
             </a:r>
           </a:p>
         </p:txBody>
       </p:sp>
       <p:sp>
         <p:nvSpPr>
-          <p:cNvPr id="9" name="안내 문구"/>
+          <p:cNvPr id="5" name="안내 문구"/>
           <p:cNvSpPr txBox="1"/>
           <p:nvPr/>
         </p:nvSpPr>
         <p:spPr>
           <a:xfrm>
-            <a:off x="731501" y="5029200"/>
-            <a:ext cx="8534186" cy="914400"/>
+            <a:off x="853418" y="4617720"/>
+            <a:ext cx="6095847" cy="914400"/>
           </a:xfrm>
           <a:prstGeom prst="rect">
             <a:avLst/>
@@ -3555,7 +3426,7 @@
                   <a:srgbClr val="666666"/>
                 </a:solidFill>
               </a:rPr>
-              <a:t>가족 점검 · 2026. 00. 00</a:t>
+              <a:t>가족 점검 · 2027. 00. 00</a:t>
             </a:r>
           </a:p>
           <a:p>
@@ -3632,93 +3503,6 @@
       </p:sp>
       <p:sp>
         <p:nvSpPr>
-          <p:cNvPr id="4" name="장식"/>
-          <p:cNvSpPr/>
-          <p:nvPr/>
-        </p:nvSpPr>
-        <p:spPr>
-          <a:xfrm>
-            <a:off x="10719511" y="475488"/>
-            <a:ext cx="1207008" cy="301752"/>
-          </a:xfrm>
-          <a:prstGeom prst="wave">
-            <a:avLst/>
-          </a:prstGeom>
-          <a:solidFill>
-            <a:srgbClr val="CCE9F5"/>
-          </a:solidFill>
-          <a:ln>
-            <a:noFill/>
-          </a:ln>
-        </p:spPr>
-        <p:txBody>
-          <a:bodyPr rtlCol="0" anchor="ctr"/>
-          <a:lstStyle/>
-          <a:p>
-            <a:pPr algn="ctr"/>
-          </a:p>
-        </p:txBody>
-      </p:sp>
-      <p:sp>
-        <p:nvSpPr>
-          <p:cNvPr id="5" name="장식"/>
-          <p:cNvSpPr/>
-          <p:nvPr/>
-        </p:nvSpPr>
-        <p:spPr>
-          <a:xfrm>
-            <a:off x="10719511" y="737006"/>
-            <a:ext cx="1207008" cy="301752"/>
-          </a:xfrm>
-          <a:prstGeom prst="wave">
-            <a:avLst/>
-          </a:prstGeom>
-          <a:solidFill>
-            <a:srgbClr val="25799D"/>
-          </a:solidFill>
-          <a:ln>
-            <a:noFill/>
-          </a:ln>
-        </p:spPr>
-        <p:txBody>
-          <a:bodyPr rtlCol="0" anchor="ctr"/>
-          <a:lstStyle/>
-          <a:p>
-            <a:pPr algn="ctr"/>
-          </a:p>
-        </p:txBody>
-      </p:sp>
-      <p:sp>
-        <p:nvSpPr>
-          <p:cNvPr id="6" name="장식"/>
-          <p:cNvSpPr/>
-          <p:nvPr/>
-        </p:nvSpPr>
-        <p:spPr>
-          <a:xfrm>
-            <a:off x="10719511" y="998524"/>
-            <a:ext cx="1207008" cy="301752"/>
-          </a:xfrm>
-          <a:prstGeom prst="wave">
-            <a:avLst/>
-          </a:prstGeom>
-          <a:solidFill>
-            <a:srgbClr val="913B4C"/>
-          </a:solidFill>
-          <a:ln>
-            <a:noFill/>
-          </a:ln>
-        </p:spPr>
-        <p:txBody>
-          <a:bodyPr rtlCol="0" anchor="ctr"/>
-          <a:lstStyle/>
-          <a:p>
-            <a:pPr algn="ctr"/>
-          </a:p>
-        </p:txBody>
-      </p:sp>
-      <p:sp>
-        <p:nvSpPr>
           <p:cNvPr id="2" name="Title 1"/>
           <p:cNvSpPr>
             <a:spLocks noGrp="1"/>
@@ -3757,7 +3541,7 @@
       </p:sp>
       <p:graphicFrame>
         <p:nvGraphicFramePr>
-          <p:cNvPr id="7" name="표"/>
+          <p:cNvPr id="4" name="표"/>
           <p:cNvGraphicFramePr>
             <a:graphicFrameLocks noGrp="1"/>
           </p:cNvGraphicFramePr>
@@ -4770,93 +4554,6 @@
       </p:sp>
       <p:sp>
         <p:nvSpPr>
-          <p:cNvPr id="4" name="장식"/>
-          <p:cNvSpPr/>
-          <p:nvPr/>
-        </p:nvSpPr>
-        <p:spPr>
-          <a:xfrm>
-            <a:off x="10719511" y="475488"/>
-            <a:ext cx="1207008" cy="301752"/>
-          </a:xfrm>
-          <a:prstGeom prst="wave">
-            <a:avLst/>
-          </a:prstGeom>
-          <a:solidFill>
-            <a:srgbClr val="CCE9F5"/>
-          </a:solidFill>
-          <a:ln>
-            <a:noFill/>
-          </a:ln>
-        </p:spPr>
-        <p:txBody>
-          <a:bodyPr rtlCol="0" anchor="ctr"/>
-          <a:lstStyle/>
-          <a:p>
-            <a:pPr algn="ctr"/>
-          </a:p>
-        </p:txBody>
-      </p:sp>
-      <p:sp>
-        <p:nvSpPr>
-          <p:cNvPr id="5" name="장식"/>
-          <p:cNvSpPr/>
-          <p:nvPr/>
-        </p:nvSpPr>
-        <p:spPr>
-          <a:xfrm>
-            <a:off x="10719511" y="737006"/>
-            <a:ext cx="1207008" cy="301752"/>
-          </a:xfrm>
-          <a:prstGeom prst="wave">
-            <a:avLst/>
-          </a:prstGeom>
-          <a:solidFill>
-            <a:srgbClr val="25799D"/>
-          </a:solidFill>
-          <a:ln>
-            <a:noFill/>
-          </a:ln>
-        </p:spPr>
-        <p:txBody>
-          <a:bodyPr rtlCol="0" anchor="ctr"/>
-          <a:lstStyle/>
-          <a:p>
-            <a:pPr algn="ctr"/>
-          </a:p>
-        </p:txBody>
-      </p:sp>
-      <p:sp>
-        <p:nvSpPr>
-          <p:cNvPr id="6" name="장식"/>
-          <p:cNvSpPr/>
-          <p:nvPr/>
-        </p:nvSpPr>
-        <p:spPr>
-          <a:xfrm>
-            <a:off x="10719511" y="998524"/>
-            <a:ext cx="1207008" cy="301752"/>
-          </a:xfrm>
-          <a:prstGeom prst="wave">
-            <a:avLst/>
-          </a:prstGeom>
-          <a:solidFill>
-            <a:srgbClr val="913B4C"/>
-          </a:solidFill>
-          <a:ln>
-            <a:noFill/>
-          </a:ln>
-        </p:spPr>
-        <p:txBody>
-          <a:bodyPr rtlCol="0" anchor="ctr"/>
-          <a:lstStyle/>
-          <a:p>
-            <a:pPr algn="ctr"/>
-          </a:p>
-        </p:txBody>
-      </p:sp>
-      <p:sp>
-        <p:nvSpPr>
           <p:cNvPr id="2" name="Title 1"/>
           <p:cNvSpPr>
             <a:spLocks noGrp="1"/>
@@ -4895,7 +4592,7 @@
       </p:sp>
       <p:graphicFrame>
         <p:nvGraphicFramePr>
-          <p:cNvPr id="7" name="표"/>
+          <p:cNvPr id="4" name="표"/>
           <p:cNvGraphicFramePr>
             <a:graphicFrameLocks noGrp="1"/>
           </p:cNvGraphicFramePr>
@@ -6603,93 +6300,6 @@
       </p:sp>
       <p:sp>
         <p:nvSpPr>
-          <p:cNvPr id="4" name="장식"/>
-          <p:cNvSpPr/>
-          <p:nvPr/>
-        </p:nvSpPr>
-        <p:spPr>
-          <a:xfrm>
-            <a:off x="10719511" y="475488"/>
-            <a:ext cx="1207008" cy="301752"/>
-          </a:xfrm>
-          <a:prstGeom prst="wave">
-            <a:avLst/>
-          </a:prstGeom>
-          <a:solidFill>
-            <a:srgbClr val="CCE9F5"/>
-          </a:solidFill>
-          <a:ln>
-            <a:noFill/>
-          </a:ln>
-        </p:spPr>
-        <p:txBody>
-          <a:bodyPr rtlCol="0" anchor="ctr"/>
-          <a:lstStyle/>
-          <a:p>
-            <a:pPr algn="ctr"/>
-          </a:p>
-        </p:txBody>
-      </p:sp>
-      <p:sp>
-        <p:nvSpPr>
-          <p:cNvPr id="5" name="장식"/>
-          <p:cNvSpPr/>
-          <p:nvPr/>
-        </p:nvSpPr>
-        <p:spPr>
-          <a:xfrm>
-            <a:off x="10719511" y="737006"/>
-            <a:ext cx="1207008" cy="301752"/>
-          </a:xfrm>
-          <a:prstGeom prst="wave">
-            <a:avLst/>
-          </a:prstGeom>
-          <a:solidFill>
-            <a:srgbClr val="25799D"/>
-          </a:solidFill>
-          <a:ln>
-            <a:noFill/>
-          </a:ln>
-        </p:spPr>
-        <p:txBody>
-          <a:bodyPr rtlCol="0" anchor="ctr"/>
-          <a:lstStyle/>
-          <a:p>
-            <a:pPr algn="ctr"/>
-          </a:p>
-        </p:txBody>
-      </p:sp>
-      <p:sp>
-        <p:nvSpPr>
-          <p:cNvPr id="6" name="장식"/>
-          <p:cNvSpPr/>
-          <p:nvPr/>
-        </p:nvSpPr>
-        <p:spPr>
-          <a:xfrm>
-            <a:off x="10719511" y="998524"/>
-            <a:ext cx="1207008" cy="301752"/>
-          </a:xfrm>
-          <a:prstGeom prst="wave">
-            <a:avLst/>
-          </a:prstGeom>
-          <a:solidFill>
-            <a:srgbClr val="913B4C"/>
-          </a:solidFill>
-          <a:ln>
-            <a:noFill/>
-          </a:ln>
-        </p:spPr>
-        <p:txBody>
-          <a:bodyPr rtlCol="0" anchor="ctr"/>
-          <a:lstStyle/>
-          <a:p>
-            <a:pPr algn="ctr"/>
-          </a:p>
-        </p:txBody>
-      </p:sp>
-      <p:sp>
-        <p:nvSpPr>
           <p:cNvPr id="2" name="Title 1"/>
           <p:cNvSpPr>
             <a:spLocks noGrp="1"/>
@@ -6728,7 +6338,7 @@
       </p:sp>
       <p:graphicFrame>
         <p:nvGraphicFramePr>
-          <p:cNvPr id="7" name="표"/>
+          <p:cNvPr id="4" name="표"/>
           <p:cNvGraphicFramePr>
             <a:graphicFrameLocks noGrp="1"/>
           </p:cNvGraphicFramePr>
@@ -8485,93 +8095,6 @@
       </p:sp>
       <p:sp>
         <p:nvSpPr>
-          <p:cNvPr id="4" name="장식"/>
-          <p:cNvSpPr/>
-          <p:nvPr/>
-        </p:nvSpPr>
-        <p:spPr>
-          <a:xfrm>
-            <a:off x="10719511" y="475488"/>
-            <a:ext cx="1207008" cy="301752"/>
-          </a:xfrm>
-          <a:prstGeom prst="wave">
-            <a:avLst/>
-          </a:prstGeom>
-          <a:solidFill>
-            <a:srgbClr val="CCE9F5"/>
-          </a:solidFill>
-          <a:ln>
-            <a:noFill/>
-          </a:ln>
-        </p:spPr>
-        <p:txBody>
-          <a:bodyPr rtlCol="0" anchor="ctr"/>
-          <a:lstStyle/>
-          <a:p>
-            <a:pPr algn="ctr"/>
-          </a:p>
-        </p:txBody>
-      </p:sp>
-      <p:sp>
-        <p:nvSpPr>
-          <p:cNvPr id="5" name="장식"/>
-          <p:cNvSpPr/>
-          <p:nvPr/>
-        </p:nvSpPr>
-        <p:spPr>
-          <a:xfrm>
-            <a:off x="10719511" y="737006"/>
-            <a:ext cx="1207008" cy="301752"/>
-          </a:xfrm>
-          <a:prstGeom prst="wave">
-            <a:avLst/>
-          </a:prstGeom>
-          <a:solidFill>
-            <a:srgbClr val="25799D"/>
-          </a:solidFill>
-          <a:ln>
-            <a:noFill/>
-          </a:ln>
-        </p:spPr>
-        <p:txBody>
-          <a:bodyPr rtlCol="0" anchor="ctr"/>
-          <a:lstStyle/>
-          <a:p>
-            <a:pPr algn="ctr"/>
-          </a:p>
-        </p:txBody>
-      </p:sp>
-      <p:sp>
-        <p:nvSpPr>
-          <p:cNvPr id="6" name="장식"/>
-          <p:cNvSpPr/>
-          <p:nvPr/>
-        </p:nvSpPr>
-        <p:spPr>
-          <a:xfrm>
-            <a:off x="10719511" y="998524"/>
-            <a:ext cx="1207008" cy="301752"/>
-          </a:xfrm>
-          <a:prstGeom prst="wave">
-            <a:avLst/>
-          </a:prstGeom>
-          <a:solidFill>
-            <a:srgbClr val="913B4C"/>
-          </a:solidFill>
-          <a:ln>
-            <a:noFill/>
-          </a:ln>
-        </p:spPr>
-        <p:txBody>
-          <a:bodyPr rtlCol="0" anchor="ctr"/>
-          <a:lstStyle/>
-          <a:p>
-            <a:pPr algn="ctr"/>
-          </a:p>
-        </p:txBody>
-      </p:sp>
-      <p:sp>
-        <p:nvSpPr>
           <p:cNvPr id="2" name="Title 1"/>
           <p:cNvSpPr>
             <a:spLocks noGrp="1"/>
@@ -8610,7 +8133,7 @@
       </p:sp>
       <p:sp>
         <p:nvSpPr>
-          <p:cNvPr id="7" name="카드 1"/>
+          <p:cNvPr id="4" name="카드 1"/>
           <p:cNvSpPr/>
           <p:nvPr/>
         </p:nvSpPr>
@@ -8643,7 +8166,7 @@
       </p:sp>
       <p:sp>
         <p:nvSpPr>
-          <p:cNvPr id="8" name="번호 1"/>
+          <p:cNvPr id="5" name="번호 1"/>
           <p:cNvSpPr/>
           <p:nvPr/>
         </p:nvSpPr>
@@ -8686,7 +8209,7 @@
       </p:sp>
       <p:sp>
         <p:nvSpPr>
-          <p:cNvPr id="9" name="TextBox 8"/>
+          <p:cNvPr id="6" name="TextBox 5"/>
           <p:cNvSpPr txBox="1"/>
           <p:nvPr/>
         </p:nvSpPr>
@@ -8724,7 +8247,7 @@
       </p:sp>
       <p:sp>
         <p:nvSpPr>
-          <p:cNvPr id="10" name="TextBox 9"/>
+          <p:cNvPr id="7" name="TextBox 6"/>
           <p:cNvSpPr txBox="1"/>
           <p:nvPr/>
         </p:nvSpPr>
@@ -8762,7 +8285,7 @@
       </p:sp>
       <p:sp>
         <p:nvSpPr>
-          <p:cNvPr id="11" name="카드 2"/>
+          <p:cNvPr id="8" name="카드 2"/>
           <p:cNvSpPr/>
           <p:nvPr/>
         </p:nvSpPr>
@@ -8795,7 +8318,7 @@
       </p:sp>
       <p:sp>
         <p:nvSpPr>
-          <p:cNvPr id="12" name="번호 2"/>
+          <p:cNvPr id="9" name="번호 2"/>
           <p:cNvSpPr/>
           <p:nvPr/>
         </p:nvSpPr>
@@ -8838,7 +8361,7 @@
       </p:sp>
       <p:sp>
         <p:nvSpPr>
-          <p:cNvPr id="13" name="TextBox 12"/>
+          <p:cNvPr id="10" name="TextBox 9"/>
           <p:cNvSpPr txBox="1"/>
           <p:nvPr/>
         </p:nvSpPr>
@@ -8876,7 +8399,7 @@
       </p:sp>
       <p:sp>
         <p:nvSpPr>
-          <p:cNvPr id="14" name="TextBox 13"/>
+          <p:cNvPr id="11" name="TextBox 10"/>
           <p:cNvSpPr txBox="1"/>
           <p:nvPr/>
         </p:nvSpPr>
@@ -8914,7 +8437,7 @@
       </p:sp>
       <p:sp>
         <p:nvSpPr>
-          <p:cNvPr id="15" name="카드 3"/>
+          <p:cNvPr id="12" name="카드 3"/>
           <p:cNvSpPr/>
           <p:nvPr/>
         </p:nvSpPr>
@@ -8947,7 +8470,7 @@
       </p:sp>
       <p:sp>
         <p:nvSpPr>
-          <p:cNvPr id="16" name="번호 3"/>
+          <p:cNvPr id="13" name="번호 3"/>
           <p:cNvSpPr/>
           <p:nvPr/>
         </p:nvSpPr>
@@ -8990,7 +8513,7 @@
       </p:sp>
       <p:sp>
         <p:nvSpPr>
-          <p:cNvPr id="17" name="TextBox 16"/>
+          <p:cNvPr id="14" name="TextBox 13"/>
           <p:cNvSpPr txBox="1"/>
           <p:nvPr/>
         </p:nvSpPr>
@@ -9028,7 +8551,7 @@
       </p:sp>
       <p:sp>
         <p:nvSpPr>
-          <p:cNvPr id="18" name="TextBox 17"/>
+          <p:cNvPr id="15" name="TextBox 14"/>
           <p:cNvSpPr txBox="1"/>
           <p:nvPr/>
         </p:nvSpPr>
@@ -9066,7 +8589,7 @@
       </p:sp>
       <p:sp>
         <p:nvSpPr>
-          <p:cNvPr id="19" name="안내"/>
+          <p:cNvPr id="16" name="안내"/>
           <p:cNvSpPr txBox="1"/>
           <p:nvPr/>
         </p:nvSpPr>
@@ -9159,93 +8682,6 @@
       </p:sp>
       <p:sp>
         <p:nvSpPr>
-          <p:cNvPr id="4" name="장식"/>
-          <p:cNvSpPr/>
-          <p:nvPr/>
-        </p:nvSpPr>
-        <p:spPr>
-          <a:xfrm>
-            <a:off x="10719511" y="475488"/>
-            <a:ext cx="1207008" cy="301752"/>
-          </a:xfrm>
-          <a:prstGeom prst="wave">
-            <a:avLst/>
-          </a:prstGeom>
-          <a:solidFill>
-            <a:srgbClr val="CCE9F5"/>
-          </a:solidFill>
-          <a:ln>
-            <a:noFill/>
-          </a:ln>
-        </p:spPr>
-        <p:txBody>
-          <a:bodyPr rtlCol="0" anchor="ctr"/>
-          <a:lstStyle/>
-          <a:p>
-            <a:pPr algn="ctr"/>
-          </a:p>
-        </p:txBody>
-      </p:sp>
-      <p:sp>
-        <p:nvSpPr>
-          <p:cNvPr id="5" name="장식"/>
-          <p:cNvSpPr/>
-          <p:nvPr/>
-        </p:nvSpPr>
-        <p:spPr>
-          <a:xfrm>
-            <a:off x="10719511" y="737006"/>
-            <a:ext cx="1207008" cy="301752"/>
-          </a:xfrm>
-          <a:prstGeom prst="wave">
-            <a:avLst/>
-          </a:prstGeom>
-          <a:solidFill>
-            <a:srgbClr val="25799D"/>
-          </a:solidFill>
-          <a:ln>
-            <a:noFill/>
-          </a:ln>
-        </p:spPr>
-        <p:txBody>
-          <a:bodyPr rtlCol="0" anchor="ctr"/>
-          <a:lstStyle/>
-          <a:p>
-            <a:pPr algn="ctr"/>
-          </a:p>
-        </p:txBody>
-      </p:sp>
-      <p:sp>
-        <p:nvSpPr>
-          <p:cNvPr id="6" name="장식"/>
-          <p:cNvSpPr/>
-          <p:nvPr/>
-        </p:nvSpPr>
-        <p:spPr>
-          <a:xfrm>
-            <a:off x="10719511" y="998524"/>
-            <a:ext cx="1207008" cy="301752"/>
-          </a:xfrm>
-          <a:prstGeom prst="wave">
-            <a:avLst/>
-          </a:prstGeom>
-          <a:solidFill>
-            <a:srgbClr val="913B4C"/>
-          </a:solidFill>
-          <a:ln>
-            <a:noFill/>
-          </a:ln>
-        </p:spPr>
-        <p:txBody>
-          <a:bodyPr rtlCol="0" anchor="ctr"/>
-          <a:lstStyle/>
-          <a:p>
-            <a:pPr algn="ctr"/>
-          </a:p>
-        </p:txBody>
-      </p:sp>
-      <p:sp>
-        <p:nvSpPr>
           <p:cNvPr id="2" name="Title 1"/>
           <p:cNvSpPr>
             <a:spLocks noGrp="1"/>
@@ -9284,7 +8720,7 @@
       </p:sp>
       <p:sp>
         <p:nvSpPr>
-          <p:cNvPr id="7" name="카드 1"/>
+          <p:cNvPr id="4" name="카드 1"/>
           <p:cNvSpPr/>
           <p:nvPr/>
         </p:nvSpPr>
@@ -9317,7 +8753,7 @@
       </p:sp>
       <p:sp>
         <p:nvSpPr>
-          <p:cNvPr id="8" name="번호 1"/>
+          <p:cNvPr id="5" name="번호 1"/>
           <p:cNvSpPr/>
           <p:nvPr/>
         </p:nvSpPr>
@@ -9360,7 +8796,7 @@
       </p:sp>
       <p:sp>
         <p:nvSpPr>
-          <p:cNvPr id="9" name="TextBox 8"/>
+          <p:cNvPr id="6" name="TextBox 5"/>
           <p:cNvSpPr txBox="1"/>
           <p:nvPr/>
         </p:nvSpPr>
@@ -9398,7 +8834,7 @@
       </p:sp>
       <p:sp>
         <p:nvSpPr>
-          <p:cNvPr id="10" name="TextBox 9"/>
+          <p:cNvPr id="7" name="TextBox 6"/>
           <p:cNvSpPr txBox="1"/>
           <p:nvPr/>
         </p:nvSpPr>
@@ -9436,7 +8872,7 @@
       </p:sp>
       <p:sp>
         <p:nvSpPr>
-          <p:cNvPr id="11" name="카드 2"/>
+          <p:cNvPr id="8" name="카드 2"/>
           <p:cNvSpPr/>
           <p:nvPr/>
         </p:nvSpPr>
@@ -9469,7 +8905,7 @@
       </p:sp>
       <p:sp>
         <p:nvSpPr>
-          <p:cNvPr id="12" name="번호 2"/>
+          <p:cNvPr id="9" name="번호 2"/>
           <p:cNvSpPr/>
           <p:nvPr/>
         </p:nvSpPr>
@@ -9512,7 +8948,7 @@
       </p:sp>
       <p:sp>
         <p:nvSpPr>
-          <p:cNvPr id="13" name="TextBox 12"/>
+          <p:cNvPr id="10" name="TextBox 9"/>
           <p:cNvSpPr txBox="1"/>
           <p:nvPr/>
         </p:nvSpPr>
@@ -9550,7 +8986,7 @@
       </p:sp>
       <p:sp>
         <p:nvSpPr>
-          <p:cNvPr id="14" name="TextBox 13"/>
+          <p:cNvPr id="11" name="TextBox 10"/>
           <p:cNvSpPr txBox="1"/>
           <p:nvPr/>
         </p:nvSpPr>
@@ -9588,7 +9024,7 @@
       </p:sp>
       <p:sp>
         <p:nvSpPr>
-          <p:cNvPr id="15" name="카드 3"/>
+          <p:cNvPr id="12" name="카드 3"/>
           <p:cNvSpPr/>
           <p:nvPr/>
         </p:nvSpPr>
@@ -9621,7 +9057,7 @@
       </p:sp>
       <p:sp>
         <p:nvSpPr>
-          <p:cNvPr id="16" name="번호 3"/>
+          <p:cNvPr id="13" name="번호 3"/>
           <p:cNvSpPr/>
           <p:nvPr/>
         </p:nvSpPr>
@@ -9664,7 +9100,7 @@
       </p:sp>
       <p:sp>
         <p:nvSpPr>
-          <p:cNvPr id="17" name="TextBox 16"/>
+          <p:cNvPr id="14" name="TextBox 13"/>
           <p:cNvSpPr txBox="1"/>
           <p:nvPr/>
         </p:nvSpPr>
@@ -9702,7 +9138,7 @@
       </p:sp>
       <p:sp>
         <p:nvSpPr>
-          <p:cNvPr id="18" name="TextBox 17"/>
+          <p:cNvPr id="15" name="TextBox 14"/>
           <p:cNvSpPr txBox="1"/>
           <p:nvPr/>
         </p:nvSpPr>
@@ -9740,7 +9176,7 @@
       </p:sp>
       <p:sp>
         <p:nvSpPr>
-          <p:cNvPr id="19" name="안내 문구"/>
+          <p:cNvPr id="16" name="안내 문구"/>
           <p:cNvSpPr txBox="1"/>
           <p:nvPr/>
         </p:nvSpPr>

--- a/public/fun/pack/pptx/review/보장점검양식_18_가족점검_바닷가등대.pptx
+++ b/public/fun/pack/pptx/review/보장점검양식_18_가족점검_바닷가등대.pptx
@@ -3347,7 +3347,7 @@
             <a:r>
               <a:rPr sz="3600" b="1" i="0">
                 <a:solidFill>
-                  <a:srgbClr val="11394A"/>
+                  <a:srgbClr val="11485F"/>
                 </a:solidFill>
               </a:rPr>
               <a:t>우리 보험 점검 시간</a:t>
@@ -3385,7 +3385,7 @@
             <a:r>
               <a:rPr sz="1700" b="0" i="1">
                 <a:solidFill>
-                  <a:srgbClr val="11394A"/>
+                  <a:srgbClr val="11485F"/>
                 </a:solidFill>
               </a:rPr>
               <a:t>누구 보험료가 얼마인지 한눈에 봅니다</a:t>
@@ -3487,7 +3487,7 @@
             <a:avLst/>
           </a:prstGeom>
           <a:solidFill>
-            <a:srgbClr val="25799D"/>
+            <a:srgbClr val="2695C5"/>
           </a:solidFill>
           <a:ln>
             <a:noFill/>
@@ -3583,30 +3583,30 @@
                   <a:tcPr anchor="ctr" marL="73152" marR="73152">
                     <a:lnL w="9525" cap="flat" cmpd="sng" algn="ctr">
                       <a:solidFill>
-                        <a:srgbClr val="25799D"/>
+                        <a:srgbClr val="2695C5"/>
                       </a:solidFill>
                       <a:prstDash val="solid"/>
                     </a:lnL>
                     <a:lnR w="9525" cap="flat" cmpd="sng" algn="ctr">
                       <a:solidFill>
-                        <a:srgbClr val="25799D"/>
+                        <a:srgbClr val="2695C5"/>
                       </a:solidFill>
                       <a:prstDash val="solid"/>
                     </a:lnR>
                     <a:lnT w="9525" cap="flat" cmpd="sng" algn="ctr">
                       <a:solidFill>
-                        <a:srgbClr val="25799D"/>
+                        <a:srgbClr val="2695C5"/>
                       </a:solidFill>
                       <a:prstDash val="solid"/>
                     </a:lnT>
                     <a:lnB w="9525" cap="flat" cmpd="sng" algn="ctr">
                       <a:solidFill>
-                        <a:srgbClr val="25799D"/>
+                        <a:srgbClr val="2695C5"/>
                       </a:solidFill>
                       <a:prstDash val="solid"/>
                     </a:lnB>
                     <a:solidFill>
-                      <a:srgbClr val="25799D"/>
+                      <a:srgbClr val="2695C5"/>
                     </a:solidFill>
                   </a:tcPr>
                 </a:tc>
@@ -3629,30 +3629,30 @@
                   <a:tcPr anchor="ctr" marL="73152" marR="73152">
                     <a:lnL w="9525" cap="flat" cmpd="sng" algn="ctr">
                       <a:solidFill>
-                        <a:srgbClr val="25799D"/>
+                        <a:srgbClr val="2695C5"/>
                       </a:solidFill>
                       <a:prstDash val="solid"/>
                     </a:lnL>
                     <a:lnR w="9525" cap="flat" cmpd="sng" algn="ctr">
                       <a:solidFill>
-                        <a:srgbClr val="25799D"/>
+                        <a:srgbClr val="2695C5"/>
                       </a:solidFill>
                       <a:prstDash val="solid"/>
                     </a:lnR>
                     <a:lnT w="9525" cap="flat" cmpd="sng" algn="ctr">
                       <a:solidFill>
-                        <a:srgbClr val="25799D"/>
+                        <a:srgbClr val="2695C5"/>
                       </a:solidFill>
                       <a:prstDash val="solid"/>
                     </a:lnT>
                     <a:lnB w="9525" cap="flat" cmpd="sng" algn="ctr">
                       <a:solidFill>
-                        <a:srgbClr val="25799D"/>
+                        <a:srgbClr val="2695C5"/>
                       </a:solidFill>
                       <a:prstDash val="solid"/>
                     </a:lnB>
                     <a:solidFill>
-                      <a:srgbClr val="25799D"/>
+                      <a:srgbClr val="2695C5"/>
                     </a:solidFill>
                   </a:tcPr>
                 </a:tc>
@@ -3675,30 +3675,30 @@
                   <a:tcPr anchor="ctr" marL="73152" marR="73152">
                     <a:lnL w="9525" cap="flat" cmpd="sng" algn="ctr">
                       <a:solidFill>
-                        <a:srgbClr val="25799D"/>
+                        <a:srgbClr val="2695C5"/>
                       </a:solidFill>
                       <a:prstDash val="solid"/>
                     </a:lnL>
                     <a:lnR w="9525" cap="flat" cmpd="sng" algn="ctr">
                       <a:solidFill>
-                        <a:srgbClr val="25799D"/>
+                        <a:srgbClr val="2695C5"/>
                       </a:solidFill>
                       <a:prstDash val="solid"/>
                     </a:lnR>
                     <a:lnT w="9525" cap="flat" cmpd="sng" algn="ctr">
                       <a:solidFill>
-                        <a:srgbClr val="25799D"/>
+                        <a:srgbClr val="2695C5"/>
                       </a:solidFill>
                       <a:prstDash val="solid"/>
                     </a:lnT>
                     <a:lnB w="9525" cap="flat" cmpd="sng" algn="ctr">
                       <a:solidFill>
-                        <a:srgbClr val="25799D"/>
+                        <a:srgbClr val="2695C5"/>
                       </a:solidFill>
                       <a:prstDash val="solid"/>
                     </a:lnB>
                     <a:solidFill>
-                      <a:srgbClr val="25799D"/>
+                      <a:srgbClr val="2695C5"/>
                     </a:solidFill>
                   </a:tcPr>
                 </a:tc>
@@ -3721,30 +3721,30 @@
                   <a:tcPr anchor="ctr" marL="73152" marR="73152">
                     <a:lnL w="9525" cap="flat" cmpd="sng" algn="ctr">
                       <a:solidFill>
-                        <a:srgbClr val="25799D"/>
+                        <a:srgbClr val="2695C5"/>
                       </a:solidFill>
                       <a:prstDash val="solid"/>
                     </a:lnL>
                     <a:lnR w="9525" cap="flat" cmpd="sng" algn="ctr">
                       <a:solidFill>
-                        <a:srgbClr val="25799D"/>
+                        <a:srgbClr val="2695C5"/>
                       </a:solidFill>
                       <a:prstDash val="solid"/>
                     </a:lnR>
                     <a:lnT w="9525" cap="flat" cmpd="sng" algn="ctr">
                       <a:solidFill>
-                        <a:srgbClr val="25799D"/>
+                        <a:srgbClr val="2695C5"/>
                       </a:solidFill>
                       <a:prstDash val="solid"/>
                     </a:lnT>
                     <a:lnB w="9525" cap="flat" cmpd="sng" algn="ctr">
                       <a:solidFill>
-                        <a:srgbClr val="25799D"/>
+                        <a:srgbClr val="2695C5"/>
                       </a:solidFill>
                       <a:prstDash val="solid"/>
                     </a:lnB>
                     <a:solidFill>
-                      <a:srgbClr val="25799D"/>
+                      <a:srgbClr val="2695C5"/>
                     </a:solidFill>
                   </a:tcPr>
                 </a:tc>
@@ -3759,7 +3759,7 @@
                       <a:r>
                         <a:rPr sz="1600" b="1">
                           <a:solidFill>
-                            <a:srgbClr val="11394A"/>
+                            <a:srgbClr val="11485F"/>
                           </a:solidFill>
                         </a:rPr>
                         <a:t>이름</a:t>
@@ -3769,30 +3769,30 @@
                   <a:tcPr anchor="ctr" marL="73152" marR="73152">
                     <a:lnL w="9525" cap="flat" cmpd="sng" algn="ctr">
                       <a:solidFill>
-                        <a:srgbClr val="CCE9F5"/>
+                        <a:srgbClr val="D1EEFA"/>
                       </a:solidFill>
                       <a:prstDash val="solid"/>
                     </a:lnL>
                     <a:lnR w="9525" cap="flat" cmpd="sng" algn="ctr">
                       <a:solidFill>
-                        <a:srgbClr val="CCE9F5"/>
+                        <a:srgbClr val="D1EEFA"/>
                       </a:solidFill>
                       <a:prstDash val="solid"/>
                     </a:lnR>
                     <a:lnT w="9525" cap="flat" cmpd="sng" algn="ctr">
                       <a:solidFill>
-                        <a:srgbClr val="CCE9F5"/>
+                        <a:srgbClr val="D1EEFA"/>
                       </a:solidFill>
                       <a:prstDash val="solid"/>
                     </a:lnT>
                     <a:lnB w="9525" cap="flat" cmpd="sng" algn="ctr">
                       <a:solidFill>
-                        <a:srgbClr val="CCE9F5"/>
+                        <a:srgbClr val="D1EEFA"/>
                       </a:solidFill>
                       <a:prstDash val="solid"/>
                     </a:lnB>
                     <a:solidFill>
-                      <a:srgbClr val="CCE9F5"/>
+                      <a:srgbClr val="D1EEFA"/>
                     </a:solidFill>
                   </a:tcPr>
                 </a:tc>
@@ -3815,25 +3815,25 @@
                   <a:tcPr anchor="ctr" marL="73152" marR="73152">
                     <a:lnL w="9525" cap="flat" cmpd="sng" algn="ctr">
                       <a:solidFill>
-                        <a:srgbClr val="CCE9F5"/>
+                        <a:srgbClr val="D1EEFA"/>
                       </a:solidFill>
                       <a:prstDash val="solid"/>
                     </a:lnL>
                     <a:lnR w="9525" cap="flat" cmpd="sng" algn="ctr">
                       <a:solidFill>
-                        <a:srgbClr val="CCE9F5"/>
+                        <a:srgbClr val="D1EEFA"/>
                       </a:solidFill>
                       <a:prstDash val="solid"/>
                     </a:lnR>
                     <a:lnT w="9525" cap="flat" cmpd="sng" algn="ctr">
                       <a:solidFill>
-                        <a:srgbClr val="CCE9F5"/>
+                        <a:srgbClr val="D1EEFA"/>
                       </a:solidFill>
                       <a:prstDash val="solid"/>
                     </a:lnT>
                     <a:lnB w="9525" cap="flat" cmpd="sng" algn="ctr">
                       <a:solidFill>
-                        <a:srgbClr val="CCE9F5"/>
+                        <a:srgbClr val="D1EEFA"/>
                       </a:solidFill>
                       <a:prstDash val="solid"/>
                     </a:lnB>
@@ -3861,25 +3861,25 @@
                   <a:tcPr anchor="ctr" marL="73152" marR="73152">
                     <a:lnL w="9525" cap="flat" cmpd="sng" algn="ctr">
                       <a:solidFill>
-                        <a:srgbClr val="CCE9F5"/>
+                        <a:srgbClr val="D1EEFA"/>
                       </a:solidFill>
                       <a:prstDash val="solid"/>
                     </a:lnL>
                     <a:lnR w="9525" cap="flat" cmpd="sng" algn="ctr">
                       <a:solidFill>
-                        <a:srgbClr val="CCE9F5"/>
+                        <a:srgbClr val="D1EEFA"/>
                       </a:solidFill>
                       <a:prstDash val="solid"/>
                     </a:lnR>
                     <a:lnT w="9525" cap="flat" cmpd="sng" algn="ctr">
                       <a:solidFill>
-                        <a:srgbClr val="CCE9F5"/>
+                        <a:srgbClr val="D1EEFA"/>
                       </a:solidFill>
                       <a:prstDash val="solid"/>
                     </a:lnT>
                     <a:lnB w="9525" cap="flat" cmpd="sng" algn="ctr">
                       <a:solidFill>
-                        <a:srgbClr val="CCE9F5"/>
+                        <a:srgbClr val="D1EEFA"/>
                       </a:solidFill>
                       <a:prstDash val="solid"/>
                     </a:lnB>
@@ -3907,25 +3907,25 @@
                   <a:tcPr anchor="ctr" marL="73152" marR="73152">
                     <a:lnL w="9525" cap="flat" cmpd="sng" algn="ctr">
                       <a:solidFill>
-                        <a:srgbClr val="CCE9F5"/>
+                        <a:srgbClr val="D1EEFA"/>
                       </a:solidFill>
                       <a:prstDash val="solid"/>
                     </a:lnL>
                     <a:lnR w="9525" cap="flat" cmpd="sng" algn="ctr">
                       <a:solidFill>
-                        <a:srgbClr val="CCE9F5"/>
+                        <a:srgbClr val="D1EEFA"/>
                       </a:solidFill>
                       <a:prstDash val="solid"/>
                     </a:lnR>
                     <a:lnT w="9525" cap="flat" cmpd="sng" algn="ctr">
                       <a:solidFill>
-                        <a:srgbClr val="CCE9F5"/>
+                        <a:srgbClr val="D1EEFA"/>
                       </a:solidFill>
                       <a:prstDash val="solid"/>
                     </a:lnT>
                     <a:lnB w="9525" cap="flat" cmpd="sng" algn="ctr">
                       <a:solidFill>
-                        <a:srgbClr val="CCE9F5"/>
+                        <a:srgbClr val="D1EEFA"/>
                       </a:solidFill>
                       <a:prstDash val="solid"/>
                     </a:lnB>
@@ -3945,7 +3945,7 @@
                       <a:r>
                         <a:rPr sz="1600" b="1">
                           <a:solidFill>
-                            <a:srgbClr val="11394A"/>
+                            <a:srgbClr val="11485F"/>
                           </a:solidFill>
                         </a:rPr>
                         <a:t>나이</a:t>
@@ -3955,30 +3955,30 @@
                   <a:tcPr anchor="ctr" marL="73152" marR="73152">
                     <a:lnL w="9525" cap="flat" cmpd="sng" algn="ctr">
                       <a:solidFill>
-                        <a:srgbClr val="CCE9F5"/>
+                        <a:srgbClr val="D1EEFA"/>
                       </a:solidFill>
                       <a:prstDash val="solid"/>
                     </a:lnL>
                     <a:lnR w="9525" cap="flat" cmpd="sng" algn="ctr">
                       <a:solidFill>
-                        <a:srgbClr val="CCE9F5"/>
+                        <a:srgbClr val="D1EEFA"/>
                       </a:solidFill>
                       <a:prstDash val="solid"/>
                     </a:lnR>
                     <a:lnT w="9525" cap="flat" cmpd="sng" algn="ctr">
                       <a:solidFill>
-                        <a:srgbClr val="CCE9F5"/>
+                        <a:srgbClr val="D1EEFA"/>
                       </a:solidFill>
                       <a:prstDash val="solid"/>
                     </a:lnT>
                     <a:lnB w="9525" cap="flat" cmpd="sng" algn="ctr">
                       <a:solidFill>
-                        <a:srgbClr val="CCE9F5"/>
+                        <a:srgbClr val="D1EEFA"/>
                       </a:solidFill>
                       <a:prstDash val="solid"/>
                     </a:lnB>
                     <a:solidFill>
-                      <a:srgbClr val="CCE9F5"/>
+                      <a:srgbClr val="D1EEFA"/>
                     </a:solidFill>
                   </a:tcPr>
                 </a:tc>
@@ -4001,30 +4001,30 @@
                   <a:tcPr anchor="ctr" marL="73152" marR="73152">
                     <a:lnL w="9525" cap="flat" cmpd="sng" algn="ctr">
                       <a:solidFill>
-                        <a:srgbClr val="CCE9F5"/>
+                        <a:srgbClr val="D1EEFA"/>
                       </a:solidFill>
                       <a:prstDash val="solid"/>
                     </a:lnL>
                     <a:lnR w="9525" cap="flat" cmpd="sng" algn="ctr">
                       <a:solidFill>
-                        <a:srgbClr val="CCE9F5"/>
+                        <a:srgbClr val="D1EEFA"/>
                       </a:solidFill>
                       <a:prstDash val="solid"/>
                     </a:lnR>
                     <a:lnT w="9525" cap="flat" cmpd="sng" algn="ctr">
                       <a:solidFill>
-                        <a:srgbClr val="CCE9F5"/>
+                        <a:srgbClr val="D1EEFA"/>
                       </a:solidFill>
                       <a:prstDash val="solid"/>
                     </a:lnT>
                     <a:lnB w="9525" cap="flat" cmpd="sng" algn="ctr">
                       <a:solidFill>
-                        <a:srgbClr val="CCE9F5"/>
+                        <a:srgbClr val="D1EEFA"/>
                       </a:solidFill>
                       <a:prstDash val="solid"/>
                     </a:lnB>
                     <a:solidFill>
-                      <a:srgbClr val="EEF7FB"/>
+                      <a:srgbClr val="EEF8FC"/>
                     </a:solidFill>
                   </a:tcPr>
                 </a:tc>
@@ -4047,30 +4047,30 @@
                   <a:tcPr anchor="ctr" marL="73152" marR="73152">
                     <a:lnL w="9525" cap="flat" cmpd="sng" algn="ctr">
                       <a:solidFill>
-                        <a:srgbClr val="CCE9F5"/>
+                        <a:srgbClr val="D1EEFA"/>
                       </a:solidFill>
                       <a:prstDash val="solid"/>
                     </a:lnL>
                     <a:lnR w="9525" cap="flat" cmpd="sng" algn="ctr">
                       <a:solidFill>
-                        <a:srgbClr val="CCE9F5"/>
+                        <a:srgbClr val="D1EEFA"/>
                       </a:solidFill>
                       <a:prstDash val="solid"/>
                     </a:lnR>
                     <a:lnT w="9525" cap="flat" cmpd="sng" algn="ctr">
                       <a:solidFill>
-                        <a:srgbClr val="CCE9F5"/>
+                        <a:srgbClr val="D1EEFA"/>
                       </a:solidFill>
                       <a:prstDash val="solid"/>
                     </a:lnT>
                     <a:lnB w="9525" cap="flat" cmpd="sng" algn="ctr">
                       <a:solidFill>
-                        <a:srgbClr val="CCE9F5"/>
+                        <a:srgbClr val="D1EEFA"/>
                       </a:solidFill>
                       <a:prstDash val="solid"/>
                     </a:lnB>
                     <a:solidFill>
-                      <a:srgbClr val="EEF7FB"/>
+                      <a:srgbClr val="EEF8FC"/>
                     </a:solidFill>
                   </a:tcPr>
                 </a:tc>
@@ -4093,30 +4093,30 @@
                   <a:tcPr anchor="ctr" marL="73152" marR="73152">
                     <a:lnL w="9525" cap="flat" cmpd="sng" algn="ctr">
                       <a:solidFill>
-                        <a:srgbClr val="CCE9F5"/>
+                        <a:srgbClr val="D1EEFA"/>
                       </a:solidFill>
                       <a:prstDash val="solid"/>
                     </a:lnL>
                     <a:lnR w="9525" cap="flat" cmpd="sng" algn="ctr">
                       <a:solidFill>
-                        <a:srgbClr val="CCE9F5"/>
+                        <a:srgbClr val="D1EEFA"/>
                       </a:solidFill>
                       <a:prstDash val="solid"/>
                     </a:lnR>
                     <a:lnT w="9525" cap="flat" cmpd="sng" algn="ctr">
                       <a:solidFill>
-                        <a:srgbClr val="CCE9F5"/>
+                        <a:srgbClr val="D1EEFA"/>
                       </a:solidFill>
                       <a:prstDash val="solid"/>
                     </a:lnT>
                     <a:lnB w="9525" cap="flat" cmpd="sng" algn="ctr">
                       <a:solidFill>
-                        <a:srgbClr val="CCE9F5"/>
+                        <a:srgbClr val="D1EEFA"/>
                       </a:solidFill>
                       <a:prstDash val="solid"/>
                     </a:lnB>
                     <a:solidFill>
-                      <a:srgbClr val="EEF7FB"/>
+                      <a:srgbClr val="EEF8FC"/>
                     </a:solidFill>
                   </a:tcPr>
                 </a:tc>
@@ -4131,7 +4131,7 @@
                       <a:r>
                         <a:rPr sz="1600" b="1">
                           <a:solidFill>
-                            <a:srgbClr val="11394A"/>
+                            <a:srgbClr val="11485F"/>
                           </a:solidFill>
                         </a:rPr>
                         <a:t>직업·학교</a:t>
@@ -4141,30 +4141,30 @@
                   <a:tcPr anchor="ctr" marL="73152" marR="73152">
                     <a:lnL w="9525" cap="flat" cmpd="sng" algn="ctr">
                       <a:solidFill>
-                        <a:srgbClr val="CCE9F5"/>
+                        <a:srgbClr val="D1EEFA"/>
                       </a:solidFill>
                       <a:prstDash val="solid"/>
                     </a:lnL>
                     <a:lnR w="9525" cap="flat" cmpd="sng" algn="ctr">
                       <a:solidFill>
-                        <a:srgbClr val="CCE9F5"/>
+                        <a:srgbClr val="D1EEFA"/>
                       </a:solidFill>
                       <a:prstDash val="solid"/>
                     </a:lnR>
                     <a:lnT w="9525" cap="flat" cmpd="sng" algn="ctr">
                       <a:solidFill>
-                        <a:srgbClr val="CCE9F5"/>
+                        <a:srgbClr val="D1EEFA"/>
                       </a:solidFill>
                       <a:prstDash val="solid"/>
                     </a:lnT>
                     <a:lnB w="9525" cap="flat" cmpd="sng" algn="ctr">
                       <a:solidFill>
-                        <a:srgbClr val="CCE9F5"/>
+                        <a:srgbClr val="D1EEFA"/>
                       </a:solidFill>
                       <a:prstDash val="solid"/>
                     </a:lnB>
                     <a:solidFill>
-                      <a:srgbClr val="CCE9F5"/>
+                      <a:srgbClr val="D1EEFA"/>
                     </a:solidFill>
                   </a:tcPr>
                 </a:tc>
@@ -4187,25 +4187,25 @@
                   <a:tcPr anchor="ctr" marL="73152" marR="73152">
                     <a:lnL w="9525" cap="flat" cmpd="sng" algn="ctr">
                       <a:solidFill>
-                        <a:srgbClr val="CCE9F5"/>
+                        <a:srgbClr val="D1EEFA"/>
                       </a:solidFill>
                       <a:prstDash val="solid"/>
                     </a:lnL>
                     <a:lnR w="9525" cap="flat" cmpd="sng" algn="ctr">
                       <a:solidFill>
-                        <a:srgbClr val="CCE9F5"/>
+                        <a:srgbClr val="D1EEFA"/>
                       </a:solidFill>
                       <a:prstDash val="solid"/>
                     </a:lnR>
                     <a:lnT w="9525" cap="flat" cmpd="sng" algn="ctr">
                       <a:solidFill>
-                        <a:srgbClr val="CCE9F5"/>
+                        <a:srgbClr val="D1EEFA"/>
                       </a:solidFill>
                       <a:prstDash val="solid"/>
                     </a:lnT>
                     <a:lnB w="9525" cap="flat" cmpd="sng" algn="ctr">
                       <a:solidFill>
-                        <a:srgbClr val="CCE9F5"/>
+                        <a:srgbClr val="D1EEFA"/>
                       </a:solidFill>
                       <a:prstDash val="solid"/>
                     </a:lnB>
@@ -4233,25 +4233,25 @@
                   <a:tcPr anchor="ctr" marL="73152" marR="73152">
                     <a:lnL w="9525" cap="flat" cmpd="sng" algn="ctr">
                       <a:solidFill>
-                        <a:srgbClr val="CCE9F5"/>
+                        <a:srgbClr val="D1EEFA"/>
                       </a:solidFill>
                       <a:prstDash val="solid"/>
                     </a:lnL>
                     <a:lnR w="9525" cap="flat" cmpd="sng" algn="ctr">
                       <a:solidFill>
-                        <a:srgbClr val="CCE9F5"/>
+                        <a:srgbClr val="D1EEFA"/>
                       </a:solidFill>
                       <a:prstDash val="solid"/>
                     </a:lnR>
                     <a:lnT w="9525" cap="flat" cmpd="sng" algn="ctr">
                       <a:solidFill>
-                        <a:srgbClr val="CCE9F5"/>
+                        <a:srgbClr val="D1EEFA"/>
                       </a:solidFill>
                       <a:prstDash val="solid"/>
                     </a:lnT>
                     <a:lnB w="9525" cap="flat" cmpd="sng" algn="ctr">
                       <a:solidFill>
-                        <a:srgbClr val="CCE9F5"/>
+                        <a:srgbClr val="D1EEFA"/>
                       </a:solidFill>
                       <a:prstDash val="solid"/>
                     </a:lnB>
@@ -4279,25 +4279,25 @@
                   <a:tcPr anchor="ctr" marL="73152" marR="73152">
                     <a:lnL w="9525" cap="flat" cmpd="sng" algn="ctr">
                       <a:solidFill>
-                        <a:srgbClr val="CCE9F5"/>
+                        <a:srgbClr val="D1EEFA"/>
                       </a:solidFill>
                       <a:prstDash val="solid"/>
                     </a:lnL>
                     <a:lnR w="9525" cap="flat" cmpd="sng" algn="ctr">
                       <a:solidFill>
-                        <a:srgbClr val="CCE9F5"/>
+                        <a:srgbClr val="D1EEFA"/>
                       </a:solidFill>
                       <a:prstDash val="solid"/>
                     </a:lnR>
                     <a:lnT w="9525" cap="flat" cmpd="sng" algn="ctr">
                       <a:solidFill>
-                        <a:srgbClr val="CCE9F5"/>
+                        <a:srgbClr val="D1EEFA"/>
                       </a:solidFill>
                       <a:prstDash val="solid"/>
                     </a:lnT>
                     <a:lnB w="9525" cap="flat" cmpd="sng" algn="ctr">
                       <a:solidFill>
-                        <a:srgbClr val="CCE9F5"/>
+                        <a:srgbClr val="D1EEFA"/>
                       </a:solidFill>
                       <a:prstDash val="solid"/>
                     </a:lnB>
@@ -4317,7 +4317,7 @@
                       <a:r>
                         <a:rPr sz="1600" b="1">
                           <a:solidFill>
-                            <a:srgbClr val="11394A"/>
+                            <a:srgbClr val="11485F"/>
                           </a:solidFill>
                         </a:rPr>
                         <a:t>메모</a:t>
@@ -4327,30 +4327,30 @@
                   <a:tcPr anchor="ctr" marL="73152" marR="73152">
                     <a:lnL w="9525" cap="flat" cmpd="sng" algn="ctr">
                       <a:solidFill>
-                        <a:srgbClr val="CCE9F5"/>
+                        <a:srgbClr val="D1EEFA"/>
                       </a:solidFill>
                       <a:prstDash val="solid"/>
                     </a:lnL>
                     <a:lnR w="9525" cap="flat" cmpd="sng" algn="ctr">
                       <a:solidFill>
-                        <a:srgbClr val="CCE9F5"/>
+                        <a:srgbClr val="D1EEFA"/>
                       </a:solidFill>
                       <a:prstDash val="solid"/>
                     </a:lnR>
                     <a:lnT w="9525" cap="flat" cmpd="sng" algn="ctr">
                       <a:solidFill>
-                        <a:srgbClr val="CCE9F5"/>
+                        <a:srgbClr val="D1EEFA"/>
                       </a:solidFill>
                       <a:prstDash val="solid"/>
                     </a:lnT>
                     <a:lnB w="9525" cap="flat" cmpd="sng" algn="ctr">
                       <a:solidFill>
-                        <a:srgbClr val="CCE9F5"/>
+                        <a:srgbClr val="D1EEFA"/>
                       </a:solidFill>
                       <a:prstDash val="solid"/>
                     </a:lnB>
                     <a:solidFill>
-                      <a:srgbClr val="CCE9F5"/>
+                      <a:srgbClr val="D1EEFA"/>
                     </a:solidFill>
                   </a:tcPr>
                 </a:tc>
@@ -4373,30 +4373,30 @@
                   <a:tcPr anchor="ctr" marL="73152" marR="73152">
                     <a:lnL w="9525" cap="flat" cmpd="sng" algn="ctr">
                       <a:solidFill>
-                        <a:srgbClr val="CCE9F5"/>
+                        <a:srgbClr val="D1EEFA"/>
                       </a:solidFill>
                       <a:prstDash val="solid"/>
                     </a:lnL>
                     <a:lnR w="9525" cap="flat" cmpd="sng" algn="ctr">
                       <a:solidFill>
-                        <a:srgbClr val="CCE9F5"/>
+                        <a:srgbClr val="D1EEFA"/>
                       </a:solidFill>
                       <a:prstDash val="solid"/>
                     </a:lnR>
                     <a:lnT w="9525" cap="flat" cmpd="sng" algn="ctr">
                       <a:solidFill>
-                        <a:srgbClr val="CCE9F5"/>
+                        <a:srgbClr val="D1EEFA"/>
                       </a:solidFill>
                       <a:prstDash val="solid"/>
                     </a:lnT>
                     <a:lnB w="9525" cap="flat" cmpd="sng" algn="ctr">
                       <a:solidFill>
-                        <a:srgbClr val="CCE9F5"/>
+                        <a:srgbClr val="D1EEFA"/>
                       </a:solidFill>
                       <a:prstDash val="solid"/>
                     </a:lnB>
                     <a:solidFill>
-                      <a:srgbClr val="EEF7FB"/>
+                      <a:srgbClr val="EEF8FC"/>
                     </a:solidFill>
                   </a:tcPr>
                 </a:tc>
@@ -4419,30 +4419,30 @@
                   <a:tcPr anchor="ctr" marL="73152" marR="73152">
                     <a:lnL w="9525" cap="flat" cmpd="sng" algn="ctr">
                       <a:solidFill>
-                        <a:srgbClr val="CCE9F5"/>
+                        <a:srgbClr val="D1EEFA"/>
                       </a:solidFill>
                       <a:prstDash val="solid"/>
                     </a:lnL>
                     <a:lnR w="9525" cap="flat" cmpd="sng" algn="ctr">
                       <a:solidFill>
-                        <a:srgbClr val="CCE9F5"/>
+                        <a:srgbClr val="D1EEFA"/>
                       </a:solidFill>
                       <a:prstDash val="solid"/>
                     </a:lnR>
                     <a:lnT w="9525" cap="flat" cmpd="sng" algn="ctr">
                       <a:solidFill>
-                        <a:srgbClr val="CCE9F5"/>
+                        <a:srgbClr val="D1EEFA"/>
                       </a:solidFill>
                       <a:prstDash val="solid"/>
                     </a:lnT>
                     <a:lnB w="9525" cap="flat" cmpd="sng" algn="ctr">
                       <a:solidFill>
-                        <a:srgbClr val="CCE9F5"/>
+                        <a:srgbClr val="D1EEFA"/>
                       </a:solidFill>
                       <a:prstDash val="solid"/>
                     </a:lnB>
                     <a:solidFill>
-                      <a:srgbClr val="EEF7FB"/>
+                      <a:srgbClr val="EEF8FC"/>
                     </a:solidFill>
                   </a:tcPr>
                 </a:tc>
@@ -4465,30 +4465,30 @@
                   <a:tcPr anchor="ctr" marL="73152" marR="73152">
                     <a:lnL w="9525" cap="flat" cmpd="sng" algn="ctr">
                       <a:solidFill>
-                        <a:srgbClr val="CCE9F5"/>
+                        <a:srgbClr val="D1EEFA"/>
                       </a:solidFill>
                       <a:prstDash val="solid"/>
                     </a:lnL>
                     <a:lnR w="9525" cap="flat" cmpd="sng" algn="ctr">
                       <a:solidFill>
-                        <a:srgbClr val="CCE9F5"/>
+                        <a:srgbClr val="D1EEFA"/>
                       </a:solidFill>
                       <a:prstDash val="solid"/>
                     </a:lnR>
                     <a:lnT w="9525" cap="flat" cmpd="sng" algn="ctr">
                       <a:solidFill>
-                        <a:srgbClr val="CCE9F5"/>
+                        <a:srgbClr val="D1EEFA"/>
                       </a:solidFill>
                       <a:prstDash val="solid"/>
                     </a:lnT>
                     <a:lnB w="9525" cap="flat" cmpd="sng" algn="ctr">
                       <a:solidFill>
-                        <a:srgbClr val="CCE9F5"/>
+                        <a:srgbClr val="D1EEFA"/>
                       </a:solidFill>
                       <a:prstDash val="solid"/>
                     </a:lnB>
                     <a:solidFill>
-                      <a:srgbClr val="EEF7FB"/>
+                      <a:srgbClr val="EEF8FC"/>
                     </a:solidFill>
                   </a:tcPr>
                 </a:tc>
@@ -4538,7 +4538,7 @@
             <a:avLst/>
           </a:prstGeom>
           <a:solidFill>
-            <a:srgbClr val="25799D"/>
+            <a:srgbClr val="2695C5"/>
           </a:solidFill>
           <a:ln>
             <a:noFill/>
@@ -4635,30 +4635,30 @@
                   <a:tcPr anchor="ctr" marL="73152" marR="73152">
                     <a:lnL w="9525" cap="flat" cmpd="sng" algn="ctr">
                       <a:solidFill>
-                        <a:srgbClr val="25799D"/>
+                        <a:srgbClr val="2695C5"/>
                       </a:solidFill>
                       <a:prstDash val="solid"/>
                     </a:lnL>
                     <a:lnR w="9525" cap="flat" cmpd="sng" algn="ctr">
                       <a:solidFill>
-                        <a:srgbClr val="25799D"/>
+                        <a:srgbClr val="2695C5"/>
                       </a:solidFill>
                       <a:prstDash val="solid"/>
                     </a:lnR>
                     <a:lnT w="9525" cap="flat" cmpd="sng" algn="ctr">
                       <a:solidFill>
-                        <a:srgbClr val="25799D"/>
+                        <a:srgbClr val="2695C5"/>
                       </a:solidFill>
                       <a:prstDash val="solid"/>
                     </a:lnT>
                     <a:lnB w="9525" cap="flat" cmpd="sng" algn="ctr">
                       <a:solidFill>
-                        <a:srgbClr val="25799D"/>
+                        <a:srgbClr val="2695C5"/>
                       </a:solidFill>
                       <a:prstDash val="solid"/>
                     </a:lnB>
                     <a:solidFill>
-                      <a:srgbClr val="25799D"/>
+                      <a:srgbClr val="2695C5"/>
                     </a:solidFill>
                   </a:tcPr>
                 </a:tc>
@@ -4681,30 +4681,30 @@
                   <a:tcPr anchor="ctr" marL="73152" marR="73152">
                     <a:lnL w="9525" cap="flat" cmpd="sng" algn="ctr">
                       <a:solidFill>
-                        <a:srgbClr val="25799D"/>
+                        <a:srgbClr val="2695C5"/>
                       </a:solidFill>
                       <a:prstDash val="solid"/>
                     </a:lnL>
                     <a:lnR w="9525" cap="flat" cmpd="sng" algn="ctr">
                       <a:solidFill>
-                        <a:srgbClr val="25799D"/>
+                        <a:srgbClr val="2695C5"/>
                       </a:solidFill>
                       <a:prstDash val="solid"/>
                     </a:lnR>
                     <a:lnT w="9525" cap="flat" cmpd="sng" algn="ctr">
                       <a:solidFill>
-                        <a:srgbClr val="25799D"/>
+                        <a:srgbClr val="2695C5"/>
                       </a:solidFill>
                       <a:prstDash val="solid"/>
                     </a:lnT>
                     <a:lnB w="9525" cap="flat" cmpd="sng" algn="ctr">
                       <a:solidFill>
-                        <a:srgbClr val="25799D"/>
+                        <a:srgbClr val="2695C5"/>
                       </a:solidFill>
                       <a:prstDash val="solid"/>
                     </a:lnB>
                     <a:solidFill>
-                      <a:srgbClr val="25799D"/>
+                      <a:srgbClr val="2695C5"/>
                     </a:solidFill>
                   </a:tcPr>
                 </a:tc>
@@ -4727,30 +4727,30 @@
                   <a:tcPr anchor="ctr" marL="73152" marR="73152">
                     <a:lnL w="9525" cap="flat" cmpd="sng" algn="ctr">
                       <a:solidFill>
-                        <a:srgbClr val="25799D"/>
+                        <a:srgbClr val="2695C5"/>
                       </a:solidFill>
                       <a:prstDash val="solid"/>
                     </a:lnL>
                     <a:lnR w="9525" cap="flat" cmpd="sng" algn="ctr">
                       <a:solidFill>
-                        <a:srgbClr val="25799D"/>
+                        <a:srgbClr val="2695C5"/>
                       </a:solidFill>
                       <a:prstDash val="solid"/>
                     </a:lnR>
                     <a:lnT w="9525" cap="flat" cmpd="sng" algn="ctr">
                       <a:solidFill>
-                        <a:srgbClr val="25799D"/>
+                        <a:srgbClr val="2695C5"/>
                       </a:solidFill>
                       <a:prstDash val="solid"/>
                     </a:lnT>
                     <a:lnB w="9525" cap="flat" cmpd="sng" algn="ctr">
                       <a:solidFill>
-                        <a:srgbClr val="25799D"/>
+                        <a:srgbClr val="2695C5"/>
                       </a:solidFill>
                       <a:prstDash val="solid"/>
                     </a:lnB>
                     <a:solidFill>
-                      <a:srgbClr val="25799D"/>
+                      <a:srgbClr val="2695C5"/>
                     </a:solidFill>
                   </a:tcPr>
                 </a:tc>
@@ -4773,30 +4773,30 @@
                   <a:tcPr anchor="ctr" marL="73152" marR="73152">
                     <a:lnL w="9525" cap="flat" cmpd="sng" algn="ctr">
                       <a:solidFill>
-                        <a:srgbClr val="25799D"/>
+                        <a:srgbClr val="2695C5"/>
                       </a:solidFill>
                       <a:prstDash val="solid"/>
                     </a:lnL>
                     <a:lnR w="9525" cap="flat" cmpd="sng" algn="ctr">
                       <a:solidFill>
-                        <a:srgbClr val="25799D"/>
+                        <a:srgbClr val="2695C5"/>
                       </a:solidFill>
                       <a:prstDash val="solid"/>
                     </a:lnR>
                     <a:lnT w="9525" cap="flat" cmpd="sng" algn="ctr">
                       <a:solidFill>
-                        <a:srgbClr val="25799D"/>
+                        <a:srgbClr val="2695C5"/>
                       </a:solidFill>
                       <a:prstDash val="solid"/>
                     </a:lnT>
                     <a:lnB w="9525" cap="flat" cmpd="sng" algn="ctr">
                       <a:solidFill>
-                        <a:srgbClr val="25799D"/>
+                        <a:srgbClr val="2695C5"/>
                       </a:solidFill>
                       <a:prstDash val="solid"/>
                     </a:lnB>
                     <a:solidFill>
-                      <a:srgbClr val="25799D"/>
+                      <a:srgbClr val="2695C5"/>
                     </a:solidFill>
                   </a:tcPr>
                 </a:tc>
@@ -4819,30 +4819,30 @@
                   <a:tcPr anchor="ctr" marL="73152" marR="73152">
                     <a:lnL w="9525" cap="flat" cmpd="sng" algn="ctr">
                       <a:solidFill>
-                        <a:srgbClr val="25799D"/>
+                        <a:srgbClr val="2695C5"/>
                       </a:solidFill>
                       <a:prstDash val="solid"/>
                     </a:lnL>
                     <a:lnR w="9525" cap="flat" cmpd="sng" algn="ctr">
                       <a:solidFill>
-                        <a:srgbClr val="25799D"/>
+                        <a:srgbClr val="2695C5"/>
                       </a:solidFill>
                       <a:prstDash val="solid"/>
                     </a:lnR>
                     <a:lnT w="9525" cap="flat" cmpd="sng" algn="ctr">
                       <a:solidFill>
-                        <a:srgbClr val="25799D"/>
+                        <a:srgbClr val="2695C5"/>
                       </a:solidFill>
                       <a:prstDash val="solid"/>
                     </a:lnT>
                     <a:lnB w="9525" cap="flat" cmpd="sng" algn="ctr">
                       <a:solidFill>
-                        <a:srgbClr val="25799D"/>
+                        <a:srgbClr val="2695C5"/>
                       </a:solidFill>
                       <a:prstDash val="solid"/>
                     </a:lnB>
                     <a:solidFill>
-                      <a:srgbClr val="25799D"/>
+                      <a:srgbClr val="2695C5"/>
                     </a:solidFill>
                   </a:tcPr>
                 </a:tc>
@@ -4867,25 +4867,25 @@
                   <a:tcPr anchor="ctr" marL="73152" marR="73152">
                     <a:lnL w="9525" cap="flat" cmpd="sng" algn="ctr">
                       <a:solidFill>
-                        <a:srgbClr val="CCE9F5"/>
+                        <a:srgbClr val="D1EEFA"/>
                       </a:solidFill>
                       <a:prstDash val="solid"/>
                     </a:lnL>
                     <a:lnR w="9525" cap="flat" cmpd="sng" algn="ctr">
                       <a:solidFill>
-                        <a:srgbClr val="CCE9F5"/>
+                        <a:srgbClr val="D1EEFA"/>
                       </a:solidFill>
                       <a:prstDash val="solid"/>
                     </a:lnR>
                     <a:lnT w="9525" cap="flat" cmpd="sng" algn="ctr">
                       <a:solidFill>
-                        <a:srgbClr val="CCE9F5"/>
+                        <a:srgbClr val="D1EEFA"/>
                       </a:solidFill>
                       <a:prstDash val="solid"/>
                     </a:lnT>
                     <a:lnB w="9525" cap="flat" cmpd="sng" algn="ctr">
                       <a:solidFill>
-                        <a:srgbClr val="CCE9F5"/>
+                        <a:srgbClr val="D1EEFA"/>
                       </a:solidFill>
                       <a:prstDash val="solid"/>
                     </a:lnB>
@@ -4913,25 +4913,25 @@
                   <a:tcPr anchor="ctr" marL="73152" marR="73152">
                     <a:lnL w="9525" cap="flat" cmpd="sng" algn="ctr">
                       <a:solidFill>
-                        <a:srgbClr val="CCE9F5"/>
+                        <a:srgbClr val="D1EEFA"/>
                       </a:solidFill>
                       <a:prstDash val="solid"/>
                     </a:lnL>
                     <a:lnR w="9525" cap="flat" cmpd="sng" algn="ctr">
                       <a:solidFill>
-                        <a:srgbClr val="CCE9F5"/>
+                        <a:srgbClr val="D1EEFA"/>
                       </a:solidFill>
                       <a:prstDash val="solid"/>
                     </a:lnR>
                     <a:lnT w="9525" cap="flat" cmpd="sng" algn="ctr">
                       <a:solidFill>
-                        <a:srgbClr val="CCE9F5"/>
+                        <a:srgbClr val="D1EEFA"/>
                       </a:solidFill>
                       <a:prstDash val="solid"/>
                     </a:lnT>
                     <a:lnB w="9525" cap="flat" cmpd="sng" algn="ctr">
                       <a:solidFill>
-                        <a:srgbClr val="CCE9F5"/>
+                        <a:srgbClr val="D1EEFA"/>
                       </a:solidFill>
                       <a:prstDash val="solid"/>
                     </a:lnB>
@@ -4959,25 +4959,25 @@
                   <a:tcPr anchor="ctr" marL="73152" marR="73152">
                     <a:lnL w="9525" cap="flat" cmpd="sng" algn="ctr">
                       <a:solidFill>
-                        <a:srgbClr val="CCE9F5"/>
+                        <a:srgbClr val="D1EEFA"/>
                       </a:solidFill>
                       <a:prstDash val="solid"/>
                     </a:lnL>
                     <a:lnR w="9525" cap="flat" cmpd="sng" algn="ctr">
                       <a:solidFill>
-                        <a:srgbClr val="CCE9F5"/>
+                        <a:srgbClr val="D1EEFA"/>
                       </a:solidFill>
                       <a:prstDash val="solid"/>
                     </a:lnR>
                     <a:lnT w="9525" cap="flat" cmpd="sng" algn="ctr">
                       <a:solidFill>
-                        <a:srgbClr val="CCE9F5"/>
+                        <a:srgbClr val="D1EEFA"/>
                       </a:solidFill>
                       <a:prstDash val="solid"/>
                     </a:lnT>
                     <a:lnB w="9525" cap="flat" cmpd="sng" algn="ctr">
                       <a:solidFill>
-                        <a:srgbClr val="CCE9F5"/>
+                        <a:srgbClr val="D1EEFA"/>
                       </a:solidFill>
                       <a:prstDash val="solid"/>
                     </a:lnB>
@@ -5005,25 +5005,25 @@
                   <a:tcPr anchor="ctr" marL="73152" marR="73152">
                     <a:lnL w="9525" cap="flat" cmpd="sng" algn="ctr">
                       <a:solidFill>
-                        <a:srgbClr val="CCE9F5"/>
+                        <a:srgbClr val="D1EEFA"/>
                       </a:solidFill>
                       <a:prstDash val="solid"/>
                     </a:lnL>
                     <a:lnR w="9525" cap="flat" cmpd="sng" algn="ctr">
                       <a:solidFill>
-                        <a:srgbClr val="CCE9F5"/>
+                        <a:srgbClr val="D1EEFA"/>
                       </a:solidFill>
                       <a:prstDash val="solid"/>
                     </a:lnR>
                     <a:lnT w="9525" cap="flat" cmpd="sng" algn="ctr">
                       <a:solidFill>
-                        <a:srgbClr val="CCE9F5"/>
+                        <a:srgbClr val="D1EEFA"/>
                       </a:solidFill>
                       <a:prstDash val="solid"/>
                     </a:lnT>
                     <a:lnB w="9525" cap="flat" cmpd="sng" algn="ctr">
                       <a:solidFill>
-                        <a:srgbClr val="CCE9F5"/>
+                        <a:srgbClr val="D1EEFA"/>
                       </a:solidFill>
                       <a:prstDash val="solid"/>
                     </a:lnB>
@@ -5051,25 +5051,25 @@
                   <a:tcPr anchor="ctr" marL="73152" marR="73152">
                     <a:lnL w="9525" cap="flat" cmpd="sng" algn="ctr">
                       <a:solidFill>
-                        <a:srgbClr val="CCE9F5"/>
+                        <a:srgbClr val="D1EEFA"/>
                       </a:solidFill>
                       <a:prstDash val="solid"/>
                     </a:lnL>
                     <a:lnR w="9525" cap="flat" cmpd="sng" algn="ctr">
                       <a:solidFill>
-                        <a:srgbClr val="CCE9F5"/>
+                        <a:srgbClr val="D1EEFA"/>
                       </a:solidFill>
                       <a:prstDash val="solid"/>
                     </a:lnR>
                     <a:lnT w="9525" cap="flat" cmpd="sng" algn="ctr">
                       <a:solidFill>
-                        <a:srgbClr val="CCE9F5"/>
+                        <a:srgbClr val="D1EEFA"/>
                       </a:solidFill>
                       <a:prstDash val="solid"/>
                     </a:lnT>
                     <a:lnB w="9525" cap="flat" cmpd="sng" algn="ctr">
                       <a:solidFill>
-                        <a:srgbClr val="CCE9F5"/>
+                        <a:srgbClr val="D1EEFA"/>
                       </a:solidFill>
                       <a:prstDash val="solid"/>
                     </a:lnB>
@@ -5099,30 +5099,30 @@
                   <a:tcPr anchor="ctr" marL="73152" marR="73152">
                     <a:lnL w="9525" cap="flat" cmpd="sng" algn="ctr">
                       <a:solidFill>
-                        <a:srgbClr val="CCE9F5"/>
+                        <a:srgbClr val="D1EEFA"/>
                       </a:solidFill>
                       <a:prstDash val="solid"/>
                     </a:lnL>
                     <a:lnR w="9525" cap="flat" cmpd="sng" algn="ctr">
                       <a:solidFill>
-                        <a:srgbClr val="CCE9F5"/>
+                        <a:srgbClr val="D1EEFA"/>
                       </a:solidFill>
                       <a:prstDash val="solid"/>
                     </a:lnR>
                     <a:lnT w="9525" cap="flat" cmpd="sng" algn="ctr">
                       <a:solidFill>
-                        <a:srgbClr val="CCE9F5"/>
+                        <a:srgbClr val="D1EEFA"/>
                       </a:solidFill>
                       <a:prstDash val="solid"/>
                     </a:lnT>
                     <a:lnB w="9525" cap="flat" cmpd="sng" algn="ctr">
                       <a:solidFill>
-                        <a:srgbClr val="CCE9F5"/>
+                        <a:srgbClr val="D1EEFA"/>
                       </a:solidFill>
                       <a:prstDash val="solid"/>
                     </a:lnB>
                     <a:solidFill>
-                      <a:srgbClr val="EEF7FB"/>
+                      <a:srgbClr val="EEF8FC"/>
                     </a:solidFill>
                   </a:tcPr>
                 </a:tc>
@@ -5145,30 +5145,30 @@
                   <a:tcPr anchor="ctr" marL="73152" marR="73152">
                     <a:lnL w="9525" cap="flat" cmpd="sng" algn="ctr">
                       <a:solidFill>
-                        <a:srgbClr val="CCE9F5"/>
+                        <a:srgbClr val="D1EEFA"/>
                       </a:solidFill>
                       <a:prstDash val="solid"/>
                     </a:lnL>
                     <a:lnR w="9525" cap="flat" cmpd="sng" algn="ctr">
                       <a:solidFill>
-                        <a:srgbClr val="CCE9F5"/>
+                        <a:srgbClr val="D1EEFA"/>
                       </a:solidFill>
                       <a:prstDash val="solid"/>
                     </a:lnR>
                     <a:lnT w="9525" cap="flat" cmpd="sng" algn="ctr">
                       <a:solidFill>
-                        <a:srgbClr val="CCE9F5"/>
+                        <a:srgbClr val="D1EEFA"/>
                       </a:solidFill>
                       <a:prstDash val="solid"/>
                     </a:lnT>
                     <a:lnB w="9525" cap="flat" cmpd="sng" algn="ctr">
                       <a:solidFill>
-                        <a:srgbClr val="CCE9F5"/>
+                        <a:srgbClr val="D1EEFA"/>
                       </a:solidFill>
                       <a:prstDash val="solid"/>
                     </a:lnB>
                     <a:solidFill>
-                      <a:srgbClr val="EEF7FB"/>
+                      <a:srgbClr val="EEF8FC"/>
                     </a:solidFill>
                   </a:tcPr>
                 </a:tc>
@@ -5191,30 +5191,30 @@
                   <a:tcPr anchor="ctr" marL="73152" marR="73152">
                     <a:lnL w="9525" cap="flat" cmpd="sng" algn="ctr">
                       <a:solidFill>
-                        <a:srgbClr val="CCE9F5"/>
+                        <a:srgbClr val="D1EEFA"/>
                       </a:solidFill>
                       <a:prstDash val="solid"/>
                     </a:lnL>
                     <a:lnR w="9525" cap="flat" cmpd="sng" algn="ctr">
                       <a:solidFill>
-                        <a:srgbClr val="CCE9F5"/>
+                        <a:srgbClr val="D1EEFA"/>
                       </a:solidFill>
                       <a:prstDash val="solid"/>
                     </a:lnR>
                     <a:lnT w="9525" cap="flat" cmpd="sng" algn="ctr">
                       <a:solidFill>
-                        <a:srgbClr val="CCE9F5"/>
+                        <a:srgbClr val="D1EEFA"/>
                       </a:solidFill>
                       <a:prstDash val="solid"/>
                     </a:lnT>
                     <a:lnB w="9525" cap="flat" cmpd="sng" algn="ctr">
                       <a:solidFill>
-                        <a:srgbClr val="CCE9F5"/>
+                        <a:srgbClr val="D1EEFA"/>
                       </a:solidFill>
                       <a:prstDash val="solid"/>
                     </a:lnB>
                     <a:solidFill>
-                      <a:srgbClr val="EEF7FB"/>
+                      <a:srgbClr val="EEF8FC"/>
                     </a:solidFill>
                   </a:tcPr>
                 </a:tc>
@@ -5237,30 +5237,30 @@
                   <a:tcPr anchor="ctr" marL="73152" marR="73152">
                     <a:lnL w="9525" cap="flat" cmpd="sng" algn="ctr">
                       <a:solidFill>
-                        <a:srgbClr val="CCE9F5"/>
+                        <a:srgbClr val="D1EEFA"/>
                       </a:solidFill>
                       <a:prstDash val="solid"/>
                     </a:lnL>
                     <a:lnR w="9525" cap="flat" cmpd="sng" algn="ctr">
                       <a:solidFill>
-                        <a:srgbClr val="CCE9F5"/>
+                        <a:srgbClr val="D1EEFA"/>
                       </a:solidFill>
                       <a:prstDash val="solid"/>
                     </a:lnR>
                     <a:lnT w="9525" cap="flat" cmpd="sng" algn="ctr">
                       <a:solidFill>
-                        <a:srgbClr val="CCE9F5"/>
+                        <a:srgbClr val="D1EEFA"/>
                       </a:solidFill>
                       <a:prstDash val="solid"/>
                     </a:lnT>
                     <a:lnB w="9525" cap="flat" cmpd="sng" algn="ctr">
                       <a:solidFill>
-                        <a:srgbClr val="CCE9F5"/>
+                        <a:srgbClr val="D1EEFA"/>
                       </a:solidFill>
                       <a:prstDash val="solid"/>
                     </a:lnB>
                     <a:solidFill>
-                      <a:srgbClr val="EEF7FB"/>
+                      <a:srgbClr val="EEF8FC"/>
                     </a:solidFill>
                   </a:tcPr>
                 </a:tc>
@@ -5283,30 +5283,30 @@
                   <a:tcPr anchor="ctr" marL="73152" marR="73152">
                     <a:lnL w="9525" cap="flat" cmpd="sng" algn="ctr">
                       <a:solidFill>
-                        <a:srgbClr val="CCE9F5"/>
+                        <a:srgbClr val="D1EEFA"/>
                       </a:solidFill>
                       <a:prstDash val="solid"/>
                     </a:lnL>
                     <a:lnR w="9525" cap="flat" cmpd="sng" algn="ctr">
                       <a:solidFill>
-                        <a:srgbClr val="CCE9F5"/>
+                        <a:srgbClr val="D1EEFA"/>
                       </a:solidFill>
                       <a:prstDash val="solid"/>
                     </a:lnR>
                     <a:lnT w="9525" cap="flat" cmpd="sng" algn="ctr">
                       <a:solidFill>
-                        <a:srgbClr val="CCE9F5"/>
+                        <a:srgbClr val="D1EEFA"/>
                       </a:solidFill>
                       <a:prstDash val="solid"/>
                     </a:lnT>
                     <a:lnB w="9525" cap="flat" cmpd="sng" algn="ctr">
                       <a:solidFill>
-                        <a:srgbClr val="CCE9F5"/>
+                        <a:srgbClr val="D1EEFA"/>
                       </a:solidFill>
                       <a:prstDash val="solid"/>
                     </a:lnB>
                     <a:solidFill>
-                      <a:srgbClr val="EEF7FB"/>
+                      <a:srgbClr val="EEF8FC"/>
                     </a:solidFill>
                   </a:tcPr>
                 </a:tc>
@@ -5331,25 +5331,25 @@
                   <a:tcPr anchor="ctr" marL="73152" marR="73152">
                     <a:lnL w="9525" cap="flat" cmpd="sng" algn="ctr">
                       <a:solidFill>
-                        <a:srgbClr val="CCE9F5"/>
+                        <a:srgbClr val="D1EEFA"/>
                       </a:solidFill>
                       <a:prstDash val="solid"/>
                     </a:lnL>
                     <a:lnR w="9525" cap="flat" cmpd="sng" algn="ctr">
                       <a:solidFill>
-                        <a:srgbClr val="CCE9F5"/>
+                        <a:srgbClr val="D1EEFA"/>
                       </a:solidFill>
                       <a:prstDash val="solid"/>
                     </a:lnR>
                     <a:lnT w="9525" cap="flat" cmpd="sng" algn="ctr">
                       <a:solidFill>
-                        <a:srgbClr val="CCE9F5"/>
+                        <a:srgbClr val="D1EEFA"/>
                       </a:solidFill>
                       <a:prstDash val="solid"/>
                     </a:lnT>
                     <a:lnB w="9525" cap="flat" cmpd="sng" algn="ctr">
                       <a:solidFill>
-                        <a:srgbClr val="CCE9F5"/>
+                        <a:srgbClr val="D1EEFA"/>
                       </a:solidFill>
                       <a:prstDash val="solid"/>
                     </a:lnB>
@@ -5377,25 +5377,25 @@
                   <a:tcPr anchor="ctr" marL="73152" marR="73152">
                     <a:lnL w="9525" cap="flat" cmpd="sng" algn="ctr">
                       <a:solidFill>
-                        <a:srgbClr val="CCE9F5"/>
+                        <a:srgbClr val="D1EEFA"/>
                       </a:solidFill>
                       <a:prstDash val="solid"/>
                     </a:lnL>
                     <a:lnR w="9525" cap="flat" cmpd="sng" algn="ctr">
                       <a:solidFill>
-                        <a:srgbClr val="CCE9F5"/>
+                        <a:srgbClr val="D1EEFA"/>
                       </a:solidFill>
                       <a:prstDash val="solid"/>
                     </a:lnR>
                     <a:lnT w="9525" cap="flat" cmpd="sng" algn="ctr">
                       <a:solidFill>
-                        <a:srgbClr val="CCE9F5"/>
+                        <a:srgbClr val="D1EEFA"/>
                       </a:solidFill>
                       <a:prstDash val="solid"/>
                     </a:lnT>
                     <a:lnB w="9525" cap="flat" cmpd="sng" algn="ctr">
                       <a:solidFill>
-                        <a:srgbClr val="CCE9F5"/>
+                        <a:srgbClr val="D1EEFA"/>
                       </a:solidFill>
                       <a:prstDash val="solid"/>
                     </a:lnB>
@@ -5423,25 +5423,25 @@
                   <a:tcPr anchor="ctr" marL="73152" marR="73152">
                     <a:lnL w="9525" cap="flat" cmpd="sng" algn="ctr">
                       <a:solidFill>
-                        <a:srgbClr val="CCE9F5"/>
+                        <a:srgbClr val="D1EEFA"/>
                       </a:solidFill>
                       <a:prstDash val="solid"/>
                     </a:lnL>
                     <a:lnR w="9525" cap="flat" cmpd="sng" algn="ctr">
                       <a:solidFill>
-                        <a:srgbClr val="CCE9F5"/>
+                        <a:srgbClr val="D1EEFA"/>
                       </a:solidFill>
                       <a:prstDash val="solid"/>
                     </a:lnR>
                     <a:lnT w="9525" cap="flat" cmpd="sng" algn="ctr">
                       <a:solidFill>
-                        <a:srgbClr val="CCE9F5"/>
+                        <a:srgbClr val="D1EEFA"/>
                       </a:solidFill>
                       <a:prstDash val="solid"/>
                     </a:lnT>
                     <a:lnB w="9525" cap="flat" cmpd="sng" algn="ctr">
                       <a:solidFill>
-                        <a:srgbClr val="CCE9F5"/>
+                        <a:srgbClr val="D1EEFA"/>
                       </a:solidFill>
                       <a:prstDash val="solid"/>
                     </a:lnB>
@@ -5469,25 +5469,25 @@
                   <a:tcPr anchor="ctr" marL="73152" marR="73152">
                     <a:lnL w="9525" cap="flat" cmpd="sng" algn="ctr">
                       <a:solidFill>
-                        <a:srgbClr val="CCE9F5"/>
+                        <a:srgbClr val="D1EEFA"/>
                       </a:solidFill>
                       <a:prstDash val="solid"/>
                     </a:lnL>
                     <a:lnR w="9525" cap="flat" cmpd="sng" algn="ctr">
                       <a:solidFill>
-                        <a:srgbClr val="CCE9F5"/>
+                        <a:srgbClr val="D1EEFA"/>
                       </a:solidFill>
                       <a:prstDash val="solid"/>
                     </a:lnR>
                     <a:lnT w="9525" cap="flat" cmpd="sng" algn="ctr">
                       <a:solidFill>
-                        <a:srgbClr val="CCE9F5"/>
+                        <a:srgbClr val="D1EEFA"/>
                       </a:solidFill>
                       <a:prstDash val="solid"/>
                     </a:lnT>
                     <a:lnB w="9525" cap="flat" cmpd="sng" algn="ctr">
                       <a:solidFill>
-                        <a:srgbClr val="CCE9F5"/>
+                        <a:srgbClr val="D1EEFA"/>
                       </a:solidFill>
                       <a:prstDash val="solid"/>
                     </a:lnB>
@@ -5515,25 +5515,25 @@
                   <a:tcPr anchor="ctr" marL="73152" marR="73152">
                     <a:lnL w="9525" cap="flat" cmpd="sng" algn="ctr">
                       <a:solidFill>
-                        <a:srgbClr val="CCE9F5"/>
+                        <a:srgbClr val="D1EEFA"/>
                       </a:solidFill>
                       <a:prstDash val="solid"/>
                     </a:lnL>
                     <a:lnR w="9525" cap="flat" cmpd="sng" algn="ctr">
                       <a:solidFill>
-                        <a:srgbClr val="CCE9F5"/>
+                        <a:srgbClr val="D1EEFA"/>
                       </a:solidFill>
                       <a:prstDash val="solid"/>
                     </a:lnR>
                     <a:lnT w="9525" cap="flat" cmpd="sng" algn="ctr">
                       <a:solidFill>
-                        <a:srgbClr val="CCE9F5"/>
+                        <a:srgbClr val="D1EEFA"/>
                       </a:solidFill>
                       <a:prstDash val="solid"/>
                     </a:lnT>
                     <a:lnB w="9525" cap="flat" cmpd="sng" algn="ctr">
                       <a:solidFill>
-                        <a:srgbClr val="CCE9F5"/>
+                        <a:srgbClr val="D1EEFA"/>
                       </a:solidFill>
                       <a:prstDash val="solid"/>
                     </a:lnB>
@@ -5563,30 +5563,30 @@
                   <a:tcPr anchor="ctr" marL="73152" marR="73152">
                     <a:lnL w="9525" cap="flat" cmpd="sng" algn="ctr">
                       <a:solidFill>
-                        <a:srgbClr val="CCE9F5"/>
+                        <a:srgbClr val="D1EEFA"/>
                       </a:solidFill>
                       <a:prstDash val="solid"/>
                     </a:lnL>
                     <a:lnR w="9525" cap="flat" cmpd="sng" algn="ctr">
                       <a:solidFill>
-                        <a:srgbClr val="CCE9F5"/>
+                        <a:srgbClr val="D1EEFA"/>
                       </a:solidFill>
                       <a:prstDash val="solid"/>
                     </a:lnR>
                     <a:lnT w="9525" cap="flat" cmpd="sng" algn="ctr">
                       <a:solidFill>
-                        <a:srgbClr val="CCE9F5"/>
+                        <a:srgbClr val="D1EEFA"/>
                       </a:solidFill>
                       <a:prstDash val="solid"/>
                     </a:lnT>
                     <a:lnB w="9525" cap="flat" cmpd="sng" algn="ctr">
                       <a:solidFill>
-                        <a:srgbClr val="CCE9F5"/>
+                        <a:srgbClr val="D1EEFA"/>
                       </a:solidFill>
                       <a:prstDash val="solid"/>
                     </a:lnB>
                     <a:solidFill>
-                      <a:srgbClr val="EEF7FB"/>
+                      <a:srgbClr val="EEF8FC"/>
                     </a:solidFill>
                   </a:tcPr>
                 </a:tc>
@@ -5609,30 +5609,30 @@
                   <a:tcPr anchor="ctr" marL="73152" marR="73152">
                     <a:lnL w="9525" cap="flat" cmpd="sng" algn="ctr">
                       <a:solidFill>
-                        <a:srgbClr val="CCE9F5"/>
+                        <a:srgbClr val="D1EEFA"/>
                       </a:solidFill>
                       <a:prstDash val="solid"/>
                     </a:lnL>
                     <a:lnR w="9525" cap="flat" cmpd="sng" algn="ctr">
                       <a:solidFill>
-                        <a:srgbClr val="CCE9F5"/>
+                        <a:srgbClr val="D1EEFA"/>
                       </a:solidFill>
                       <a:prstDash val="solid"/>
                     </a:lnR>
                     <a:lnT w="9525" cap="flat" cmpd="sng" algn="ctr">
                       <a:solidFill>
-                        <a:srgbClr val="CCE9F5"/>
+                        <a:srgbClr val="D1EEFA"/>
                       </a:solidFill>
                       <a:prstDash val="solid"/>
                     </a:lnT>
                     <a:lnB w="9525" cap="flat" cmpd="sng" algn="ctr">
                       <a:solidFill>
-                        <a:srgbClr val="CCE9F5"/>
+                        <a:srgbClr val="D1EEFA"/>
                       </a:solidFill>
                       <a:prstDash val="solid"/>
                     </a:lnB>
                     <a:solidFill>
-                      <a:srgbClr val="EEF7FB"/>
+                      <a:srgbClr val="EEF8FC"/>
                     </a:solidFill>
                   </a:tcPr>
                 </a:tc>
@@ -5655,30 +5655,30 @@
                   <a:tcPr anchor="ctr" marL="73152" marR="73152">
                     <a:lnL w="9525" cap="flat" cmpd="sng" algn="ctr">
                       <a:solidFill>
-                        <a:srgbClr val="CCE9F5"/>
+                        <a:srgbClr val="D1EEFA"/>
                       </a:solidFill>
                       <a:prstDash val="solid"/>
                     </a:lnL>
                     <a:lnR w="9525" cap="flat" cmpd="sng" algn="ctr">
                       <a:solidFill>
-                        <a:srgbClr val="CCE9F5"/>
+                        <a:srgbClr val="D1EEFA"/>
                       </a:solidFill>
                       <a:prstDash val="solid"/>
                     </a:lnR>
                     <a:lnT w="9525" cap="flat" cmpd="sng" algn="ctr">
                       <a:solidFill>
-                        <a:srgbClr val="CCE9F5"/>
+                        <a:srgbClr val="D1EEFA"/>
                       </a:solidFill>
                       <a:prstDash val="solid"/>
                     </a:lnT>
                     <a:lnB w="9525" cap="flat" cmpd="sng" algn="ctr">
                       <a:solidFill>
-                        <a:srgbClr val="CCE9F5"/>
+                        <a:srgbClr val="D1EEFA"/>
                       </a:solidFill>
                       <a:prstDash val="solid"/>
                     </a:lnB>
                     <a:solidFill>
-                      <a:srgbClr val="EEF7FB"/>
+                      <a:srgbClr val="EEF8FC"/>
                     </a:solidFill>
                   </a:tcPr>
                 </a:tc>
@@ -5701,30 +5701,30 @@
                   <a:tcPr anchor="ctr" marL="73152" marR="73152">
                     <a:lnL w="9525" cap="flat" cmpd="sng" algn="ctr">
                       <a:solidFill>
-                        <a:srgbClr val="CCE9F5"/>
+                        <a:srgbClr val="D1EEFA"/>
                       </a:solidFill>
                       <a:prstDash val="solid"/>
                     </a:lnL>
                     <a:lnR w="9525" cap="flat" cmpd="sng" algn="ctr">
                       <a:solidFill>
-                        <a:srgbClr val="CCE9F5"/>
+                        <a:srgbClr val="D1EEFA"/>
                       </a:solidFill>
                       <a:prstDash val="solid"/>
                     </a:lnR>
                     <a:lnT w="9525" cap="flat" cmpd="sng" algn="ctr">
                       <a:solidFill>
-                        <a:srgbClr val="CCE9F5"/>
+                        <a:srgbClr val="D1EEFA"/>
                       </a:solidFill>
                       <a:prstDash val="solid"/>
                     </a:lnT>
                     <a:lnB w="9525" cap="flat" cmpd="sng" algn="ctr">
                       <a:solidFill>
-                        <a:srgbClr val="CCE9F5"/>
+                        <a:srgbClr val="D1EEFA"/>
                       </a:solidFill>
                       <a:prstDash val="solid"/>
                     </a:lnB>
                     <a:solidFill>
-                      <a:srgbClr val="EEF7FB"/>
+                      <a:srgbClr val="EEF8FC"/>
                     </a:solidFill>
                   </a:tcPr>
                 </a:tc>
@@ -5747,30 +5747,30 @@
                   <a:tcPr anchor="ctr" marL="73152" marR="73152">
                     <a:lnL w="9525" cap="flat" cmpd="sng" algn="ctr">
                       <a:solidFill>
-                        <a:srgbClr val="CCE9F5"/>
+                        <a:srgbClr val="D1EEFA"/>
                       </a:solidFill>
                       <a:prstDash val="solid"/>
                     </a:lnL>
                     <a:lnR w="9525" cap="flat" cmpd="sng" algn="ctr">
                       <a:solidFill>
-                        <a:srgbClr val="CCE9F5"/>
+                        <a:srgbClr val="D1EEFA"/>
                       </a:solidFill>
                       <a:prstDash val="solid"/>
                     </a:lnR>
                     <a:lnT w="9525" cap="flat" cmpd="sng" algn="ctr">
                       <a:solidFill>
-                        <a:srgbClr val="CCE9F5"/>
+                        <a:srgbClr val="D1EEFA"/>
                       </a:solidFill>
                       <a:prstDash val="solid"/>
                     </a:lnT>
                     <a:lnB w="9525" cap="flat" cmpd="sng" algn="ctr">
                       <a:solidFill>
-                        <a:srgbClr val="CCE9F5"/>
+                        <a:srgbClr val="D1EEFA"/>
                       </a:solidFill>
                       <a:prstDash val="solid"/>
                     </a:lnB>
                     <a:solidFill>
-                      <a:srgbClr val="EEF7FB"/>
+                      <a:srgbClr val="EEF8FC"/>
                     </a:solidFill>
                   </a:tcPr>
                 </a:tc>
@@ -5795,25 +5795,25 @@
                   <a:tcPr anchor="ctr" marL="73152" marR="73152">
                     <a:lnL w="9525" cap="flat" cmpd="sng" algn="ctr">
                       <a:solidFill>
-                        <a:srgbClr val="CCE9F5"/>
+                        <a:srgbClr val="D1EEFA"/>
                       </a:solidFill>
                       <a:prstDash val="solid"/>
                     </a:lnL>
                     <a:lnR w="9525" cap="flat" cmpd="sng" algn="ctr">
                       <a:solidFill>
-                        <a:srgbClr val="CCE9F5"/>
+                        <a:srgbClr val="D1EEFA"/>
                       </a:solidFill>
                       <a:prstDash val="solid"/>
                     </a:lnR>
                     <a:lnT w="9525" cap="flat" cmpd="sng" algn="ctr">
                       <a:solidFill>
-                        <a:srgbClr val="CCE9F5"/>
+                        <a:srgbClr val="D1EEFA"/>
                       </a:solidFill>
                       <a:prstDash val="solid"/>
                     </a:lnT>
                     <a:lnB w="9525" cap="flat" cmpd="sng" algn="ctr">
                       <a:solidFill>
-                        <a:srgbClr val="CCE9F5"/>
+                        <a:srgbClr val="D1EEFA"/>
                       </a:solidFill>
                       <a:prstDash val="solid"/>
                     </a:lnB>
@@ -5841,25 +5841,25 @@
                   <a:tcPr anchor="ctr" marL="73152" marR="73152">
                     <a:lnL w="9525" cap="flat" cmpd="sng" algn="ctr">
                       <a:solidFill>
-                        <a:srgbClr val="CCE9F5"/>
+                        <a:srgbClr val="D1EEFA"/>
                       </a:solidFill>
                       <a:prstDash val="solid"/>
                     </a:lnL>
                     <a:lnR w="9525" cap="flat" cmpd="sng" algn="ctr">
                       <a:solidFill>
-                        <a:srgbClr val="CCE9F5"/>
+                        <a:srgbClr val="D1EEFA"/>
                       </a:solidFill>
                       <a:prstDash val="solid"/>
                     </a:lnR>
                     <a:lnT w="9525" cap="flat" cmpd="sng" algn="ctr">
                       <a:solidFill>
-                        <a:srgbClr val="CCE9F5"/>
+                        <a:srgbClr val="D1EEFA"/>
                       </a:solidFill>
                       <a:prstDash val="solid"/>
                     </a:lnT>
                     <a:lnB w="9525" cap="flat" cmpd="sng" algn="ctr">
                       <a:solidFill>
-                        <a:srgbClr val="CCE9F5"/>
+                        <a:srgbClr val="D1EEFA"/>
                       </a:solidFill>
                       <a:prstDash val="solid"/>
                     </a:lnB>
@@ -5887,25 +5887,25 @@
                   <a:tcPr anchor="ctr" marL="73152" marR="73152">
                     <a:lnL w="9525" cap="flat" cmpd="sng" algn="ctr">
                       <a:solidFill>
-                        <a:srgbClr val="CCE9F5"/>
+                        <a:srgbClr val="D1EEFA"/>
                       </a:solidFill>
                       <a:prstDash val="solid"/>
                     </a:lnL>
                     <a:lnR w="9525" cap="flat" cmpd="sng" algn="ctr">
                       <a:solidFill>
-                        <a:srgbClr val="CCE9F5"/>
+                        <a:srgbClr val="D1EEFA"/>
                       </a:solidFill>
                       <a:prstDash val="solid"/>
                     </a:lnR>
                     <a:lnT w="9525" cap="flat" cmpd="sng" algn="ctr">
                       <a:solidFill>
-                        <a:srgbClr val="CCE9F5"/>
+                        <a:srgbClr val="D1EEFA"/>
                       </a:solidFill>
                       <a:prstDash val="solid"/>
                     </a:lnT>
                     <a:lnB w="9525" cap="flat" cmpd="sng" algn="ctr">
                       <a:solidFill>
-                        <a:srgbClr val="CCE9F5"/>
+                        <a:srgbClr val="D1EEFA"/>
                       </a:solidFill>
                       <a:prstDash val="solid"/>
                     </a:lnB>
@@ -5933,25 +5933,25 @@
                   <a:tcPr anchor="ctr" marL="73152" marR="73152">
                     <a:lnL w="9525" cap="flat" cmpd="sng" algn="ctr">
                       <a:solidFill>
-                        <a:srgbClr val="CCE9F5"/>
+                        <a:srgbClr val="D1EEFA"/>
                       </a:solidFill>
                       <a:prstDash val="solid"/>
                     </a:lnL>
                     <a:lnR w="9525" cap="flat" cmpd="sng" algn="ctr">
                       <a:solidFill>
-                        <a:srgbClr val="CCE9F5"/>
+                        <a:srgbClr val="D1EEFA"/>
                       </a:solidFill>
                       <a:prstDash val="solid"/>
                     </a:lnR>
                     <a:lnT w="9525" cap="flat" cmpd="sng" algn="ctr">
                       <a:solidFill>
-                        <a:srgbClr val="CCE9F5"/>
+                        <a:srgbClr val="D1EEFA"/>
                       </a:solidFill>
                       <a:prstDash val="solid"/>
                     </a:lnT>
                     <a:lnB w="9525" cap="flat" cmpd="sng" algn="ctr">
                       <a:solidFill>
-                        <a:srgbClr val="CCE9F5"/>
+                        <a:srgbClr val="D1EEFA"/>
                       </a:solidFill>
                       <a:prstDash val="solid"/>
                     </a:lnB>
@@ -5979,25 +5979,25 @@
                   <a:tcPr anchor="ctr" marL="73152" marR="73152">
                     <a:lnL w="9525" cap="flat" cmpd="sng" algn="ctr">
                       <a:solidFill>
-                        <a:srgbClr val="CCE9F5"/>
+                        <a:srgbClr val="D1EEFA"/>
                       </a:solidFill>
                       <a:prstDash val="solid"/>
                     </a:lnL>
                     <a:lnR w="9525" cap="flat" cmpd="sng" algn="ctr">
                       <a:solidFill>
-                        <a:srgbClr val="CCE9F5"/>
+                        <a:srgbClr val="D1EEFA"/>
                       </a:solidFill>
                       <a:prstDash val="solid"/>
                     </a:lnR>
                     <a:lnT w="9525" cap="flat" cmpd="sng" algn="ctr">
                       <a:solidFill>
-                        <a:srgbClr val="CCE9F5"/>
+                        <a:srgbClr val="D1EEFA"/>
                       </a:solidFill>
                       <a:prstDash val="solid"/>
                     </a:lnT>
                     <a:lnB w="9525" cap="flat" cmpd="sng" algn="ctr">
                       <a:solidFill>
-                        <a:srgbClr val="CCE9F5"/>
+                        <a:srgbClr val="D1EEFA"/>
                       </a:solidFill>
                       <a:prstDash val="solid"/>
                     </a:lnB>
@@ -6027,30 +6027,30 @@
                   <a:tcPr anchor="ctr" marL="73152" marR="73152">
                     <a:lnL w="9525" cap="flat" cmpd="sng" algn="ctr">
                       <a:solidFill>
-                        <a:srgbClr val="CCE9F5"/>
+                        <a:srgbClr val="D1EEFA"/>
                       </a:solidFill>
                       <a:prstDash val="solid"/>
                     </a:lnL>
                     <a:lnR w="9525" cap="flat" cmpd="sng" algn="ctr">
                       <a:solidFill>
-                        <a:srgbClr val="CCE9F5"/>
+                        <a:srgbClr val="D1EEFA"/>
                       </a:solidFill>
                       <a:prstDash val="solid"/>
                     </a:lnR>
                     <a:lnT w="9525" cap="flat" cmpd="sng" algn="ctr">
                       <a:solidFill>
-                        <a:srgbClr val="CCE9F5"/>
+                        <a:srgbClr val="D1EEFA"/>
                       </a:solidFill>
                       <a:prstDash val="solid"/>
                     </a:lnT>
                     <a:lnB w="9525" cap="flat" cmpd="sng" algn="ctr">
                       <a:solidFill>
-                        <a:srgbClr val="CCE9F5"/>
+                        <a:srgbClr val="D1EEFA"/>
                       </a:solidFill>
                       <a:prstDash val="solid"/>
                     </a:lnB>
                     <a:solidFill>
-                      <a:srgbClr val="EEF7FB"/>
+                      <a:srgbClr val="EEF8FC"/>
                     </a:solidFill>
                   </a:tcPr>
                 </a:tc>
@@ -6073,30 +6073,30 @@
                   <a:tcPr anchor="ctr" marL="73152" marR="73152">
                     <a:lnL w="9525" cap="flat" cmpd="sng" algn="ctr">
                       <a:solidFill>
-                        <a:srgbClr val="CCE9F5"/>
+                        <a:srgbClr val="D1EEFA"/>
                       </a:solidFill>
                       <a:prstDash val="solid"/>
                     </a:lnL>
                     <a:lnR w="9525" cap="flat" cmpd="sng" algn="ctr">
                       <a:solidFill>
-                        <a:srgbClr val="CCE9F5"/>
+                        <a:srgbClr val="D1EEFA"/>
                       </a:solidFill>
                       <a:prstDash val="solid"/>
                     </a:lnR>
                     <a:lnT w="9525" cap="flat" cmpd="sng" algn="ctr">
                       <a:solidFill>
-                        <a:srgbClr val="CCE9F5"/>
+                        <a:srgbClr val="D1EEFA"/>
                       </a:solidFill>
                       <a:prstDash val="solid"/>
                     </a:lnT>
                     <a:lnB w="9525" cap="flat" cmpd="sng" algn="ctr">
                       <a:solidFill>
-                        <a:srgbClr val="CCE9F5"/>
+                        <a:srgbClr val="D1EEFA"/>
                       </a:solidFill>
                       <a:prstDash val="solid"/>
                     </a:lnB>
                     <a:solidFill>
-                      <a:srgbClr val="EEF7FB"/>
+                      <a:srgbClr val="EEF8FC"/>
                     </a:solidFill>
                   </a:tcPr>
                 </a:tc>
@@ -6119,30 +6119,30 @@
                   <a:tcPr anchor="ctr" marL="73152" marR="73152">
                     <a:lnL w="9525" cap="flat" cmpd="sng" algn="ctr">
                       <a:solidFill>
-                        <a:srgbClr val="CCE9F5"/>
+                        <a:srgbClr val="D1EEFA"/>
                       </a:solidFill>
                       <a:prstDash val="solid"/>
                     </a:lnL>
                     <a:lnR w="9525" cap="flat" cmpd="sng" algn="ctr">
                       <a:solidFill>
-                        <a:srgbClr val="CCE9F5"/>
+                        <a:srgbClr val="D1EEFA"/>
                       </a:solidFill>
                       <a:prstDash val="solid"/>
                     </a:lnR>
                     <a:lnT w="9525" cap="flat" cmpd="sng" algn="ctr">
                       <a:solidFill>
-                        <a:srgbClr val="CCE9F5"/>
+                        <a:srgbClr val="D1EEFA"/>
                       </a:solidFill>
                       <a:prstDash val="solid"/>
                     </a:lnT>
                     <a:lnB w="9525" cap="flat" cmpd="sng" algn="ctr">
                       <a:solidFill>
-                        <a:srgbClr val="CCE9F5"/>
+                        <a:srgbClr val="D1EEFA"/>
                       </a:solidFill>
                       <a:prstDash val="solid"/>
                     </a:lnB>
                     <a:solidFill>
-                      <a:srgbClr val="EEF7FB"/>
+                      <a:srgbClr val="EEF8FC"/>
                     </a:solidFill>
                   </a:tcPr>
                 </a:tc>
@@ -6165,30 +6165,30 @@
                   <a:tcPr anchor="ctr" marL="73152" marR="73152">
                     <a:lnL w="9525" cap="flat" cmpd="sng" algn="ctr">
                       <a:solidFill>
-                        <a:srgbClr val="CCE9F5"/>
+                        <a:srgbClr val="D1EEFA"/>
                       </a:solidFill>
                       <a:prstDash val="solid"/>
                     </a:lnL>
                     <a:lnR w="9525" cap="flat" cmpd="sng" algn="ctr">
                       <a:solidFill>
-                        <a:srgbClr val="CCE9F5"/>
+                        <a:srgbClr val="D1EEFA"/>
                       </a:solidFill>
                       <a:prstDash val="solid"/>
                     </a:lnR>
                     <a:lnT w="9525" cap="flat" cmpd="sng" algn="ctr">
                       <a:solidFill>
-                        <a:srgbClr val="CCE9F5"/>
+                        <a:srgbClr val="D1EEFA"/>
                       </a:solidFill>
                       <a:prstDash val="solid"/>
                     </a:lnT>
                     <a:lnB w="9525" cap="flat" cmpd="sng" algn="ctr">
                       <a:solidFill>
-                        <a:srgbClr val="CCE9F5"/>
+                        <a:srgbClr val="D1EEFA"/>
                       </a:solidFill>
                       <a:prstDash val="solid"/>
                     </a:lnB>
                     <a:solidFill>
-                      <a:srgbClr val="EEF7FB"/>
+                      <a:srgbClr val="EEF8FC"/>
                     </a:solidFill>
                   </a:tcPr>
                 </a:tc>
@@ -6211,30 +6211,30 @@
                   <a:tcPr anchor="ctr" marL="73152" marR="73152">
                     <a:lnL w="9525" cap="flat" cmpd="sng" algn="ctr">
                       <a:solidFill>
-                        <a:srgbClr val="CCE9F5"/>
+                        <a:srgbClr val="D1EEFA"/>
                       </a:solidFill>
                       <a:prstDash val="solid"/>
                     </a:lnL>
                     <a:lnR w="9525" cap="flat" cmpd="sng" algn="ctr">
                       <a:solidFill>
-                        <a:srgbClr val="CCE9F5"/>
+                        <a:srgbClr val="D1EEFA"/>
                       </a:solidFill>
                       <a:prstDash val="solid"/>
                     </a:lnR>
                     <a:lnT w="9525" cap="flat" cmpd="sng" algn="ctr">
                       <a:solidFill>
-                        <a:srgbClr val="CCE9F5"/>
+                        <a:srgbClr val="D1EEFA"/>
                       </a:solidFill>
                       <a:prstDash val="solid"/>
                     </a:lnT>
                     <a:lnB w="9525" cap="flat" cmpd="sng" algn="ctr">
                       <a:solidFill>
-                        <a:srgbClr val="CCE9F5"/>
+                        <a:srgbClr val="D1EEFA"/>
                       </a:solidFill>
                       <a:prstDash val="solid"/>
                     </a:lnB>
                     <a:solidFill>
-                      <a:srgbClr val="EEF7FB"/>
+                      <a:srgbClr val="EEF8FC"/>
                     </a:solidFill>
                   </a:tcPr>
                 </a:tc>
@@ -6284,7 +6284,7 @@
             <a:avLst/>
           </a:prstGeom>
           <a:solidFill>
-            <a:srgbClr val="25799D"/>
+            <a:srgbClr val="2695C5"/>
           </a:solidFill>
           <a:ln>
             <a:noFill/>
@@ -6380,30 +6380,30 @@
                   <a:tcPr anchor="ctr" marL="73152" marR="73152">
                     <a:lnL w="9525" cap="flat" cmpd="sng" algn="ctr">
                       <a:solidFill>
-                        <a:srgbClr val="25799D"/>
+                        <a:srgbClr val="2695C5"/>
                       </a:solidFill>
                       <a:prstDash val="solid"/>
                     </a:lnL>
                     <a:lnR w="9525" cap="flat" cmpd="sng" algn="ctr">
                       <a:solidFill>
-                        <a:srgbClr val="25799D"/>
+                        <a:srgbClr val="2695C5"/>
                       </a:solidFill>
                       <a:prstDash val="solid"/>
                     </a:lnR>
                     <a:lnT w="9525" cap="flat" cmpd="sng" algn="ctr">
                       <a:solidFill>
-                        <a:srgbClr val="25799D"/>
+                        <a:srgbClr val="2695C5"/>
                       </a:solidFill>
                       <a:prstDash val="solid"/>
                     </a:lnT>
                     <a:lnB w="9525" cap="flat" cmpd="sng" algn="ctr">
                       <a:solidFill>
-                        <a:srgbClr val="25799D"/>
+                        <a:srgbClr val="2695C5"/>
                       </a:solidFill>
                       <a:prstDash val="solid"/>
                     </a:lnB>
                     <a:solidFill>
-                      <a:srgbClr val="25799D"/>
+                      <a:srgbClr val="2695C5"/>
                     </a:solidFill>
                   </a:tcPr>
                 </a:tc>
@@ -6426,30 +6426,30 @@
                   <a:tcPr anchor="ctr" marL="73152" marR="73152">
                     <a:lnL w="9525" cap="flat" cmpd="sng" algn="ctr">
                       <a:solidFill>
-                        <a:srgbClr val="25799D"/>
+                        <a:srgbClr val="2695C5"/>
                       </a:solidFill>
                       <a:prstDash val="solid"/>
                     </a:lnL>
                     <a:lnR w="9525" cap="flat" cmpd="sng" algn="ctr">
                       <a:solidFill>
-                        <a:srgbClr val="25799D"/>
+                        <a:srgbClr val="2695C5"/>
                       </a:solidFill>
                       <a:prstDash val="solid"/>
                     </a:lnR>
                     <a:lnT w="9525" cap="flat" cmpd="sng" algn="ctr">
                       <a:solidFill>
-                        <a:srgbClr val="25799D"/>
+                        <a:srgbClr val="2695C5"/>
                       </a:solidFill>
                       <a:prstDash val="solid"/>
                     </a:lnT>
                     <a:lnB w="9525" cap="flat" cmpd="sng" algn="ctr">
                       <a:solidFill>
-                        <a:srgbClr val="25799D"/>
+                        <a:srgbClr val="2695C5"/>
                       </a:solidFill>
                       <a:prstDash val="solid"/>
                     </a:lnB>
                     <a:solidFill>
-                      <a:srgbClr val="25799D"/>
+                      <a:srgbClr val="2695C5"/>
                     </a:solidFill>
                   </a:tcPr>
                 </a:tc>
@@ -6472,30 +6472,30 @@
                   <a:tcPr anchor="ctr" marL="73152" marR="73152">
                     <a:lnL w="9525" cap="flat" cmpd="sng" algn="ctr">
                       <a:solidFill>
-                        <a:srgbClr val="25799D"/>
+                        <a:srgbClr val="2695C5"/>
                       </a:solidFill>
                       <a:prstDash val="solid"/>
                     </a:lnL>
                     <a:lnR w="9525" cap="flat" cmpd="sng" algn="ctr">
                       <a:solidFill>
-                        <a:srgbClr val="25799D"/>
+                        <a:srgbClr val="2695C5"/>
                       </a:solidFill>
                       <a:prstDash val="solid"/>
                     </a:lnR>
                     <a:lnT w="9525" cap="flat" cmpd="sng" algn="ctr">
                       <a:solidFill>
-                        <a:srgbClr val="25799D"/>
+                        <a:srgbClr val="2695C5"/>
                       </a:solidFill>
                       <a:prstDash val="solid"/>
                     </a:lnT>
                     <a:lnB w="9525" cap="flat" cmpd="sng" algn="ctr">
                       <a:solidFill>
-                        <a:srgbClr val="25799D"/>
+                        <a:srgbClr val="2695C5"/>
                       </a:solidFill>
                       <a:prstDash val="solid"/>
                     </a:lnB>
                     <a:solidFill>
-                      <a:srgbClr val="25799D"/>
+                      <a:srgbClr val="2695C5"/>
                     </a:solidFill>
                   </a:tcPr>
                 </a:tc>
@@ -6518,30 +6518,30 @@
                   <a:tcPr anchor="ctr" marL="73152" marR="73152">
                     <a:lnL w="9525" cap="flat" cmpd="sng" algn="ctr">
                       <a:solidFill>
-                        <a:srgbClr val="25799D"/>
+                        <a:srgbClr val="2695C5"/>
                       </a:solidFill>
                       <a:prstDash val="solid"/>
                     </a:lnL>
                     <a:lnR w="9525" cap="flat" cmpd="sng" algn="ctr">
                       <a:solidFill>
-                        <a:srgbClr val="25799D"/>
+                        <a:srgbClr val="2695C5"/>
                       </a:solidFill>
                       <a:prstDash val="solid"/>
                     </a:lnR>
                     <a:lnT w="9525" cap="flat" cmpd="sng" algn="ctr">
                       <a:solidFill>
-                        <a:srgbClr val="25799D"/>
+                        <a:srgbClr val="2695C5"/>
                       </a:solidFill>
                       <a:prstDash val="solid"/>
                     </a:lnT>
                     <a:lnB w="9525" cap="flat" cmpd="sng" algn="ctr">
                       <a:solidFill>
-                        <a:srgbClr val="25799D"/>
+                        <a:srgbClr val="2695C5"/>
                       </a:solidFill>
                       <a:prstDash val="solid"/>
                     </a:lnB>
                     <a:solidFill>
-                      <a:srgbClr val="25799D"/>
+                      <a:srgbClr val="2695C5"/>
                     </a:solidFill>
                   </a:tcPr>
                 </a:tc>
@@ -6556,7 +6556,7 @@
                       <a:r>
                         <a:rPr sz="1400" b="1">
                           <a:solidFill>
-                            <a:srgbClr val="11394A"/>
+                            <a:srgbClr val="11485F"/>
                           </a:solidFill>
                         </a:rPr>
                         <a:t>사망·재해</a:t>
@@ -6566,30 +6566,30 @@
                   <a:tcPr anchor="ctr" marL="73152" marR="73152">
                     <a:lnL w="9525" cap="flat" cmpd="sng" algn="ctr">
                       <a:solidFill>
-                        <a:srgbClr val="CCE9F5"/>
+                        <a:srgbClr val="D1EEFA"/>
                       </a:solidFill>
                       <a:prstDash val="solid"/>
                     </a:lnL>
                     <a:lnR w="9525" cap="flat" cmpd="sng" algn="ctr">
                       <a:solidFill>
-                        <a:srgbClr val="CCE9F5"/>
+                        <a:srgbClr val="D1EEFA"/>
                       </a:solidFill>
                       <a:prstDash val="solid"/>
                     </a:lnR>
                     <a:lnT w="9525" cap="flat" cmpd="sng" algn="ctr">
                       <a:solidFill>
-                        <a:srgbClr val="CCE9F5"/>
+                        <a:srgbClr val="D1EEFA"/>
                       </a:solidFill>
                       <a:prstDash val="solid"/>
                     </a:lnT>
                     <a:lnB w="9525" cap="flat" cmpd="sng" algn="ctr">
                       <a:solidFill>
-                        <a:srgbClr val="CCE9F5"/>
+                        <a:srgbClr val="D1EEFA"/>
                       </a:solidFill>
                       <a:prstDash val="solid"/>
                     </a:lnB>
                     <a:solidFill>
-                      <a:srgbClr val="CCE9F5"/>
+                      <a:srgbClr val="D1EEFA"/>
                     </a:solidFill>
                   </a:tcPr>
                 </a:tc>
@@ -6612,25 +6612,25 @@
                   <a:tcPr anchor="ctr" marL="73152" marR="73152">
                     <a:lnL w="9525" cap="flat" cmpd="sng" algn="ctr">
                       <a:solidFill>
-                        <a:srgbClr val="CCE9F5"/>
+                        <a:srgbClr val="D1EEFA"/>
                       </a:solidFill>
                       <a:prstDash val="solid"/>
                     </a:lnL>
                     <a:lnR w="9525" cap="flat" cmpd="sng" algn="ctr">
                       <a:solidFill>
-                        <a:srgbClr val="CCE9F5"/>
+                        <a:srgbClr val="D1EEFA"/>
                       </a:solidFill>
                       <a:prstDash val="solid"/>
                     </a:lnR>
                     <a:lnT w="9525" cap="flat" cmpd="sng" algn="ctr">
                       <a:solidFill>
-                        <a:srgbClr val="CCE9F5"/>
+                        <a:srgbClr val="D1EEFA"/>
                       </a:solidFill>
                       <a:prstDash val="solid"/>
                     </a:lnT>
                     <a:lnB w="9525" cap="flat" cmpd="sng" algn="ctr">
                       <a:solidFill>
-                        <a:srgbClr val="CCE9F5"/>
+                        <a:srgbClr val="D1EEFA"/>
                       </a:solidFill>
                       <a:prstDash val="solid"/>
                     </a:lnB>
@@ -6658,25 +6658,25 @@
                   <a:tcPr anchor="ctr" marL="73152" marR="73152">
                     <a:lnL w="9525" cap="flat" cmpd="sng" algn="ctr">
                       <a:solidFill>
-                        <a:srgbClr val="CCE9F5"/>
+                        <a:srgbClr val="D1EEFA"/>
                       </a:solidFill>
                       <a:prstDash val="solid"/>
                     </a:lnL>
                     <a:lnR w="9525" cap="flat" cmpd="sng" algn="ctr">
                       <a:solidFill>
-                        <a:srgbClr val="CCE9F5"/>
+                        <a:srgbClr val="D1EEFA"/>
                       </a:solidFill>
                       <a:prstDash val="solid"/>
                     </a:lnR>
                     <a:lnT w="9525" cap="flat" cmpd="sng" algn="ctr">
                       <a:solidFill>
-                        <a:srgbClr val="CCE9F5"/>
+                        <a:srgbClr val="D1EEFA"/>
                       </a:solidFill>
                       <a:prstDash val="solid"/>
                     </a:lnT>
                     <a:lnB w="9525" cap="flat" cmpd="sng" algn="ctr">
                       <a:solidFill>
-                        <a:srgbClr val="CCE9F5"/>
+                        <a:srgbClr val="D1EEFA"/>
                       </a:solidFill>
                       <a:prstDash val="solid"/>
                     </a:lnB>
@@ -6704,25 +6704,25 @@
                   <a:tcPr anchor="ctr" marL="73152" marR="73152">
                     <a:lnL w="9525" cap="flat" cmpd="sng" algn="ctr">
                       <a:solidFill>
-                        <a:srgbClr val="CCE9F5"/>
+                        <a:srgbClr val="D1EEFA"/>
                       </a:solidFill>
                       <a:prstDash val="solid"/>
                     </a:lnL>
                     <a:lnR w="9525" cap="flat" cmpd="sng" algn="ctr">
                       <a:solidFill>
-                        <a:srgbClr val="CCE9F5"/>
+                        <a:srgbClr val="D1EEFA"/>
                       </a:solidFill>
                       <a:prstDash val="solid"/>
                     </a:lnR>
                     <a:lnT w="9525" cap="flat" cmpd="sng" algn="ctr">
                       <a:solidFill>
-                        <a:srgbClr val="CCE9F5"/>
+                        <a:srgbClr val="D1EEFA"/>
                       </a:solidFill>
                       <a:prstDash val="solid"/>
                     </a:lnT>
                     <a:lnB w="9525" cap="flat" cmpd="sng" algn="ctr">
                       <a:solidFill>
-                        <a:srgbClr val="CCE9F5"/>
+                        <a:srgbClr val="D1EEFA"/>
                       </a:solidFill>
                       <a:prstDash val="solid"/>
                     </a:lnB>
@@ -6742,7 +6742,7 @@
                       <a:r>
                         <a:rPr sz="1400" b="1">
                           <a:solidFill>
-                            <a:srgbClr val="11394A"/>
+                            <a:srgbClr val="11485F"/>
                           </a:solidFill>
                         </a:rPr>
                         <a:t>질병 진단</a:t>
@@ -6752,30 +6752,30 @@
                   <a:tcPr anchor="ctr" marL="73152" marR="73152">
                     <a:lnL w="9525" cap="flat" cmpd="sng" algn="ctr">
                       <a:solidFill>
-                        <a:srgbClr val="CCE9F5"/>
+                        <a:srgbClr val="D1EEFA"/>
                       </a:solidFill>
                       <a:prstDash val="solid"/>
                     </a:lnL>
                     <a:lnR w="9525" cap="flat" cmpd="sng" algn="ctr">
                       <a:solidFill>
-                        <a:srgbClr val="CCE9F5"/>
+                        <a:srgbClr val="D1EEFA"/>
                       </a:solidFill>
                       <a:prstDash val="solid"/>
                     </a:lnR>
                     <a:lnT w="9525" cap="flat" cmpd="sng" algn="ctr">
                       <a:solidFill>
-                        <a:srgbClr val="CCE9F5"/>
+                        <a:srgbClr val="D1EEFA"/>
                       </a:solidFill>
                       <a:prstDash val="solid"/>
                     </a:lnT>
                     <a:lnB w="9525" cap="flat" cmpd="sng" algn="ctr">
                       <a:solidFill>
-                        <a:srgbClr val="CCE9F5"/>
+                        <a:srgbClr val="D1EEFA"/>
                       </a:solidFill>
                       <a:prstDash val="solid"/>
                     </a:lnB>
                     <a:solidFill>
-                      <a:srgbClr val="CCE9F5"/>
+                      <a:srgbClr val="D1EEFA"/>
                     </a:solidFill>
                   </a:tcPr>
                 </a:tc>
@@ -6798,30 +6798,30 @@
                   <a:tcPr anchor="ctr" marL="73152" marR="73152">
                     <a:lnL w="9525" cap="flat" cmpd="sng" algn="ctr">
                       <a:solidFill>
-                        <a:srgbClr val="CCE9F5"/>
+                        <a:srgbClr val="D1EEFA"/>
                       </a:solidFill>
                       <a:prstDash val="solid"/>
                     </a:lnL>
                     <a:lnR w="9525" cap="flat" cmpd="sng" algn="ctr">
                       <a:solidFill>
-                        <a:srgbClr val="CCE9F5"/>
+                        <a:srgbClr val="D1EEFA"/>
                       </a:solidFill>
                       <a:prstDash val="solid"/>
                     </a:lnR>
                     <a:lnT w="9525" cap="flat" cmpd="sng" algn="ctr">
                       <a:solidFill>
-                        <a:srgbClr val="CCE9F5"/>
+                        <a:srgbClr val="D1EEFA"/>
                       </a:solidFill>
                       <a:prstDash val="solid"/>
                     </a:lnT>
                     <a:lnB w="9525" cap="flat" cmpd="sng" algn="ctr">
                       <a:solidFill>
-                        <a:srgbClr val="CCE9F5"/>
+                        <a:srgbClr val="D1EEFA"/>
                       </a:solidFill>
                       <a:prstDash val="solid"/>
                     </a:lnB>
                     <a:solidFill>
-                      <a:srgbClr val="EEF7FB"/>
+                      <a:srgbClr val="EEF8FC"/>
                     </a:solidFill>
                   </a:tcPr>
                 </a:tc>
@@ -6844,30 +6844,30 @@
                   <a:tcPr anchor="ctr" marL="73152" marR="73152">
                     <a:lnL w="9525" cap="flat" cmpd="sng" algn="ctr">
                       <a:solidFill>
-                        <a:srgbClr val="CCE9F5"/>
+                        <a:srgbClr val="D1EEFA"/>
                       </a:solidFill>
                       <a:prstDash val="solid"/>
                     </a:lnL>
                     <a:lnR w="9525" cap="flat" cmpd="sng" algn="ctr">
                       <a:solidFill>
-                        <a:srgbClr val="CCE9F5"/>
+                        <a:srgbClr val="D1EEFA"/>
                       </a:solidFill>
                       <a:prstDash val="solid"/>
                     </a:lnR>
                     <a:lnT w="9525" cap="flat" cmpd="sng" algn="ctr">
                       <a:solidFill>
-                        <a:srgbClr val="CCE9F5"/>
+                        <a:srgbClr val="D1EEFA"/>
                       </a:solidFill>
                       <a:prstDash val="solid"/>
                     </a:lnT>
                     <a:lnB w="9525" cap="flat" cmpd="sng" algn="ctr">
                       <a:solidFill>
-                        <a:srgbClr val="CCE9F5"/>
+                        <a:srgbClr val="D1EEFA"/>
                       </a:solidFill>
                       <a:prstDash val="solid"/>
                     </a:lnB>
                     <a:solidFill>
-                      <a:srgbClr val="EEF7FB"/>
+                      <a:srgbClr val="EEF8FC"/>
                     </a:solidFill>
                   </a:tcPr>
                 </a:tc>
@@ -6890,30 +6890,30 @@
                   <a:tcPr anchor="ctr" marL="73152" marR="73152">
                     <a:lnL w="9525" cap="flat" cmpd="sng" algn="ctr">
                       <a:solidFill>
-                        <a:srgbClr val="CCE9F5"/>
+                        <a:srgbClr val="D1EEFA"/>
                       </a:solidFill>
                       <a:prstDash val="solid"/>
                     </a:lnL>
                     <a:lnR w="9525" cap="flat" cmpd="sng" algn="ctr">
                       <a:solidFill>
-                        <a:srgbClr val="CCE9F5"/>
+                        <a:srgbClr val="D1EEFA"/>
                       </a:solidFill>
                       <a:prstDash val="solid"/>
                     </a:lnR>
                     <a:lnT w="9525" cap="flat" cmpd="sng" algn="ctr">
                       <a:solidFill>
-                        <a:srgbClr val="CCE9F5"/>
+                        <a:srgbClr val="D1EEFA"/>
                       </a:solidFill>
                       <a:prstDash val="solid"/>
                     </a:lnT>
                     <a:lnB w="9525" cap="flat" cmpd="sng" algn="ctr">
                       <a:solidFill>
-                        <a:srgbClr val="CCE9F5"/>
+                        <a:srgbClr val="D1EEFA"/>
                       </a:solidFill>
                       <a:prstDash val="solid"/>
                     </a:lnB>
                     <a:solidFill>
-                      <a:srgbClr val="EEF7FB"/>
+                      <a:srgbClr val="EEF8FC"/>
                     </a:solidFill>
                   </a:tcPr>
                 </a:tc>
@@ -6928,7 +6928,7 @@
                       <a:r>
                         <a:rPr sz="1400" b="1">
                           <a:solidFill>
-                            <a:srgbClr val="11394A"/>
+                            <a:srgbClr val="11485F"/>
                           </a:solidFill>
                         </a:rPr>
                         <a:t>암</a:t>
@@ -6938,30 +6938,30 @@
                   <a:tcPr anchor="ctr" marL="73152" marR="73152">
                     <a:lnL w="9525" cap="flat" cmpd="sng" algn="ctr">
                       <a:solidFill>
-                        <a:srgbClr val="CCE9F5"/>
+                        <a:srgbClr val="D1EEFA"/>
                       </a:solidFill>
                       <a:prstDash val="solid"/>
                     </a:lnL>
                     <a:lnR w="9525" cap="flat" cmpd="sng" algn="ctr">
                       <a:solidFill>
-                        <a:srgbClr val="CCE9F5"/>
+                        <a:srgbClr val="D1EEFA"/>
                       </a:solidFill>
                       <a:prstDash val="solid"/>
                     </a:lnR>
                     <a:lnT w="9525" cap="flat" cmpd="sng" algn="ctr">
                       <a:solidFill>
-                        <a:srgbClr val="CCE9F5"/>
+                        <a:srgbClr val="D1EEFA"/>
                       </a:solidFill>
                       <a:prstDash val="solid"/>
                     </a:lnT>
                     <a:lnB w="9525" cap="flat" cmpd="sng" algn="ctr">
                       <a:solidFill>
-                        <a:srgbClr val="CCE9F5"/>
+                        <a:srgbClr val="D1EEFA"/>
                       </a:solidFill>
                       <a:prstDash val="solid"/>
                     </a:lnB>
                     <a:solidFill>
-                      <a:srgbClr val="CCE9F5"/>
+                      <a:srgbClr val="D1EEFA"/>
                     </a:solidFill>
                   </a:tcPr>
                 </a:tc>
@@ -6984,25 +6984,25 @@
                   <a:tcPr anchor="ctr" marL="73152" marR="73152">
                     <a:lnL w="9525" cap="flat" cmpd="sng" algn="ctr">
                       <a:solidFill>
-                        <a:srgbClr val="CCE9F5"/>
+                        <a:srgbClr val="D1EEFA"/>
                       </a:solidFill>
                       <a:prstDash val="solid"/>
                     </a:lnL>
                     <a:lnR w="9525" cap="flat" cmpd="sng" algn="ctr">
                       <a:solidFill>
-                        <a:srgbClr val="CCE9F5"/>
+                        <a:srgbClr val="D1EEFA"/>
                       </a:solidFill>
                       <a:prstDash val="solid"/>
                     </a:lnR>
                     <a:lnT w="9525" cap="flat" cmpd="sng" algn="ctr">
                       <a:solidFill>
-                        <a:srgbClr val="CCE9F5"/>
+                        <a:srgbClr val="D1EEFA"/>
                       </a:solidFill>
                       <a:prstDash val="solid"/>
                     </a:lnT>
                     <a:lnB w="9525" cap="flat" cmpd="sng" algn="ctr">
                       <a:solidFill>
-                        <a:srgbClr val="CCE9F5"/>
+                        <a:srgbClr val="D1EEFA"/>
                       </a:solidFill>
                       <a:prstDash val="solid"/>
                     </a:lnB>
@@ -7030,25 +7030,25 @@
                   <a:tcPr anchor="ctr" marL="73152" marR="73152">
                     <a:lnL w="9525" cap="flat" cmpd="sng" algn="ctr">
                       <a:solidFill>
-                        <a:srgbClr val="CCE9F5"/>
+                        <a:srgbClr val="D1EEFA"/>
                       </a:solidFill>
                       <a:prstDash val="solid"/>
                     </a:lnL>
                     <a:lnR w="9525" cap="flat" cmpd="sng" algn="ctr">
                       <a:solidFill>
-                        <a:srgbClr val="CCE9F5"/>
+                        <a:srgbClr val="D1EEFA"/>
                       </a:solidFill>
                       <a:prstDash val="solid"/>
                     </a:lnR>
                     <a:lnT w="9525" cap="flat" cmpd="sng" algn="ctr">
                       <a:solidFill>
-                        <a:srgbClr val="CCE9F5"/>
+                        <a:srgbClr val="D1EEFA"/>
                       </a:solidFill>
                       <a:prstDash val="solid"/>
                     </a:lnT>
                     <a:lnB w="9525" cap="flat" cmpd="sng" algn="ctr">
                       <a:solidFill>
-                        <a:srgbClr val="CCE9F5"/>
+                        <a:srgbClr val="D1EEFA"/>
                       </a:solidFill>
                       <a:prstDash val="solid"/>
                     </a:lnB>
@@ -7076,25 +7076,25 @@
                   <a:tcPr anchor="ctr" marL="73152" marR="73152">
                     <a:lnL w="9525" cap="flat" cmpd="sng" algn="ctr">
                       <a:solidFill>
-                        <a:srgbClr val="CCE9F5"/>
+                        <a:srgbClr val="D1EEFA"/>
                       </a:solidFill>
                       <a:prstDash val="solid"/>
                     </a:lnL>
                     <a:lnR w="9525" cap="flat" cmpd="sng" algn="ctr">
                       <a:solidFill>
-                        <a:srgbClr val="CCE9F5"/>
+                        <a:srgbClr val="D1EEFA"/>
                       </a:solidFill>
                       <a:prstDash val="solid"/>
                     </a:lnR>
                     <a:lnT w="9525" cap="flat" cmpd="sng" algn="ctr">
                       <a:solidFill>
-                        <a:srgbClr val="CCE9F5"/>
+                        <a:srgbClr val="D1EEFA"/>
                       </a:solidFill>
                       <a:prstDash val="solid"/>
                     </a:lnT>
                     <a:lnB w="9525" cap="flat" cmpd="sng" algn="ctr">
                       <a:solidFill>
-                        <a:srgbClr val="CCE9F5"/>
+                        <a:srgbClr val="D1EEFA"/>
                       </a:solidFill>
                       <a:prstDash val="solid"/>
                     </a:lnB>
@@ -7114,7 +7114,7 @@
                       <a:r>
                         <a:rPr sz="1400" b="1">
                           <a:solidFill>
-                            <a:srgbClr val="11394A"/>
+                            <a:srgbClr val="11485F"/>
                           </a:solidFill>
                         </a:rPr>
                         <a:t>뇌·심장</a:t>
@@ -7124,30 +7124,30 @@
                   <a:tcPr anchor="ctr" marL="73152" marR="73152">
                     <a:lnL w="9525" cap="flat" cmpd="sng" algn="ctr">
                       <a:solidFill>
-                        <a:srgbClr val="CCE9F5"/>
+                        <a:srgbClr val="D1EEFA"/>
                       </a:solidFill>
                       <a:prstDash val="solid"/>
                     </a:lnL>
                     <a:lnR w="9525" cap="flat" cmpd="sng" algn="ctr">
                       <a:solidFill>
-                        <a:srgbClr val="CCE9F5"/>
+                        <a:srgbClr val="D1EEFA"/>
                       </a:solidFill>
                       <a:prstDash val="solid"/>
                     </a:lnR>
                     <a:lnT w="9525" cap="flat" cmpd="sng" algn="ctr">
                       <a:solidFill>
-                        <a:srgbClr val="CCE9F5"/>
+                        <a:srgbClr val="D1EEFA"/>
                       </a:solidFill>
                       <a:prstDash val="solid"/>
                     </a:lnT>
                     <a:lnB w="9525" cap="flat" cmpd="sng" algn="ctr">
                       <a:solidFill>
-                        <a:srgbClr val="CCE9F5"/>
+                        <a:srgbClr val="D1EEFA"/>
                       </a:solidFill>
                       <a:prstDash val="solid"/>
                     </a:lnB>
                     <a:solidFill>
-                      <a:srgbClr val="CCE9F5"/>
+                      <a:srgbClr val="D1EEFA"/>
                     </a:solidFill>
                   </a:tcPr>
                 </a:tc>
@@ -7170,30 +7170,30 @@
                   <a:tcPr anchor="ctr" marL="73152" marR="73152">
                     <a:lnL w="9525" cap="flat" cmpd="sng" algn="ctr">
                       <a:solidFill>
-                        <a:srgbClr val="CCE9F5"/>
+                        <a:srgbClr val="D1EEFA"/>
                       </a:solidFill>
                       <a:prstDash val="solid"/>
                     </a:lnL>
                     <a:lnR w="9525" cap="flat" cmpd="sng" algn="ctr">
                       <a:solidFill>
-                        <a:srgbClr val="CCE9F5"/>
+                        <a:srgbClr val="D1EEFA"/>
                       </a:solidFill>
                       <a:prstDash val="solid"/>
                     </a:lnR>
                     <a:lnT w="9525" cap="flat" cmpd="sng" algn="ctr">
                       <a:solidFill>
-                        <a:srgbClr val="CCE9F5"/>
+                        <a:srgbClr val="D1EEFA"/>
                       </a:solidFill>
                       <a:prstDash val="solid"/>
                     </a:lnT>
                     <a:lnB w="9525" cap="flat" cmpd="sng" algn="ctr">
                       <a:solidFill>
-                        <a:srgbClr val="CCE9F5"/>
+                        <a:srgbClr val="D1EEFA"/>
                       </a:solidFill>
                       <a:prstDash val="solid"/>
                     </a:lnB>
                     <a:solidFill>
-                      <a:srgbClr val="EEF7FB"/>
+                      <a:srgbClr val="EEF8FC"/>
                     </a:solidFill>
                   </a:tcPr>
                 </a:tc>
@@ -7216,30 +7216,30 @@
                   <a:tcPr anchor="ctr" marL="73152" marR="73152">
                     <a:lnL w="9525" cap="flat" cmpd="sng" algn="ctr">
                       <a:solidFill>
-                        <a:srgbClr val="CCE9F5"/>
+                        <a:srgbClr val="D1EEFA"/>
                       </a:solidFill>
                       <a:prstDash val="solid"/>
                     </a:lnL>
                     <a:lnR w="9525" cap="flat" cmpd="sng" algn="ctr">
                       <a:solidFill>
-                        <a:srgbClr val="CCE9F5"/>
+                        <a:srgbClr val="D1EEFA"/>
                       </a:solidFill>
                       <a:prstDash val="solid"/>
                     </a:lnR>
                     <a:lnT w="9525" cap="flat" cmpd="sng" algn="ctr">
                       <a:solidFill>
-                        <a:srgbClr val="CCE9F5"/>
+                        <a:srgbClr val="D1EEFA"/>
                       </a:solidFill>
                       <a:prstDash val="solid"/>
                     </a:lnT>
                     <a:lnB w="9525" cap="flat" cmpd="sng" algn="ctr">
                       <a:solidFill>
-                        <a:srgbClr val="CCE9F5"/>
+                        <a:srgbClr val="D1EEFA"/>
                       </a:solidFill>
                       <a:prstDash val="solid"/>
                     </a:lnB>
                     <a:solidFill>
-                      <a:srgbClr val="EEF7FB"/>
+                      <a:srgbClr val="EEF8FC"/>
                     </a:solidFill>
                   </a:tcPr>
                 </a:tc>
@@ -7262,30 +7262,30 @@
                   <a:tcPr anchor="ctr" marL="73152" marR="73152">
                     <a:lnL w="9525" cap="flat" cmpd="sng" algn="ctr">
                       <a:solidFill>
-                        <a:srgbClr val="CCE9F5"/>
+                        <a:srgbClr val="D1EEFA"/>
                       </a:solidFill>
                       <a:prstDash val="solid"/>
                     </a:lnL>
                     <a:lnR w="9525" cap="flat" cmpd="sng" algn="ctr">
                       <a:solidFill>
-                        <a:srgbClr val="CCE9F5"/>
+                        <a:srgbClr val="D1EEFA"/>
                       </a:solidFill>
                       <a:prstDash val="solid"/>
                     </a:lnR>
                     <a:lnT w="9525" cap="flat" cmpd="sng" algn="ctr">
                       <a:solidFill>
-                        <a:srgbClr val="CCE9F5"/>
+                        <a:srgbClr val="D1EEFA"/>
                       </a:solidFill>
                       <a:prstDash val="solid"/>
                     </a:lnT>
                     <a:lnB w="9525" cap="flat" cmpd="sng" algn="ctr">
                       <a:solidFill>
-                        <a:srgbClr val="CCE9F5"/>
+                        <a:srgbClr val="D1EEFA"/>
                       </a:solidFill>
                       <a:prstDash val="solid"/>
                     </a:lnB>
                     <a:solidFill>
-                      <a:srgbClr val="EEF7FB"/>
+                      <a:srgbClr val="EEF8FC"/>
                     </a:solidFill>
                   </a:tcPr>
                 </a:tc>
@@ -7300,7 +7300,7 @@
                       <a:r>
                         <a:rPr sz="1400" b="1">
                           <a:solidFill>
-                            <a:srgbClr val="11394A"/>
+                            <a:srgbClr val="11485F"/>
                           </a:solidFill>
                         </a:rPr>
                         <a:t>입원·수술</a:t>
@@ -7310,30 +7310,30 @@
                   <a:tcPr anchor="ctr" marL="73152" marR="73152">
                     <a:lnL w="9525" cap="flat" cmpd="sng" algn="ctr">
                       <a:solidFill>
-                        <a:srgbClr val="CCE9F5"/>
+                        <a:srgbClr val="D1EEFA"/>
                       </a:solidFill>
                       <a:prstDash val="solid"/>
                     </a:lnL>
                     <a:lnR w="9525" cap="flat" cmpd="sng" algn="ctr">
                       <a:solidFill>
-                        <a:srgbClr val="CCE9F5"/>
+                        <a:srgbClr val="D1EEFA"/>
                       </a:solidFill>
                       <a:prstDash val="solid"/>
                     </a:lnR>
                     <a:lnT w="9525" cap="flat" cmpd="sng" algn="ctr">
                       <a:solidFill>
-                        <a:srgbClr val="CCE9F5"/>
+                        <a:srgbClr val="D1EEFA"/>
                       </a:solidFill>
                       <a:prstDash val="solid"/>
                     </a:lnT>
                     <a:lnB w="9525" cap="flat" cmpd="sng" algn="ctr">
                       <a:solidFill>
-                        <a:srgbClr val="CCE9F5"/>
+                        <a:srgbClr val="D1EEFA"/>
                       </a:solidFill>
                       <a:prstDash val="solid"/>
                     </a:lnB>
                     <a:solidFill>
-                      <a:srgbClr val="CCE9F5"/>
+                      <a:srgbClr val="D1EEFA"/>
                     </a:solidFill>
                   </a:tcPr>
                 </a:tc>
@@ -7356,25 +7356,25 @@
                   <a:tcPr anchor="ctr" marL="73152" marR="73152">
                     <a:lnL w="9525" cap="flat" cmpd="sng" algn="ctr">
                       <a:solidFill>
-                        <a:srgbClr val="CCE9F5"/>
+                        <a:srgbClr val="D1EEFA"/>
                       </a:solidFill>
                       <a:prstDash val="solid"/>
                     </a:lnL>
                     <a:lnR w="9525" cap="flat" cmpd="sng" algn="ctr">
                       <a:solidFill>
-                        <a:srgbClr val="CCE9F5"/>
+                        <a:srgbClr val="D1EEFA"/>
                       </a:solidFill>
                       <a:prstDash val="solid"/>
                     </a:lnR>
                     <a:lnT w="9525" cap="flat" cmpd="sng" algn="ctr">
                       <a:solidFill>
-                        <a:srgbClr val="CCE9F5"/>
+                        <a:srgbClr val="D1EEFA"/>
                       </a:solidFill>
                       <a:prstDash val="solid"/>
                     </a:lnT>
                     <a:lnB w="9525" cap="flat" cmpd="sng" algn="ctr">
                       <a:solidFill>
-                        <a:srgbClr val="CCE9F5"/>
+                        <a:srgbClr val="D1EEFA"/>
                       </a:solidFill>
                       <a:prstDash val="solid"/>
                     </a:lnB>
@@ -7402,25 +7402,25 @@
                   <a:tcPr anchor="ctr" marL="73152" marR="73152">
                     <a:lnL w="9525" cap="flat" cmpd="sng" algn="ctr">
                       <a:solidFill>
-                        <a:srgbClr val="CCE9F5"/>
+                        <a:srgbClr val="D1EEFA"/>
                       </a:solidFill>
                       <a:prstDash val="solid"/>
                     </a:lnL>
                     <a:lnR w="9525" cap="flat" cmpd="sng" algn="ctr">
                       <a:solidFill>
-                        <a:srgbClr val="CCE9F5"/>
+                        <a:srgbClr val="D1EEFA"/>
                       </a:solidFill>
                       <a:prstDash val="solid"/>
                     </a:lnR>
                     <a:lnT w="9525" cap="flat" cmpd="sng" algn="ctr">
                       <a:solidFill>
-                        <a:srgbClr val="CCE9F5"/>
+                        <a:srgbClr val="D1EEFA"/>
                       </a:solidFill>
                       <a:prstDash val="solid"/>
                     </a:lnT>
                     <a:lnB w="9525" cap="flat" cmpd="sng" algn="ctr">
                       <a:solidFill>
-                        <a:srgbClr val="CCE9F5"/>
+                        <a:srgbClr val="D1EEFA"/>
                       </a:solidFill>
                       <a:prstDash val="solid"/>
                     </a:lnB>
@@ -7448,25 +7448,25 @@
                   <a:tcPr anchor="ctr" marL="73152" marR="73152">
                     <a:lnL w="9525" cap="flat" cmpd="sng" algn="ctr">
                       <a:solidFill>
-                        <a:srgbClr val="CCE9F5"/>
+                        <a:srgbClr val="D1EEFA"/>
                       </a:solidFill>
                       <a:prstDash val="solid"/>
                     </a:lnL>
                     <a:lnR w="9525" cap="flat" cmpd="sng" algn="ctr">
                       <a:solidFill>
-                        <a:srgbClr val="CCE9F5"/>
+                        <a:srgbClr val="D1EEFA"/>
                       </a:solidFill>
                       <a:prstDash val="solid"/>
                     </a:lnR>
                     <a:lnT w="9525" cap="flat" cmpd="sng" algn="ctr">
                       <a:solidFill>
-                        <a:srgbClr val="CCE9F5"/>
+                        <a:srgbClr val="D1EEFA"/>
                       </a:solidFill>
                       <a:prstDash val="solid"/>
                     </a:lnT>
                     <a:lnB w="9525" cap="flat" cmpd="sng" algn="ctr">
                       <a:solidFill>
-                        <a:srgbClr val="CCE9F5"/>
+                        <a:srgbClr val="D1EEFA"/>
                       </a:solidFill>
                       <a:prstDash val="solid"/>
                     </a:lnB>
@@ -7486,7 +7486,7 @@
                       <a:r>
                         <a:rPr sz="1400" b="1">
                           <a:solidFill>
-                            <a:srgbClr val="11394A"/>
+                            <a:srgbClr val="11485F"/>
                           </a:solidFill>
                         </a:rPr>
                         <a:t>상해</a:t>
@@ -7496,30 +7496,30 @@
                   <a:tcPr anchor="ctr" marL="73152" marR="73152">
                     <a:lnL w="9525" cap="flat" cmpd="sng" algn="ctr">
                       <a:solidFill>
-                        <a:srgbClr val="CCE9F5"/>
+                        <a:srgbClr val="D1EEFA"/>
                       </a:solidFill>
                       <a:prstDash val="solid"/>
                     </a:lnL>
                     <a:lnR w="9525" cap="flat" cmpd="sng" algn="ctr">
                       <a:solidFill>
-                        <a:srgbClr val="CCE9F5"/>
+                        <a:srgbClr val="D1EEFA"/>
                       </a:solidFill>
                       <a:prstDash val="solid"/>
                     </a:lnR>
                     <a:lnT w="9525" cap="flat" cmpd="sng" algn="ctr">
                       <a:solidFill>
-                        <a:srgbClr val="CCE9F5"/>
+                        <a:srgbClr val="D1EEFA"/>
                       </a:solidFill>
                       <a:prstDash val="solid"/>
                     </a:lnT>
                     <a:lnB w="9525" cap="flat" cmpd="sng" algn="ctr">
                       <a:solidFill>
-                        <a:srgbClr val="CCE9F5"/>
+                        <a:srgbClr val="D1EEFA"/>
                       </a:solidFill>
                       <a:prstDash val="solid"/>
                     </a:lnB>
                     <a:solidFill>
-                      <a:srgbClr val="CCE9F5"/>
+                      <a:srgbClr val="D1EEFA"/>
                     </a:solidFill>
                   </a:tcPr>
                 </a:tc>
@@ -7542,30 +7542,30 @@
                   <a:tcPr anchor="ctr" marL="73152" marR="73152">
                     <a:lnL w="9525" cap="flat" cmpd="sng" algn="ctr">
                       <a:solidFill>
-                        <a:srgbClr val="CCE9F5"/>
+                        <a:srgbClr val="D1EEFA"/>
                       </a:solidFill>
                       <a:prstDash val="solid"/>
                     </a:lnL>
                     <a:lnR w="9525" cap="flat" cmpd="sng" algn="ctr">
                       <a:solidFill>
-                        <a:srgbClr val="CCE9F5"/>
+                        <a:srgbClr val="D1EEFA"/>
                       </a:solidFill>
                       <a:prstDash val="solid"/>
                     </a:lnR>
                     <a:lnT w="9525" cap="flat" cmpd="sng" algn="ctr">
                       <a:solidFill>
-                        <a:srgbClr val="CCE9F5"/>
+                        <a:srgbClr val="D1EEFA"/>
                       </a:solidFill>
                       <a:prstDash val="solid"/>
                     </a:lnT>
                     <a:lnB w="9525" cap="flat" cmpd="sng" algn="ctr">
                       <a:solidFill>
-                        <a:srgbClr val="CCE9F5"/>
+                        <a:srgbClr val="D1EEFA"/>
                       </a:solidFill>
                       <a:prstDash val="solid"/>
                     </a:lnB>
                     <a:solidFill>
-                      <a:srgbClr val="EEF7FB"/>
+                      <a:srgbClr val="EEF8FC"/>
                     </a:solidFill>
                   </a:tcPr>
                 </a:tc>
@@ -7588,30 +7588,30 @@
                   <a:tcPr anchor="ctr" marL="73152" marR="73152">
                     <a:lnL w="9525" cap="flat" cmpd="sng" algn="ctr">
                       <a:solidFill>
-                        <a:srgbClr val="CCE9F5"/>
+                        <a:srgbClr val="D1EEFA"/>
                       </a:solidFill>
                       <a:prstDash val="solid"/>
                     </a:lnL>
                     <a:lnR w="9525" cap="flat" cmpd="sng" algn="ctr">
                       <a:solidFill>
-                        <a:srgbClr val="CCE9F5"/>
+                        <a:srgbClr val="D1EEFA"/>
                       </a:solidFill>
                       <a:prstDash val="solid"/>
                     </a:lnR>
                     <a:lnT w="9525" cap="flat" cmpd="sng" algn="ctr">
                       <a:solidFill>
-                        <a:srgbClr val="CCE9F5"/>
+                        <a:srgbClr val="D1EEFA"/>
                       </a:solidFill>
                       <a:prstDash val="solid"/>
                     </a:lnT>
                     <a:lnB w="9525" cap="flat" cmpd="sng" algn="ctr">
                       <a:solidFill>
-                        <a:srgbClr val="CCE9F5"/>
+                        <a:srgbClr val="D1EEFA"/>
                       </a:solidFill>
                       <a:prstDash val="solid"/>
                     </a:lnB>
                     <a:solidFill>
-                      <a:srgbClr val="EEF7FB"/>
+                      <a:srgbClr val="EEF8FC"/>
                     </a:solidFill>
                   </a:tcPr>
                 </a:tc>
@@ -7634,30 +7634,30 @@
                   <a:tcPr anchor="ctr" marL="73152" marR="73152">
                     <a:lnL w="9525" cap="flat" cmpd="sng" algn="ctr">
                       <a:solidFill>
-                        <a:srgbClr val="CCE9F5"/>
+                        <a:srgbClr val="D1EEFA"/>
                       </a:solidFill>
                       <a:prstDash val="solid"/>
                     </a:lnL>
                     <a:lnR w="9525" cap="flat" cmpd="sng" algn="ctr">
                       <a:solidFill>
-                        <a:srgbClr val="CCE9F5"/>
+                        <a:srgbClr val="D1EEFA"/>
                       </a:solidFill>
                       <a:prstDash val="solid"/>
                     </a:lnR>
                     <a:lnT w="9525" cap="flat" cmpd="sng" algn="ctr">
                       <a:solidFill>
-                        <a:srgbClr val="CCE9F5"/>
+                        <a:srgbClr val="D1EEFA"/>
                       </a:solidFill>
                       <a:prstDash val="solid"/>
                     </a:lnT>
                     <a:lnB w="9525" cap="flat" cmpd="sng" algn="ctr">
                       <a:solidFill>
-                        <a:srgbClr val="CCE9F5"/>
+                        <a:srgbClr val="D1EEFA"/>
                       </a:solidFill>
                       <a:prstDash val="solid"/>
                     </a:lnB>
                     <a:solidFill>
-                      <a:srgbClr val="EEF7FB"/>
+                      <a:srgbClr val="EEF8FC"/>
                     </a:solidFill>
                   </a:tcPr>
                 </a:tc>
@@ -7672,7 +7672,7 @@
                       <a:r>
                         <a:rPr sz="1400" b="1">
                           <a:solidFill>
-                            <a:srgbClr val="11394A"/>
+                            <a:srgbClr val="11485F"/>
                           </a:solidFill>
                         </a:rPr>
                         <a:t>실손의료</a:t>
@@ -7682,30 +7682,30 @@
                   <a:tcPr anchor="ctr" marL="73152" marR="73152">
                     <a:lnL w="9525" cap="flat" cmpd="sng" algn="ctr">
                       <a:solidFill>
-                        <a:srgbClr val="CCE9F5"/>
+                        <a:srgbClr val="D1EEFA"/>
                       </a:solidFill>
                       <a:prstDash val="solid"/>
                     </a:lnL>
                     <a:lnR w="9525" cap="flat" cmpd="sng" algn="ctr">
                       <a:solidFill>
-                        <a:srgbClr val="CCE9F5"/>
+                        <a:srgbClr val="D1EEFA"/>
                       </a:solidFill>
                       <a:prstDash val="solid"/>
                     </a:lnR>
                     <a:lnT w="9525" cap="flat" cmpd="sng" algn="ctr">
                       <a:solidFill>
-                        <a:srgbClr val="CCE9F5"/>
+                        <a:srgbClr val="D1EEFA"/>
                       </a:solidFill>
                       <a:prstDash val="solid"/>
                     </a:lnT>
                     <a:lnB w="9525" cap="flat" cmpd="sng" algn="ctr">
                       <a:solidFill>
-                        <a:srgbClr val="CCE9F5"/>
+                        <a:srgbClr val="D1EEFA"/>
                       </a:solidFill>
                       <a:prstDash val="solid"/>
                     </a:lnB>
                     <a:solidFill>
-                      <a:srgbClr val="CCE9F5"/>
+                      <a:srgbClr val="D1EEFA"/>
                     </a:solidFill>
                   </a:tcPr>
                 </a:tc>
@@ -7728,25 +7728,25 @@
                   <a:tcPr anchor="ctr" marL="73152" marR="73152">
                     <a:lnL w="9525" cap="flat" cmpd="sng" algn="ctr">
                       <a:solidFill>
-                        <a:srgbClr val="CCE9F5"/>
+                        <a:srgbClr val="D1EEFA"/>
                       </a:solidFill>
                       <a:prstDash val="solid"/>
                     </a:lnL>
                     <a:lnR w="9525" cap="flat" cmpd="sng" algn="ctr">
                       <a:solidFill>
-                        <a:srgbClr val="CCE9F5"/>
+                        <a:srgbClr val="D1EEFA"/>
                       </a:solidFill>
                       <a:prstDash val="solid"/>
                     </a:lnR>
                     <a:lnT w="9525" cap="flat" cmpd="sng" algn="ctr">
                       <a:solidFill>
-                        <a:srgbClr val="CCE9F5"/>
+                        <a:srgbClr val="D1EEFA"/>
                       </a:solidFill>
                       <a:prstDash val="solid"/>
                     </a:lnT>
                     <a:lnB w="9525" cap="flat" cmpd="sng" algn="ctr">
                       <a:solidFill>
-                        <a:srgbClr val="CCE9F5"/>
+                        <a:srgbClr val="D1EEFA"/>
                       </a:solidFill>
                       <a:prstDash val="solid"/>
                     </a:lnB>
@@ -7774,25 +7774,25 @@
                   <a:tcPr anchor="ctr" marL="73152" marR="73152">
                     <a:lnL w="9525" cap="flat" cmpd="sng" algn="ctr">
                       <a:solidFill>
-                        <a:srgbClr val="CCE9F5"/>
+                        <a:srgbClr val="D1EEFA"/>
                       </a:solidFill>
                       <a:prstDash val="solid"/>
                     </a:lnL>
                     <a:lnR w="9525" cap="flat" cmpd="sng" algn="ctr">
                       <a:solidFill>
-                        <a:srgbClr val="CCE9F5"/>
+                        <a:srgbClr val="D1EEFA"/>
                       </a:solidFill>
                       <a:prstDash val="solid"/>
                     </a:lnR>
                     <a:lnT w="9525" cap="flat" cmpd="sng" algn="ctr">
                       <a:solidFill>
-                        <a:srgbClr val="CCE9F5"/>
+                        <a:srgbClr val="D1EEFA"/>
                       </a:solidFill>
                       <a:prstDash val="solid"/>
                     </a:lnT>
                     <a:lnB w="9525" cap="flat" cmpd="sng" algn="ctr">
                       <a:solidFill>
-                        <a:srgbClr val="CCE9F5"/>
+                        <a:srgbClr val="D1EEFA"/>
                       </a:solidFill>
                       <a:prstDash val="solid"/>
                     </a:lnB>
@@ -7820,25 +7820,25 @@
                   <a:tcPr anchor="ctr" marL="73152" marR="73152">
                     <a:lnL w="9525" cap="flat" cmpd="sng" algn="ctr">
                       <a:solidFill>
-                        <a:srgbClr val="CCE9F5"/>
+                        <a:srgbClr val="D1EEFA"/>
                       </a:solidFill>
                       <a:prstDash val="solid"/>
                     </a:lnL>
                     <a:lnR w="9525" cap="flat" cmpd="sng" algn="ctr">
                       <a:solidFill>
-                        <a:srgbClr val="CCE9F5"/>
+                        <a:srgbClr val="D1EEFA"/>
                       </a:solidFill>
                       <a:prstDash val="solid"/>
                     </a:lnR>
                     <a:lnT w="9525" cap="flat" cmpd="sng" algn="ctr">
                       <a:solidFill>
-                        <a:srgbClr val="CCE9F5"/>
+                        <a:srgbClr val="D1EEFA"/>
                       </a:solidFill>
                       <a:prstDash val="solid"/>
                     </a:lnT>
                     <a:lnB w="9525" cap="flat" cmpd="sng" algn="ctr">
                       <a:solidFill>
-                        <a:srgbClr val="CCE9F5"/>
+                        <a:srgbClr val="D1EEFA"/>
                       </a:solidFill>
                       <a:prstDash val="solid"/>
                     </a:lnB>
@@ -7858,7 +7858,7 @@
                       <a:r>
                         <a:rPr sz="1400" b="1">
                           <a:solidFill>
-                            <a:srgbClr val="11394A"/>
+                            <a:srgbClr val="11485F"/>
                           </a:solidFill>
                         </a:rPr>
                         <a:t>연금·노후자금</a:t>
@@ -7868,30 +7868,30 @@
                   <a:tcPr anchor="ctr" marL="73152" marR="73152">
                     <a:lnL w="9525" cap="flat" cmpd="sng" algn="ctr">
                       <a:solidFill>
-                        <a:srgbClr val="CCE9F5"/>
+                        <a:srgbClr val="D1EEFA"/>
                       </a:solidFill>
                       <a:prstDash val="solid"/>
                     </a:lnL>
                     <a:lnR w="9525" cap="flat" cmpd="sng" algn="ctr">
                       <a:solidFill>
-                        <a:srgbClr val="CCE9F5"/>
+                        <a:srgbClr val="D1EEFA"/>
                       </a:solidFill>
                       <a:prstDash val="solid"/>
                     </a:lnR>
                     <a:lnT w="9525" cap="flat" cmpd="sng" algn="ctr">
                       <a:solidFill>
-                        <a:srgbClr val="CCE9F5"/>
+                        <a:srgbClr val="D1EEFA"/>
                       </a:solidFill>
                       <a:prstDash val="solid"/>
                     </a:lnT>
                     <a:lnB w="9525" cap="flat" cmpd="sng" algn="ctr">
                       <a:solidFill>
-                        <a:srgbClr val="CCE9F5"/>
+                        <a:srgbClr val="D1EEFA"/>
                       </a:solidFill>
                       <a:prstDash val="solid"/>
                     </a:lnB>
                     <a:solidFill>
-                      <a:srgbClr val="CCE9F5"/>
+                      <a:srgbClr val="D1EEFA"/>
                     </a:solidFill>
                   </a:tcPr>
                 </a:tc>
@@ -7914,30 +7914,30 @@
                   <a:tcPr anchor="ctr" marL="73152" marR="73152">
                     <a:lnL w="9525" cap="flat" cmpd="sng" algn="ctr">
                       <a:solidFill>
-                        <a:srgbClr val="CCE9F5"/>
+                        <a:srgbClr val="D1EEFA"/>
                       </a:solidFill>
                       <a:prstDash val="solid"/>
                     </a:lnL>
                     <a:lnR w="9525" cap="flat" cmpd="sng" algn="ctr">
                       <a:solidFill>
-                        <a:srgbClr val="CCE9F5"/>
+                        <a:srgbClr val="D1EEFA"/>
                       </a:solidFill>
                       <a:prstDash val="solid"/>
                     </a:lnR>
                     <a:lnT w="9525" cap="flat" cmpd="sng" algn="ctr">
                       <a:solidFill>
-                        <a:srgbClr val="CCE9F5"/>
+                        <a:srgbClr val="D1EEFA"/>
                       </a:solidFill>
                       <a:prstDash val="solid"/>
                     </a:lnT>
                     <a:lnB w="9525" cap="flat" cmpd="sng" algn="ctr">
                       <a:solidFill>
-                        <a:srgbClr val="CCE9F5"/>
+                        <a:srgbClr val="D1EEFA"/>
                       </a:solidFill>
                       <a:prstDash val="solid"/>
                     </a:lnB>
                     <a:solidFill>
-                      <a:srgbClr val="EEF7FB"/>
+                      <a:srgbClr val="EEF8FC"/>
                     </a:solidFill>
                   </a:tcPr>
                 </a:tc>
@@ -7960,30 +7960,30 @@
                   <a:tcPr anchor="ctr" marL="73152" marR="73152">
                     <a:lnL w="9525" cap="flat" cmpd="sng" algn="ctr">
                       <a:solidFill>
-                        <a:srgbClr val="CCE9F5"/>
+                        <a:srgbClr val="D1EEFA"/>
                       </a:solidFill>
                       <a:prstDash val="solid"/>
                     </a:lnL>
                     <a:lnR w="9525" cap="flat" cmpd="sng" algn="ctr">
                       <a:solidFill>
-                        <a:srgbClr val="CCE9F5"/>
+                        <a:srgbClr val="D1EEFA"/>
                       </a:solidFill>
                       <a:prstDash val="solid"/>
                     </a:lnR>
                     <a:lnT w="9525" cap="flat" cmpd="sng" algn="ctr">
                       <a:solidFill>
-                        <a:srgbClr val="CCE9F5"/>
+                        <a:srgbClr val="D1EEFA"/>
                       </a:solidFill>
                       <a:prstDash val="solid"/>
                     </a:lnT>
                     <a:lnB w="9525" cap="flat" cmpd="sng" algn="ctr">
                       <a:solidFill>
-                        <a:srgbClr val="CCE9F5"/>
+                        <a:srgbClr val="D1EEFA"/>
                       </a:solidFill>
                       <a:prstDash val="solid"/>
                     </a:lnB>
                     <a:solidFill>
-                      <a:srgbClr val="EEF7FB"/>
+                      <a:srgbClr val="EEF8FC"/>
                     </a:solidFill>
                   </a:tcPr>
                 </a:tc>
@@ -8006,30 +8006,30 @@
                   <a:tcPr anchor="ctr" marL="73152" marR="73152">
                     <a:lnL w="9525" cap="flat" cmpd="sng" algn="ctr">
                       <a:solidFill>
-                        <a:srgbClr val="CCE9F5"/>
+                        <a:srgbClr val="D1EEFA"/>
                       </a:solidFill>
                       <a:prstDash val="solid"/>
                     </a:lnL>
                     <a:lnR w="9525" cap="flat" cmpd="sng" algn="ctr">
                       <a:solidFill>
-                        <a:srgbClr val="CCE9F5"/>
+                        <a:srgbClr val="D1EEFA"/>
                       </a:solidFill>
                       <a:prstDash val="solid"/>
                     </a:lnR>
                     <a:lnT w="9525" cap="flat" cmpd="sng" algn="ctr">
                       <a:solidFill>
-                        <a:srgbClr val="CCE9F5"/>
+                        <a:srgbClr val="D1EEFA"/>
                       </a:solidFill>
                       <a:prstDash val="solid"/>
                     </a:lnT>
                     <a:lnB w="9525" cap="flat" cmpd="sng" algn="ctr">
                       <a:solidFill>
-                        <a:srgbClr val="CCE9F5"/>
+                        <a:srgbClr val="D1EEFA"/>
                       </a:solidFill>
                       <a:prstDash val="solid"/>
                     </a:lnB>
                     <a:solidFill>
-                      <a:srgbClr val="EEF7FB"/>
+                      <a:srgbClr val="EEF8FC"/>
                     </a:solidFill>
                   </a:tcPr>
                 </a:tc>
@@ -8079,7 +8079,7 @@
             <a:avLst/>
           </a:prstGeom>
           <a:solidFill>
-            <a:srgbClr val="25799D"/>
+            <a:srgbClr val="2695C5"/>
           </a:solidFill>
           <a:ln>
             <a:noFill/>
@@ -8148,11 +8148,11 @@
             </a:avLst>
           </a:prstGeom>
           <a:solidFill>
-            <a:srgbClr val="EEF7FB"/>
+            <a:srgbClr val="EEF8FC"/>
           </a:solidFill>
           <a:ln w="15875">
             <a:solidFill>
-              <a:srgbClr val="CCE9F5"/>
+              <a:srgbClr val="D1EEFA"/>
             </a:solidFill>
           </a:ln>
         </p:spPr>
@@ -8179,7 +8179,7 @@
             <a:avLst/>
           </a:prstGeom>
           <a:solidFill>
-            <a:srgbClr val="25799D"/>
+            <a:srgbClr val="2695C5"/>
           </a:solidFill>
           <a:ln>
             <a:noFill/>
@@ -8237,7 +8237,7 @@
             <a:r>
               <a:rPr sz="1700" b="1" i="0">
                 <a:solidFill>
-                  <a:srgbClr val="11394A"/>
+                  <a:srgbClr val="11485F"/>
                 </a:solidFill>
               </a:rPr>
               <a:t>월 보험료 합계</a:t>
@@ -8300,11 +8300,11 @@
             </a:avLst>
           </a:prstGeom>
           <a:solidFill>
-            <a:srgbClr val="EEF7FB"/>
+            <a:srgbClr val="EEF8FC"/>
           </a:solidFill>
           <a:ln w="15875">
             <a:solidFill>
-              <a:srgbClr val="CCE9F5"/>
+              <a:srgbClr val="D1EEFA"/>
             </a:solidFill>
           </a:ln>
         </p:spPr>
@@ -8331,7 +8331,7 @@
             <a:avLst/>
           </a:prstGeom>
           <a:solidFill>
-            <a:srgbClr val="25799D"/>
+            <a:srgbClr val="2695C5"/>
           </a:solidFill>
           <a:ln>
             <a:noFill/>
@@ -8389,7 +8389,7 @@
             <a:r>
               <a:rPr sz="1700" b="1" i="0">
                 <a:solidFill>
-                  <a:srgbClr val="11394A"/>
+                  <a:srgbClr val="11485F"/>
                 </a:solidFill>
               </a:rPr>
               <a:t>연 보험료 합계</a:t>
@@ -8452,11 +8452,11 @@
             </a:avLst>
           </a:prstGeom>
           <a:solidFill>
-            <a:srgbClr val="EEF7FB"/>
+            <a:srgbClr val="EEF8FC"/>
           </a:solidFill>
           <a:ln w="15875">
             <a:solidFill>
-              <a:srgbClr val="CCE9F5"/>
+              <a:srgbClr val="D1EEFA"/>
             </a:solidFill>
           </a:ln>
         </p:spPr>
@@ -8483,7 +8483,7 @@
             <a:avLst/>
           </a:prstGeom>
           <a:solidFill>
-            <a:srgbClr val="25799D"/>
+            <a:srgbClr val="2695C5"/>
           </a:solidFill>
           <a:ln>
             <a:noFill/>
@@ -8541,7 +8541,7 @@
             <a:r>
               <a:rPr sz="1700" b="1" i="0">
                 <a:solidFill>
-                  <a:srgbClr val="11394A"/>
+                  <a:srgbClr val="11485F"/>
                 </a:solidFill>
               </a:rPr>
               <a:t>월 소득 대비</a:t>
@@ -8666,7 +8666,7 @@
             <a:avLst/>
           </a:prstGeom>
           <a:solidFill>
-            <a:srgbClr val="25799D"/>
+            <a:srgbClr val="2695C5"/>
           </a:solidFill>
           <a:ln>
             <a:noFill/>
@@ -8735,11 +8735,11 @@
             </a:avLst>
           </a:prstGeom>
           <a:solidFill>
-            <a:srgbClr val="EEF7FB"/>
+            <a:srgbClr val="EEF8FC"/>
           </a:solidFill>
           <a:ln w="15875">
             <a:solidFill>
-              <a:srgbClr val="CCE9F5"/>
+              <a:srgbClr val="D1EEFA"/>
             </a:solidFill>
           </a:ln>
         </p:spPr>
@@ -8766,7 +8766,7 @@
             <a:avLst/>
           </a:prstGeom>
           <a:solidFill>
-            <a:srgbClr val="25799D"/>
+            <a:srgbClr val="2695C5"/>
           </a:solidFill>
           <a:ln>
             <a:noFill/>
@@ -8824,7 +8824,7 @@
             <a:r>
               <a:rPr sz="1800" b="1" i="0">
                 <a:solidFill>
-                  <a:srgbClr val="11394A"/>
+                  <a:srgbClr val="11485F"/>
                 </a:solidFill>
               </a:rPr>
               <a:t>확인할 것</a:t>
@@ -8887,11 +8887,11 @@
             </a:avLst>
           </a:prstGeom>
           <a:solidFill>
-            <a:srgbClr val="EEF7FB"/>
+            <a:srgbClr val="EEF8FC"/>
           </a:solidFill>
           <a:ln w="15875">
             <a:solidFill>
-              <a:srgbClr val="CCE9F5"/>
+              <a:srgbClr val="D1EEFA"/>
             </a:solidFill>
           </a:ln>
         </p:spPr>
@@ -8918,7 +8918,7 @@
             <a:avLst/>
           </a:prstGeom>
           <a:solidFill>
-            <a:srgbClr val="25799D"/>
+            <a:srgbClr val="2695C5"/>
           </a:solidFill>
           <a:ln>
             <a:noFill/>
@@ -8976,7 +8976,7 @@
             <a:r>
               <a:rPr sz="1800" b="1" i="0">
                 <a:solidFill>
-                  <a:srgbClr val="11394A"/>
+                  <a:srgbClr val="11485F"/>
                 </a:solidFill>
               </a:rPr>
               <a:t>문의할 것</a:t>
@@ -9039,11 +9039,11 @@
             </a:avLst>
           </a:prstGeom>
           <a:solidFill>
-            <a:srgbClr val="EEF7FB"/>
+            <a:srgbClr val="EEF8FC"/>
           </a:solidFill>
           <a:ln w="15875">
             <a:solidFill>
-              <a:srgbClr val="CCE9F5"/>
+              <a:srgbClr val="D1EEFA"/>
             </a:solidFill>
           </a:ln>
         </p:spPr>
@@ -9070,7 +9070,7 @@
             <a:avLst/>
           </a:prstGeom>
           <a:solidFill>
-            <a:srgbClr val="25799D"/>
+            <a:srgbClr val="2695C5"/>
           </a:solidFill>
           <a:ln>
             <a:noFill/>
@@ -9128,7 +9128,7 @@
             <a:r>
               <a:rPr sz="1800" b="1" i="0">
                 <a:solidFill>
-                  <a:srgbClr val="11394A"/>
+                  <a:srgbClr val="11485F"/>
                 </a:solidFill>
               </a:rPr>
               <a:t>정리할 날짜</a:t>
@@ -9231,34 +9231,34 @@
         <a:sysClr val="window" lastClr="FFFFFF"/>
       </a:lt1>
       <a:dk2>
-        <a:srgbClr val="11394A"/>
+        <a:srgbClr val="11485F"/>
       </a:dk2>
       <a:lt2>
-        <a:srgbClr val="EEF7FB"/>
+        <a:srgbClr val="EEF8FC"/>
       </a:lt2>
       <a:accent1>
-        <a:srgbClr val="25799D"/>
+        <a:srgbClr val="2695C5"/>
       </a:accent1>
       <a:accent2>
-        <a:srgbClr val="913B4C"/>
+        <a:srgbClr val="209DB6"/>
       </a:accent2>
       <a:accent3>
-        <a:srgbClr val="11394A"/>
+        <a:srgbClr val="11485F"/>
       </a:accent3>
       <a:accent4>
-        <a:srgbClr val="CCE9F5"/>
+        <a:srgbClr val="D1EEFA"/>
       </a:accent4>
       <a:accent5>
-        <a:srgbClr val="5B5A74"/>
+        <a:srgbClr val="2399BE"/>
       </a:accent5>
       <a:accent6>
-        <a:srgbClr val="708892"/>
+        <a:srgbClr val="70919F"/>
       </a:accent6>
       <a:hlink>
-        <a:srgbClr val="25799D"/>
+        <a:srgbClr val="2695C5"/>
       </a:hlink>
       <a:folHlink>
-        <a:srgbClr val="11394A"/>
+        <a:srgbClr val="11485F"/>
       </a:folHlink>
     </a:clrScheme>
     <a:fontScheme name="Office">

--- a/public/fun/pack/pptx/review/보장점검양식_18_가족점검_바닷가등대.pptx
+++ b/public/fun/pack/pptx/review/보장점검양식_18_가족점검_바닷가등대.pptx
@@ -3286,6 +3286,14 @@
 <file path=ppt/slides/slide1.xml><?xml version="1.0" encoding="utf-8"?>
 <p:sld xmlns:a="http://schemas.openxmlformats.org/drawingml/2006/main" xmlns:p="http://schemas.openxmlformats.org/presentationml/2006/main" xmlns:r="http://schemas.openxmlformats.org/officeDocument/2006/relationships">
   <p:cSld>
+    <p:bg>
+      <p:bgPr>
+        <a:solidFill>
+          <a:srgbClr val="EAF7FD"/>
+        </a:solidFill>
+        <a:effectLst/>
+      </p:bgPr>
+    </p:bg>
     <p:spTree>
       <p:nvGrpSpPr>
         <p:cNvPr id="1" name=""/>
@@ -3293,30 +3301,102 @@
         <p:nvPr/>
       </p:nvGrpSpPr>
       <p:grpSpPr/>
-      <p:pic>
-        <p:nvPicPr>
-          <p:cNvPr id="3" name="표지 그림" descr="review-18.jpg"/>
-          <p:cNvPicPr>
-            <a:picLocks noChangeAspect="1"/>
-          </p:cNvPicPr>
+      <p:sp>
+        <p:nvSpPr>
+          <p:cNvPr id="3" name="장식"/>
+          <p:cNvSpPr/>
           <p:nvPr/>
-        </p:nvPicPr>
-        <p:blipFill>
-          <a:blip r:embed="rId2"/>
-          <a:stretch>
-            <a:fillRect/>
-          </a:stretch>
-        </p:blipFill>
-        <p:spPr>
-          <a:xfrm>
-            <a:off x="0" y="0"/>
-            <a:ext cx="12191695" cy="6858000"/>
+        </p:nvSpPr>
+        <p:spPr>
+          <a:xfrm>
+            <a:off x="-731666" y="137159"/>
+            <a:ext cx="6583680" cy="6583680"/>
+          </a:xfrm>
+          <a:prstGeom prst="ellipse">
+            <a:avLst/>
+          </a:prstGeom>
+          <a:solidFill>
+            <a:srgbClr val="A5DCF3"/>
+          </a:solidFill>
+          <a:ln>
+            <a:noFill/>
+          </a:ln>
+        </p:spPr>
+        <p:txBody>
+          <a:bodyPr rtlCol="0" anchor="ctr"/>
+          <a:lstStyle/>
+          <a:p>
+            <a:pPr algn="ctr"/>
+          </a:p>
+        </p:txBody>
+      </p:sp>
+      <p:sp>
+        <p:nvSpPr>
+          <p:cNvPr id="4" name="장식"/>
+          <p:cNvSpPr/>
+          <p:nvPr/>
+        </p:nvSpPr>
+        <p:spPr>
+          <a:xfrm>
+            <a:off x="670438" y="1325880"/>
+            <a:ext cx="4206240" cy="4206240"/>
+          </a:xfrm>
+          <a:prstGeom prst="ellipse">
+            <a:avLst/>
+          </a:prstGeom>
+          <a:solidFill>
+            <a:srgbClr val="7BC9EA"/>
+          </a:solidFill>
+          <a:ln>
+            <a:noFill/>
+          </a:ln>
+        </p:spPr>
+        <p:txBody>
+          <a:bodyPr rtlCol="0" anchor="ctr"/>
+          <a:lstStyle/>
+          <a:p>
+            <a:pPr algn="ctr"/>
+          </a:p>
+        </p:txBody>
+      </p:sp>
+      <p:sp>
+        <p:nvSpPr>
+          <p:cNvPr id="5" name="라벨"/>
+          <p:cNvSpPr txBox="1"/>
+          <p:nvPr/>
+        </p:nvSpPr>
+        <p:spPr>
+          <a:xfrm>
+            <a:off x="6827349" y="2148840"/>
+            <a:ext cx="4632844" cy="274320"/>
           </a:xfrm>
           <a:prstGeom prst="rect">
             <a:avLst/>
           </a:prstGeom>
-        </p:spPr>
-      </p:pic>
+          <a:noFill/>
+        </p:spPr>
+        <p:txBody>
+          <a:bodyPr wrap="square" lIns="54864" rIns="54864" tIns="27432" bIns="27432" anchor="t">
+            <a:noAutofit/>
+          </a:bodyPr>
+          <a:lstStyle/>
+          <a:p>
+            <a:pPr algn="l">
+              <a:lnSpc>
+                <a:spcPct val="115000"/>
+              </a:lnSpc>
+            </a:pPr>
+            <a:r>
+              <a:rPr sz="1000" b="1" i="0" spc="250">
+                <a:solidFill>
+                  <a:srgbClr val="26231F"/>
+                </a:solidFill>
+              </a:rPr>
+              <a:t>INSURANCE CHECK</a:t>
+            </a:r>
+          </a:p>
+        </p:txBody>
+      </p:sp>
       <p:sp>
         <p:nvSpPr>
           <p:cNvPr id="2" name="Title 1"/>
@@ -3329,8 +3409,8 @@
         </p:nvSpPr>
         <p:spPr>
           <a:xfrm>
-            <a:off x="853418" y="2057400"/>
-            <a:ext cx="6095847" cy="1554480"/>
+            <a:off x="6827349" y="2606040"/>
+            <a:ext cx="4632844" cy="1188720"/>
           </a:xfrm>
         </p:spPr>
         <p:txBody>
@@ -3347,7 +3427,7 @@
             <a:r>
               <a:rPr sz="3600" b="1" i="0">
                 <a:solidFill>
-                  <a:srgbClr val="11485F"/>
+                  <a:srgbClr val="26231F"/>
                 </a:solidFill>
               </a:rPr>
               <a:t>우리 보험 점검 시간</a:t>
@@ -3357,14 +3437,14 @@
       </p:sp>
       <p:sp>
         <p:nvSpPr>
-          <p:cNvPr id="4" name="한 줄 문구"/>
+          <p:cNvPr id="6" name="한 줄 문구"/>
           <p:cNvSpPr txBox="1"/>
           <p:nvPr/>
         </p:nvSpPr>
         <p:spPr>
           <a:xfrm>
-            <a:off x="853418" y="3749039"/>
-            <a:ext cx="6095847" cy="822960"/>
+            <a:off x="6827349" y="3886200"/>
+            <a:ext cx="4632844" cy="822960"/>
           </a:xfrm>
           <a:prstGeom prst="rect">
             <a:avLst/>
@@ -3383,9 +3463,9 @@
               </a:lnSpc>
             </a:pPr>
             <a:r>
-              <a:rPr sz="1700" b="0" i="1">
+              <a:rPr sz="1700" b="0" i="0">
                 <a:solidFill>
-                  <a:srgbClr val="11485F"/>
+                  <a:srgbClr val="26231F"/>
                 </a:solidFill>
               </a:rPr>
               <a:t>누구 보험료가 얼마인지 한눈에 봅니다</a:t>
@@ -3395,14 +3475,14 @@
       </p:sp>
       <p:sp>
         <p:nvSpPr>
-          <p:cNvPr id="5" name="안내 문구"/>
+          <p:cNvPr id="7" name="안내 문구"/>
           <p:cNvSpPr txBox="1"/>
           <p:nvPr/>
         </p:nvSpPr>
         <p:spPr>
           <a:xfrm>
-            <a:off x="853418" y="4617720"/>
-            <a:ext cx="6095847" cy="914400"/>
+            <a:off x="6827349" y="4754880"/>
+            <a:ext cx="4632844" cy="914400"/>
           </a:xfrm>
           <a:prstGeom prst="rect">
             <a:avLst/>
@@ -3423,10 +3503,10 @@
             <a:r>
               <a:rPr sz="1400" b="0" i="0">
                 <a:solidFill>
-                  <a:srgbClr val="666666"/>
+                  <a:srgbClr val="26231F"/>
                 </a:solidFill>
               </a:rPr>
-              <a:t>가족 점검 · 2027. 00. 00</a:t>
+              <a:t>가족 점검 · 날짜 입력</a:t>
             </a:r>
           </a:p>
           <a:p>
@@ -3438,7 +3518,7 @@
             <a:r>
               <a:rPr sz="1400" b="0" i="0">
                 <a:solidFill>
-                  <a:srgbClr val="666666"/>
+                  <a:srgbClr val="26231F"/>
                 </a:solidFill>
               </a:rPr>
               <a:t>가입 내용을 정리하고 함께 확인하는 양식</a:t>
@@ -3480,14 +3560,83 @@
         </p:nvSpPr>
         <p:spPr>
           <a:xfrm>
-            <a:off x="0" y="384048"/>
-            <a:ext cx="9509522" cy="896112"/>
-          </a:xfrm>
-          <a:prstGeom prst="homePlate">
+            <a:off x="640080" y="566928"/>
+            <a:ext cx="64008" cy="868680"/>
+          </a:xfrm>
+          <a:prstGeom prst="roundRect">
+            <a:avLst>
+              <a:gd name="adj" fmla="val 50000"/>
+            </a:avLst>
+          </a:prstGeom>
+          <a:solidFill>
+            <a:srgbClr val="7BC9EA"/>
+          </a:solidFill>
+          <a:ln>
+            <a:noFill/>
+          </a:ln>
+        </p:spPr>
+        <p:txBody>
+          <a:bodyPr rtlCol="0" anchor="ctr"/>
+          <a:lstStyle/>
+          <a:p>
+            <a:pPr algn="ctr"/>
+          </a:p>
+        </p:txBody>
+      </p:sp>
+      <p:sp>
+        <p:nvSpPr>
+          <p:cNvPr id="4" name="상단 라벨"/>
+          <p:cNvSpPr txBox="1"/>
+          <p:nvPr/>
+        </p:nvSpPr>
+        <p:spPr>
+          <a:xfrm>
+            <a:off x="868680" y="274320"/>
+            <a:ext cx="5486400" cy="274320"/>
+          </a:xfrm>
+          <a:prstGeom prst="rect">
+            <a:avLst/>
+          </a:prstGeom>
+          <a:noFill/>
+        </p:spPr>
+        <p:txBody>
+          <a:bodyPr wrap="square" lIns="54864" rIns="54864" tIns="27432" bIns="27432" anchor="ctr">
+            <a:noAutofit/>
+          </a:bodyPr>
+          <a:lstStyle/>
+          <a:p>
+            <a:pPr algn="l">
+              <a:lnSpc>
+                <a:spcPct val="115000"/>
+              </a:lnSpc>
+            </a:pPr>
+            <a:r>
+              <a:rPr sz="900" b="1" i="0" spc="250">
+                <a:solidFill>
+                  <a:srgbClr val="8E8780"/>
+                </a:solidFill>
+              </a:rPr>
+              <a:t>INSURANCE CHECK</a:t>
+            </a:r>
+          </a:p>
+        </p:txBody>
+      </p:sp>
+      <p:sp>
+        <p:nvSpPr>
+          <p:cNvPr id="5" name="포인트"/>
+          <p:cNvSpPr/>
+          <p:nvPr/>
+        </p:nvSpPr>
+        <p:spPr>
+          <a:xfrm>
+            <a:off x="11167567" y="667512"/>
+            <a:ext cx="310896" cy="310896"/>
+          </a:xfrm>
+          <a:prstGeom prst="heart">
             <a:avLst/>
           </a:prstGeom>
           <a:solidFill>
-            <a:srgbClr val="2695C5"/>
+            <a:srgbClr val="A5DCF3"/>
           </a:solidFill>
           <a:ln>
             <a:noFill/>
@@ -3513,8 +3662,8 @@
         </p:nvSpPr>
         <p:spPr>
           <a:xfrm>
-            <a:off x="640080" y="411480"/>
-            <a:ext cx="8412242" cy="822960"/>
+            <a:off x="868680" y="566928"/>
+            <a:ext cx="9448495" cy="868680"/>
           </a:xfrm>
         </p:spPr>
         <p:txBody>
@@ -3531,7 +3680,7 @@
             <a:r>
               <a:rPr sz="3000" b="1" i="0">
                 <a:solidFill>
-                  <a:srgbClr val="FFFFFF"/>
+                  <a:srgbClr val="26231F"/>
                 </a:solidFill>
               </a:rPr>
               <a:t>점검 대상 현황</a:t>
@@ -3541,14 +3690,14 @@
       </p:sp>
       <p:graphicFrame>
         <p:nvGraphicFramePr>
-          <p:cNvPr id="4" name="표"/>
+          <p:cNvPr id="6" name="표"/>
           <p:cNvGraphicFramePr>
             <a:graphicFrameLocks noGrp="1"/>
           </p:cNvGraphicFramePr>
           <p:nvPr/>
         </p:nvGraphicFramePr>
         <p:xfrm>
-          <a:off x="640080" y="1645920"/>
+          <a:off x="640080" y="1783080"/>
           <a:ext cx="10911532" cy="3657600"/>
         </p:xfrm>
         <a:graphic>
@@ -3573,7 +3722,7 @@
                       <a:r>
                         <a:rPr sz="1600" b="1">
                           <a:solidFill>
-                            <a:srgbClr val="FFFFFF"/>
+                            <a:srgbClr val="26231F"/>
                           </a:solidFill>
                         </a:rPr>
                         <a:t>구분</a:t>
@@ -3583,30 +3732,30 @@
                   <a:tcPr anchor="ctr" marL="73152" marR="73152">
                     <a:lnL w="9525" cap="flat" cmpd="sng" algn="ctr">
                       <a:solidFill>
-                        <a:srgbClr val="2695C5"/>
+                        <a:srgbClr val="7BC9EA"/>
                       </a:solidFill>
                       <a:prstDash val="solid"/>
                     </a:lnL>
                     <a:lnR w="9525" cap="flat" cmpd="sng" algn="ctr">
                       <a:solidFill>
-                        <a:srgbClr val="2695C5"/>
+                        <a:srgbClr val="7BC9EA"/>
                       </a:solidFill>
                       <a:prstDash val="solid"/>
                     </a:lnR>
                     <a:lnT w="9525" cap="flat" cmpd="sng" algn="ctr">
                       <a:solidFill>
-                        <a:srgbClr val="2695C5"/>
+                        <a:srgbClr val="7BC9EA"/>
                       </a:solidFill>
                       <a:prstDash val="solid"/>
                     </a:lnT>
                     <a:lnB w="9525" cap="flat" cmpd="sng" algn="ctr">
                       <a:solidFill>
-                        <a:srgbClr val="2695C5"/>
+                        <a:srgbClr val="7BC9EA"/>
                       </a:solidFill>
                       <a:prstDash val="solid"/>
                     </a:lnB>
                     <a:solidFill>
-                      <a:srgbClr val="2695C5"/>
+                      <a:srgbClr val="7BC9EA"/>
                     </a:solidFill>
                   </a:tcPr>
                 </a:tc>
@@ -3619,7 +3768,7 @@
                       <a:r>
                         <a:rPr sz="1600" b="1">
                           <a:solidFill>
-                            <a:srgbClr val="FFFFFF"/>
+                            <a:srgbClr val="26231F"/>
                           </a:solidFill>
                         </a:rPr>
                         <a:t>아빠</a:t>
@@ -3629,30 +3778,30 @@
                   <a:tcPr anchor="ctr" marL="73152" marR="73152">
                     <a:lnL w="9525" cap="flat" cmpd="sng" algn="ctr">
                       <a:solidFill>
-                        <a:srgbClr val="2695C5"/>
+                        <a:srgbClr val="7BC9EA"/>
                       </a:solidFill>
                       <a:prstDash val="solid"/>
                     </a:lnL>
                     <a:lnR w="9525" cap="flat" cmpd="sng" algn="ctr">
                       <a:solidFill>
-                        <a:srgbClr val="2695C5"/>
+                        <a:srgbClr val="7BC9EA"/>
                       </a:solidFill>
                       <a:prstDash val="solid"/>
                     </a:lnR>
                     <a:lnT w="9525" cap="flat" cmpd="sng" algn="ctr">
                       <a:solidFill>
-                        <a:srgbClr val="2695C5"/>
+                        <a:srgbClr val="7BC9EA"/>
                       </a:solidFill>
                       <a:prstDash val="solid"/>
                     </a:lnT>
                     <a:lnB w="9525" cap="flat" cmpd="sng" algn="ctr">
                       <a:solidFill>
-                        <a:srgbClr val="2695C5"/>
+                        <a:srgbClr val="7BC9EA"/>
                       </a:solidFill>
                       <a:prstDash val="solid"/>
                     </a:lnB>
                     <a:solidFill>
-                      <a:srgbClr val="2695C5"/>
+                      <a:srgbClr val="7BC9EA"/>
                     </a:solidFill>
                   </a:tcPr>
                 </a:tc>
@@ -3665,7 +3814,7 @@
                       <a:r>
                         <a:rPr sz="1600" b="1">
                           <a:solidFill>
-                            <a:srgbClr val="FFFFFF"/>
+                            <a:srgbClr val="26231F"/>
                           </a:solidFill>
                         </a:rPr>
                         <a:t>엄마</a:t>
@@ -3675,30 +3824,30 @@
                   <a:tcPr anchor="ctr" marL="73152" marR="73152">
                     <a:lnL w="9525" cap="flat" cmpd="sng" algn="ctr">
                       <a:solidFill>
-                        <a:srgbClr val="2695C5"/>
+                        <a:srgbClr val="7BC9EA"/>
                       </a:solidFill>
                       <a:prstDash val="solid"/>
                     </a:lnL>
                     <a:lnR w="9525" cap="flat" cmpd="sng" algn="ctr">
                       <a:solidFill>
-                        <a:srgbClr val="2695C5"/>
+                        <a:srgbClr val="7BC9EA"/>
                       </a:solidFill>
                       <a:prstDash val="solid"/>
                     </a:lnR>
                     <a:lnT w="9525" cap="flat" cmpd="sng" algn="ctr">
                       <a:solidFill>
-                        <a:srgbClr val="2695C5"/>
+                        <a:srgbClr val="7BC9EA"/>
                       </a:solidFill>
                       <a:prstDash val="solid"/>
                     </a:lnT>
                     <a:lnB w="9525" cap="flat" cmpd="sng" algn="ctr">
                       <a:solidFill>
-                        <a:srgbClr val="2695C5"/>
+                        <a:srgbClr val="7BC9EA"/>
                       </a:solidFill>
                       <a:prstDash val="solid"/>
                     </a:lnB>
                     <a:solidFill>
-                      <a:srgbClr val="2695C5"/>
+                      <a:srgbClr val="7BC9EA"/>
                     </a:solidFill>
                   </a:tcPr>
                 </a:tc>
@@ -3711,7 +3860,7 @@
                       <a:r>
                         <a:rPr sz="1600" b="1">
                           <a:solidFill>
-                            <a:srgbClr val="FFFFFF"/>
+                            <a:srgbClr val="26231F"/>
                           </a:solidFill>
                         </a:rPr>
                         <a:t>자녀</a:t>
@@ -3721,30 +3870,30 @@
                   <a:tcPr anchor="ctr" marL="73152" marR="73152">
                     <a:lnL w="9525" cap="flat" cmpd="sng" algn="ctr">
                       <a:solidFill>
-                        <a:srgbClr val="2695C5"/>
+                        <a:srgbClr val="7BC9EA"/>
                       </a:solidFill>
                       <a:prstDash val="solid"/>
                     </a:lnL>
                     <a:lnR w="9525" cap="flat" cmpd="sng" algn="ctr">
                       <a:solidFill>
-                        <a:srgbClr val="2695C5"/>
+                        <a:srgbClr val="7BC9EA"/>
                       </a:solidFill>
                       <a:prstDash val="solid"/>
                     </a:lnR>
                     <a:lnT w="9525" cap="flat" cmpd="sng" algn="ctr">
                       <a:solidFill>
-                        <a:srgbClr val="2695C5"/>
+                        <a:srgbClr val="7BC9EA"/>
                       </a:solidFill>
                       <a:prstDash val="solid"/>
                     </a:lnT>
                     <a:lnB w="9525" cap="flat" cmpd="sng" algn="ctr">
                       <a:solidFill>
-                        <a:srgbClr val="2695C5"/>
+                        <a:srgbClr val="7BC9EA"/>
                       </a:solidFill>
                       <a:prstDash val="solid"/>
                     </a:lnB>
                     <a:solidFill>
-                      <a:srgbClr val="2695C5"/>
+                      <a:srgbClr val="7BC9EA"/>
                     </a:solidFill>
                   </a:tcPr>
                 </a:tc>
@@ -3759,7 +3908,7 @@
                       <a:r>
                         <a:rPr sz="1600" b="1">
                           <a:solidFill>
-                            <a:srgbClr val="11485F"/>
+                            <a:srgbClr val="273F49"/>
                           </a:solidFill>
                         </a:rPr>
                         <a:t>이름</a:t>
@@ -3805,7 +3954,7 @@
                       <a:r>
                         <a:rPr sz="1600" b="0">
                           <a:solidFill>
-                            <a:srgbClr val="2B2B2B"/>
+                            <a:srgbClr val="26231F"/>
                           </a:solidFill>
                         </a:rPr>
                         <a:t/>
@@ -3851,7 +4000,7 @@
                       <a:r>
                         <a:rPr sz="1600" b="0">
                           <a:solidFill>
-                            <a:srgbClr val="2B2B2B"/>
+                            <a:srgbClr val="26231F"/>
                           </a:solidFill>
                         </a:rPr>
                         <a:t/>
@@ -3897,7 +4046,7 @@
                       <a:r>
                         <a:rPr sz="1600" b="0">
                           <a:solidFill>
-                            <a:srgbClr val="2B2B2B"/>
+                            <a:srgbClr val="26231F"/>
                           </a:solidFill>
                         </a:rPr>
                         <a:t/>
@@ -3945,7 +4094,7 @@
                       <a:r>
                         <a:rPr sz="1600" b="1">
                           <a:solidFill>
-                            <a:srgbClr val="11485F"/>
+                            <a:srgbClr val="273F49"/>
                           </a:solidFill>
                         </a:rPr>
                         <a:t>나이</a:t>
@@ -3991,7 +4140,7 @@
                       <a:r>
                         <a:rPr sz="1600" b="0">
                           <a:solidFill>
-                            <a:srgbClr val="2B2B2B"/>
+                            <a:srgbClr val="26231F"/>
                           </a:solidFill>
                         </a:rPr>
                         <a:t/>
@@ -4024,7 +4173,7 @@
                       <a:prstDash val="solid"/>
                     </a:lnB>
                     <a:solidFill>
-                      <a:srgbClr val="EEF8FC"/>
+                      <a:srgbClr val="EAF7FD"/>
                     </a:solidFill>
                   </a:tcPr>
                 </a:tc>
@@ -4037,7 +4186,7 @@
                       <a:r>
                         <a:rPr sz="1600" b="0">
                           <a:solidFill>
-                            <a:srgbClr val="2B2B2B"/>
+                            <a:srgbClr val="26231F"/>
                           </a:solidFill>
                         </a:rPr>
                         <a:t/>
@@ -4070,7 +4219,7 @@
                       <a:prstDash val="solid"/>
                     </a:lnB>
                     <a:solidFill>
-                      <a:srgbClr val="EEF8FC"/>
+                      <a:srgbClr val="EAF7FD"/>
                     </a:solidFill>
                   </a:tcPr>
                 </a:tc>
@@ -4083,7 +4232,7 @@
                       <a:r>
                         <a:rPr sz="1600" b="0">
                           <a:solidFill>
-                            <a:srgbClr val="2B2B2B"/>
+                            <a:srgbClr val="26231F"/>
                           </a:solidFill>
                         </a:rPr>
                         <a:t/>
@@ -4116,7 +4265,7 @@
                       <a:prstDash val="solid"/>
                     </a:lnB>
                     <a:solidFill>
-                      <a:srgbClr val="EEF8FC"/>
+                      <a:srgbClr val="EAF7FD"/>
                     </a:solidFill>
                   </a:tcPr>
                 </a:tc>
@@ -4131,7 +4280,7 @@
                       <a:r>
                         <a:rPr sz="1600" b="1">
                           <a:solidFill>
-                            <a:srgbClr val="11485F"/>
+                            <a:srgbClr val="273F49"/>
                           </a:solidFill>
                         </a:rPr>
                         <a:t>직업·학교</a:t>
@@ -4177,7 +4326,7 @@
                       <a:r>
                         <a:rPr sz="1600" b="0">
                           <a:solidFill>
-                            <a:srgbClr val="2B2B2B"/>
+                            <a:srgbClr val="26231F"/>
                           </a:solidFill>
                         </a:rPr>
                         <a:t/>
@@ -4223,7 +4372,7 @@
                       <a:r>
                         <a:rPr sz="1600" b="0">
                           <a:solidFill>
-                            <a:srgbClr val="2B2B2B"/>
+                            <a:srgbClr val="26231F"/>
                           </a:solidFill>
                         </a:rPr>
                         <a:t/>
@@ -4269,7 +4418,7 @@
                       <a:r>
                         <a:rPr sz="1600" b="0">
                           <a:solidFill>
-                            <a:srgbClr val="2B2B2B"/>
+                            <a:srgbClr val="26231F"/>
                           </a:solidFill>
                         </a:rPr>
                         <a:t/>
@@ -4317,7 +4466,7 @@
                       <a:r>
                         <a:rPr sz="1600" b="1">
                           <a:solidFill>
-                            <a:srgbClr val="11485F"/>
+                            <a:srgbClr val="273F49"/>
                           </a:solidFill>
                         </a:rPr>
                         <a:t>메모</a:t>
@@ -4363,7 +4512,7 @@
                       <a:r>
                         <a:rPr sz="1600" b="0">
                           <a:solidFill>
-                            <a:srgbClr val="2B2B2B"/>
+                            <a:srgbClr val="26231F"/>
                           </a:solidFill>
                         </a:rPr>
                         <a:t/>
@@ -4396,7 +4545,7 @@
                       <a:prstDash val="solid"/>
                     </a:lnB>
                     <a:solidFill>
-                      <a:srgbClr val="EEF8FC"/>
+                      <a:srgbClr val="EAF7FD"/>
                     </a:solidFill>
                   </a:tcPr>
                 </a:tc>
@@ -4409,7 +4558,7 @@
                       <a:r>
                         <a:rPr sz="1600" b="0">
                           <a:solidFill>
-                            <a:srgbClr val="2B2B2B"/>
+                            <a:srgbClr val="26231F"/>
                           </a:solidFill>
                         </a:rPr>
                         <a:t/>
@@ -4442,7 +4591,7 @@
                       <a:prstDash val="solid"/>
                     </a:lnB>
                     <a:solidFill>
-                      <a:srgbClr val="EEF8FC"/>
+                      <a:srgbClr val="EAF7FD"/>
                     </a:solidFill>
                   </a:tcPr>
                 </a:tc>
@@ -4455,7 +4604,7 @@
                       <a:r>
                         <a:rPr sz="1600" b="0">
                           <a:solidFill>
-                            <a:srgbClr val="2B2B2B"/>
+                            <a:srgbClr val="26231F"/>
                           </a:solidFill>
                         </a:rPr>
                         <a:t/>
@@ -4488,7 +4637,7 @@
                       <a:prstDash val="solid"/>
                     </a:lnB>
                     <a:solidFill>
-                      <a:srgbClr val="EEF8FC"/>
+                      <a:srgbClr val="EAF7FD"/>
                     </a:solidFill>
                   </a:tcPr>
                 </a:tc>
@@ -4531,14 +4680,83 @@
         </p:nvSpPr>
         <p:spPr>
           <a:xfrm>
-            <a:off x="0" y="384048"/>
-            <a:ext cx="9509522" cy="896112"/>
-          </a:xfrm>
-          <a:prstGeom prst="homePlate">
+            <a:off x="640080" y="566928"/>
+            <a:ext cx="64008" cy="868680"/>
+          </a:xfrm>
+          <a:prstGeom prst="roundRect">
+            <a:avLst>
+              <a:gd name="adj" fmla="val 50000"/>
+            </a:avLst>
+          </a:prstGeom>
+          <a:solidFill>
+            <a:srgbClr val="7BC9EA"/>
+          </a:solidFill>
+          <a:ln>
+            <a:noFill/>
+          </a:ln>
+        </p:spPr>
+        <p:txBody>
+          <a:bodyPr rtlCol="0" anchor="ctr"/>
+          <a:lstStyle/>
+          <a:p>
+            <a:pPr algn="ctr"/>
+          </a:p>
+        </p:txBody>
+      </p:sp>
+      <p:sp>
+        <p:nvSpPr>
+          <p:cNvPr id="4" name="상단 라벨"/>
+          <p:cNvSpPr txBox="1"/>
+          <p:nvPr/>
+        </p:nvSpPr>
+        <p:spPr>
+          <a:xfrm>
+            <a:off x="868680" y="274320"/>
+            <a:ext cx="5486400" cy="274320"/>
+          </a:xfrm>
+          <a:prstGeom prst="rect">
+            <a:avLst/>
+          </a:prstGeom>
+          <a:noFill/>
+        </p:spPr>
+        <p:txBody>
+          <a:bodyPr wrap="square" lIns="54864" rIns="54864" tIns="27432" bIns="27432" anchor="ctr">
+            <a:noAutofit/>
+          </a:bodyPr>
+          <a:lstStyle/>
+          <a:p>
+            <a:pPr algn="l">
+              <a:lnSpc>
+                <a:spcPct val="115000"/>
+              </a:lnSpc>
+            </a:pPr>
+            <a:r>
+              <a:rPr sz="900" b="1" i="0" spc="250">
+                <a:solidFill>
+                  <a:srgbClr val="8E8780"/>
+                </a:solidFill>
+              </a:rPr>
+              <a:t>INSURANCE CHECK</a:t>
+            </a:r>
+          </a:p>
+        </p:txBody>
+      </p:sp>
+      <p:sp>
+        <p:nvSpPr>
+          <p:cNvPr id="5" name="포인트"/>
+          <p:cNvSpPr/>
+          <p:nvPr/>
+        </p:nvSpPr>
+        <p:spPr>
+          <a:xfrm>
+            <a:off x="11167567" y="667512"/>
+            <a:ext cx="310896" cy="310896"/>
+          </a:xfrm>
+          <a:prstGeom prst="heart">
             <a:avLst/>
           </a:prstGeom>
           <a:solidFill>
-            <a:srgbClr val="2695C5"/>
+            <a:srgbClr val="A5DCF3"/>
           </a:solidFill>
           <a:ln>
             <a:noFill/>
@@ -4564,8 +4782,8 @@
         </p:nvSpPr>
         <p:spPr>
           <a:xfrm>
-            <a:off x="640080" y="411480"/>
-            <a:ext cx="8412242" cy="822960"/>
+            <a:off x="868680" y="566928"/>
+            <a:ext cx="9448495" cy="868680"/>
           </a:xfrm>
         </p:spPr>
         <p:txBody>
@@ -4582,7 +4800,7 @@
             <a:r>
               <a:rPr sz="3000" b="1" i="0">
                 <a:solidFill>
-                  <a:srgbClr val="FFFFFF"/>
+                  <a:srgbClr val="26231F"/>
                 </a:solidFill>
               </a:rPr>
               <a:t>가입한 보험 목록</a:t>
@@ -4592,14 +4810,14 @@
       </p:sp>
       <p:graphicFrame>
         <p:nvGraphicFramePr>
-          <p:cNvPr id="4" name="표"/>
+          <p:cNvPr id="6" name="표"/>
           <p:cNvGraphicFramePr>
             <a:graphicFrameLocks noGrp="1"/>
           </p:cNvGraphicFramePr>
           <p:nvPr/>
         </p:nvGraphicFramePr>
         <p:xfrm>
-          <a:off x="640080" y="1645920"/>
+          <a:off x="640080" y="1783080"/>
           <a:ext cx="10911535" cy="4224528"/>
         </p:xfrm>
         <a:graphic>
@@ -4625,7 +4843,7 @@
                       <a:r>
                         <a:rPr sz="1400" b="1">
                           <a:solidFill>
-                            <a:srgbClr val="FFFFFF"/>
+                            <a:srgbClr val="26231F"/>
                           </a:solidFill>
                         </a:rPr>
                         <a:t>보험회사</a:t>
@@ -4635,30 +4853,30 @@
                   <a:tcPr anchor="ctr" marL="73152" marR="73152">
                     <a:lnL w="9525" cap="flat" cmpd="sng" algn="ctr">
                       <a:solidFill>
-                        <a:srgbClr val="2695C5"/>
+                        <a:srgbClr val="7BC9EA"/>
                       </a:solidFill>
                       <a:prstDash val="solid"/>
                     </a:lnL>
                     <a:lnR w="9525" cap="flat" cmpd="sng" algn="ctr">
                       <a:solidFill>
-                        <a:srgbClr val="2695C5"/>
+                        <a:srgbClr val="7BC9EA"/>
                       </a:solidFill>
                       <a:prstDash val="solid"/>
                     </a:lnR>
                     <a:lnT w="9525" cap="flat" cmpd="sng" algn="ctr">
                       <a:solidFill>
-                        <a:srgbClr val="2695C5"/>
+                        <a:srgbClr val="7BC9EA"/>
                       </a:solidFill>
                       <a:prstDash val="solid"/>
                     </a:lnT>
                     <a:lnB w="9525" cap="flat" cmpd="sng" algn="ctr">
                       <a:solidFill>
-                        <a:srgbClr val="2695C5"/>
+                        <a:srgbClr val="7BC9EA"/>
                       </a:solidFill>
                       <a:prstDash val="solid"/>
                     </a:lnB>
                     <a:solidFill>
-                      <a:srgbClr val="2695C5"/>
+                      <a:srgbClr val="7BC9EA"/>
                     </a:solidFill>
                   </a:tcPr>
                 </a:tc>
@@ -4671,7 +4889,7 @@
                       <a:r>
                         <a:rPr sz="1400" b="1">
                           <a:solidFill>
-                            <a:srgbClr val="FFFFFF"/>
+                            <a:srgbClr val="26231F"/>
                           </a:solidFill>
                         </a:rPr>
                         <a:t>상품명</a:t>
@@ -4681,30 +4899,30 @@
                   <a:tcPr anchor="ctr" marL="73152" marR="73152">
                     <a:lnL w="9525" cap="flat" cmpd="sng" algn="ctr">
                       <a:solidFill>
-                        <a:srgbClr val="2695C5"/>
+                        <a:srgbClr val="7BC9EA"/>
                       </a:solidFill>
                       <a:prstDash val="solid"/>
                     </a:lnL>
                     <a:lnR w="9525" cap="flat" cmpd="sng" algn="ctr">
                       <a:solidFill>
-                        <a:srgbClr val="2695C5"/>
+                        <a:srgbClr val="7BC9EA"/>
                       </a:solidFill>
                       <a:prstDash val="solid"/>
                     </a:lnR>
                     <a:lnT w="9525" cap="flat" cmpd="sng" algn="ctr">
                       <a:solidFill>
-                        <a:srgbClr val="2695C5"/>
+                        <a:srgbClr val="7BC9EA"/>
                       </a:solidFill>
                       <a:prstDash val="solid"/>
                     </a:lnT>
                     <a:lnB w="9525" cap="flat" cmpd="sng" algn="ctr">
                       <a:solidFill>
-                        <a:srgbClr val="2695C5"/>
+                        <a:srgbClr val="7BC9EA"/>
                       </a:solidFill>
                       <a:prstDash val="solid"/>
                     </a:lnB>
                     <a:solidFill>
-                      <a:srgbClr val="2695C5"/>
+                      <a:srgbClr val="7BC9EA"/>
                     </a:solidFill>
                   </a:tcPr>
                 </a:tc>
@@ -4717,7 +4935,7 @@
                       <a:r>
                         <a:rPr sz="1400" b="1">
                           <a:solidFill>
-                            <a:srgbClr val="FFFFFF"/>
+                            <a:srgbClr val="26231F"/>
                           </a:solidFill>
                         </a:rPr>
                         <a:t>종류</a:t>
@@ -4727,30 +4945,30 @@
                   <a:tcPr anchor="ctr" marL="73152" marR="73152">
                     <a:lnL w="9525" cap="flat" cmpd="sng" algn="ctr">
                       <a:solidFill>
-                        <a:srgbClr val="2695C5"/>
+                        <a:srgbClr val="7BC9EA"/>
                       </a:solidFill>
                       <a:prstDash val="solid"/>
                     </a:lnL>
                     <a:lnR w="9525" cap="flat" cmpd="sng" algn="ctr">
                       <a:solidFill>
-                        <a:srgbClr val="2695C5"/>
+                        <a:srgbClr val="7BC9EA"/>
                       </a:solidFill>
                       <a:prstDash val="solid"/>
                     </a:lnR>
                     <a:lnT w="9525" cap="flat" cmpd="sng" algn="ctr">
                       <a:solidFill>
-                        <a:srgbClr val="2695C5"/>
+                        <a:srgbClr val="7BC9EA"/>
                       </a:solidFill>
                       <a:prstDash val="solid"/>
                     </a:lnT>
                     <a:lnB w="9525" cap="flat" cmpd="sng" algn="ctr">
                       <a:solidFill>
-                        <a:srgbClr val="2695C5"/>
+                        <a:srgbClr val="7BC9EA"/>
                       </a:solidFill>
                       <a:prstDash val="solid"/>
                     </a:lnB>
                     <a:solidFill>
-                      <a:srgbClr val="2695C5"/>
+                      <a:srgbClr val="7BC9EA"/>
                     </a:solidFill>
                   </a:tcPr>
                 </a:tc>
@@ -4763,7 +4981,7 @@
                       <a:r>
                         <a:rPr sz="1400" b="1">
                           <a:solidFill>
-                            <a:srgbClr val="FFFFFF"/>
+                            <a:srgbClr val="26231F"/>
                           </a:solidFill>
                         </a:rPr>
                         <a:t>만기일</a:t>
@@ -4773,30 +4991,30 @@
                   <a:tcPr anchor="ctr" marL="73152" marR="73152">
                     <a:lnL w="9525" cap="flat" cmpd="sng" algn="ctr">
                       <a:solidFill>
-                        <a:srgbClr val="2695C5"/>
+                        <a:srgbClr val="7BC9EA"/>
                       </a:solidFill>
                       <a:prstDash val="solid"/>
                     </a:lnL>
                     <a:lnR w="9525" cap="flat" cmpd="sng" algn="ctr">
                       <a:solidFill>
-                        <a:srgbClr val="2695C5"/>
+                        <a:srgbClr val="7BC9EA"/>
                       </a:solidFill>
                       <a:prstDash val="solid"/>
                     </a:lnR>
                     <a:lnT w="9525" cap="flat" cmpd="sng" algn="ctr">
                       <a:solidFill>
-                        <a:srgbClr val="2695C5"/>
+                        <a:srgbClr val="7BC9EA"/>
                       </a:solidFill>
                       <a:prstDash val="solid"/>
                     </a:lnT>
                     <a:lnB w="9525" cap="flat" cmpd="sng" algn="ctr">
                       <a:solidFill>
-                        <a:srgbClr val="2695C5"/>
+                        <a:srgbClr val="7BC9EA"/>
                       </a:solidFill>
                       <a:prstDash val="solid"/>
                     </a:lnB>
                     <a:solidFill>
-                      <a:srgbClr val="2695C5"/>
+                      <a:srgbClr val="7BC9EA"/>
                     </a:solidFill>
                   </a:tcPr>
                 </a:tc>
@@ -4809,7 +5027,7 @@
                       <a:r>
                         <a:rPr sz="1400" b="1">
                           <a:solidFill>
-                            <a:srgbClr val="FFFFFF"/>
+                            <a:srgbClr val="26231F"/>
                           </a:solidFill>
                         </a:rPr>
                         <a:t>월 보험료</a:t>
@@ -4819,30 +5037,30 @@
                   <a:tcPr anchor="ctr" marL="73152" marR="73152">
                     <a:lnL w="9525" cap="flat" cmpd="sng" algn="ctr">
                       <a:solidFill>
-                        <a:srgbClr val="2695C5"/>
+                        <a:srgbClr val="7BC9EA"/>
                       </a:solidFill>
                       <a:prstDash val="solid"/>
                     </a:lnL>
                     <a:lnR w="9525" cap="flat" cmpd="sng" algn="ctr">
                       <a:solidFill>
-                        <a:srgbClr val="2695C5"/>
+                        <a:srgbClr val="7BC9EA"/>
                       </a:solidFill>
                       <a:prstDash val="solid"/>
                     </a:lnR>
                     <a:lnT w="9525" cap="flat" cmpd="sng" algn="ctr">
                       <a:solidFill>
-                        <a:srgbClr val="2695C5"/>
+                        <a:srgbClr val="7BC9EA"/>
                       </a:solidFill>
                       <a:prstDash val="solid"/>
                     </a:lnT>
                     <a:lnB w="9525" cap="flat" cmpd="sng" algn="ctr">
                       <a:solidFill>
-                        <a:srgbClr val="2695C5"/>
+                        <a:srgbClr val="7BC9EA"/>
                       </a:solidFill>
                       <a:prstDash val="solid"/>
                     </a:lnB>
                     <a:solidFill>
-                      <a:srgbClr val="2695C5"/>
+                      <a:srgbClr val="7BC9EA"/>
                     </a:solidFill>
                   </a:tcPr>
                 </a:tc>
@@ -4857,7 +5075,7 @@
                       <a:r>
                         <a:rPr sz="1400" b="0">
                           <a:solidFill>
-                            <a:srgbClr val="2B2B2B"/>
+                            <a:srgbClr val="26231F"/>
                           </a:solidFill>
                         </a:rPr>
                         <a:t/>
@@ -4903,7 +5121,7 @@
                       <a:r>
                         <a:rPr sz="1400" b="0">
                           <a:solidFill>
-                            <a:srgbClr val="2B2B2B"/>
+                            <a:srgbClr val="26231F"/>
                           </a:solidFill>
                         </a:rPr>
                         <a:t/>
@@ -4949,7 +5167,7 @@
                       <a:r>
                         <a:rPr sz="1400" b="0">
                           <a:solidFill>
-                            <a:srgbClr val="2B2B2B"/>
+                            <a:srgbClr val="26231F"/>
                           </a:solidFill>
                         </a:rPr>
                         <a:t/>
@@ -4995,7 +5213,7 @@
                       <a:r>
                         <a:rPr sz="1400" b="0">
                           <a:solidFill>
-                            <a:srgbClr val="2B2B2B"/>
+                            <a:srgbClr val="26231F"/>
                           </a:solidFill>
                         </a:rPr>
                         <a:t/>
@@ -5041,7 +5259,7 @@
                       <a:r>
                         <a:rPr sz="1400" b="0">
                           <a:solidFill>
-                            <a:srgbClr val="2B2B2B"/>
+                            <a:srgbClr val="26231F"/>
                           </a:solidFill>
                         </a:rPr>
                         <a:t/>
@@ -5089,7 +5307,7 @@
                       <a:r>
                         <a:rPr sz="1400" b="0">
                           <a:solidFill>
-                            <a:srgbClr val="2B2B2B"/>
+                            <a:srgbClr val="26231F"/>
                           </a:solidFill>
                         </a:rPr>
                         <a:t/>
@@ -5122,7 +5340,7 @@
                       <a:prstDash val="solid"/>
                     </a:lnB>
                     <a:solidFill>
-                      <a:srgbClr val="EEF8FC"/>
+                      <a:srgbClr val="EAF7FD"/>
                     </a:solidFill>
                   </a:tcPr>
                 </a:tc>
@@ -5135,7 +5353,7 @@
                       <a:r>
                         <a:rPr sz="1400" b="0">
                           <a:solidFill>
-                            <a:srgbClr val="2B2B2B"/>
+                            <a:srgbClr val="26231F"/>
                           </a:solidFill>
                         </a:rPr>
                         <a:t/>
@@ -5168,7 +5386,7 @@
                       <a:prstDash val="solid"/>
                     </a:lnB>
                     <a:solidFill>
-                      <a:srgbClr val="EEF8FC"/>
+                      <a:srgbClr val="EAF7FD"/>
                     </a:solidFill>
                   </a:tcPr>
                 </a:tc>
@@ -5181,7 +5399,7 @@
                       <a:r>
                         <a:rPr sz="1400" b="0">
                           <a:solidFill>
-                            <a:srgbClr val="2B2B2B"/>
+                            <a:srgbClr val="26231F"/>
                           </a:solidFill>
                         </a:rPr>
                         <a:t/>
@@ -5214,7 +5432,7 @@
                       <a:prstDash val="solid"/>
                     </a:lnB>
                     <a:solidFill>
-                      <a:srgbClr val="EEF8FC"/>
+                      <a:srgbClr val="EAF7FD"/>
                     </a:solidFill>
                   </a:tcPr>
                 </a:tc>
@@ -5227,7 +5445,7 @@
                       <a:r>
                         <a:rPr sz="1400" b="0">
                           <a:solidFill>
-                            <a:srgbClr val="2B2B2B"/>
+                            <a:srgbClr val="26231F"/>
                           </a:solidFill>
                         </a:rPr>
                         <a:t/>
@@ -5260,7 +5478,7 @@
                       <a:prstDash val="solid"/>
                     </a:lnB>
                     <a:solidFill>
-                      <a:srgbClr val="EEF8FC"/>
+                      <a:srgbClr val="EAF7FD"/>
                     </a:solidFill>
                   </a:tcPr>
                 </a:tc>
@@ -5273,7 +5491,7 @@
                       <a:r>
                         <a:rPr sz="1400" b="0">
                           <a:solidFill>
-                            <a:srgbClr val="2B2B2B"/>
+                            <a:srgbClr val="26231F"/>
                           </a:solidFill>
                         </a:rPr>
                         <a:t/>
@@ -5306,7 +5524,7 @@
                       <a:prstDash val="solid"/>
                     </a:lnB>
                     <a:solidFill>
-                      <a:srgbClr val="EEF8FC"/>
+                      <a:srgbClr val="EAF7FD"/>
                     </a:solidFill>
                   </a:tcPr>
                 </a:tc>
@@ -5321,7 +5539,7 @@
                       <a:r>
                         <a:rPr sz="1400" b="0">
                           <a:solidFill>
-                            <a:srgbClr val="2B2B2B"/>
+                            <a:srgbClr val="26231F"/>
                           </a:solidFill>
                         </a:rPr>
                         <a:t/>
@@ -5367,7 +5585,7 @@
                       <a:r>
                         <a:rPr sz="1400" b="0">
                           <a:solidFill>
-                            <a:srgbClr val="2B2B2B"/>
+                            <a:srgbClr val="26231F"/>
                           </a:solidFill>
                         </a:rPr>
                         <a:t/>
@@ -5413,7 +5631,7 @@
                       <a:r>
                         <a:rPr sz="1400" b="0">
                           <a:solidFill>
-                            <a:srgbClr val="2B2B2B"/>
+                            <a:srgbClr val="26231F"/>
                           </a:solidFill>
                         </a:rPr>
                         <a:t/>
@@ -5459,7 +5677,7 @@
                       <a:r>
                         <a:rPr sz="1400" b="0">
                           <a:solidFill>
-                            <a:srgbClr val="2B2B2B"/>
+                            <a:srgbClr val="26231F"/>
                           </a:solidFill>
                         </a:rPr>
                         <a:t/>
@@ -5505,7 +5723,7 @@
                       <a:r>
                         <a:rPr sz="1400" b="0">
                           <a:solidFill>
-                            <a:srgbClr val="2B2B2B"/>
+                            <a:srgbClr val="26231F"/>
                           </a:solidFill>
                         </a:rPr>
                         <a:t/>
@@ -5553,7 +5771,7 @@
                       <a:r>
                         <a:rPr sz="1400" b="0">
                           <a:solidFill>
-                            <a:srgbClr val="2B2B2B"/>
+                            <a:srgbClr val="26231F"/>
                           </a:solidFill>
                         </a:rPr>
                         <a:t/>
@@ -5586,7 +5804,7 @@
                       <a:prstDash val="solid"/>
                     </a:lnB>
                     <a:solidFill>
-                      <a:srgbClr val="EEF8FC"/>
+                      <a:srgbClr val="EAF7FD"/>
                     </a:solidFill>
                   </a:tcPr>
                 </a:tc>
@@ -5599,7 +5817,7 @@
                       <a:r>
                         <a:rPr sz="1400" b="0">
                           <a:solidFill>
-                            <a:srgbClr val="2B2B2B"/>
+                            <a:srgbClr val="26231F"/>
                           </a:solidFill>
                         </a:rPr>
                         <a:t/>
@@ -5632,7 +5850,7 @@
                       <a:prstDash val="solid"/>
                     </a:lnB>
                     <a:solidFill>
-                      <a:srgbClr val="EEF8FC"/>
+                      <a:srgbClr val="EAF7FD"/>
                     </a:solidFill>
                   </a:tcPr>
                 </a:tc>
@@ -5645,7 +5863,7 @@
                       <a:r>
                         <a:rPr sz="1400" b="0">
                           <a:solidFill>
-                            <a:srgbClr val="2B2B2B"/>
+                            <a:srgbClr val="26231F"/>
                           </a:solidFill>
                         </a:rPr>
                         <a:t/>
@@ -5678,7 +5896,7 @@
                       <a:prstDash val="solid"/>
                     </a:lnB>
                     <a:solidFill>
-                      <a:srgbClr val="EEF8FC"/>
+                      <a:srgbClr val="EAF7FD"/>
                     </a:solidFill>
                   </a:tcPr>
                 </a:tc>
@@ -5691,7 +5909,7 @@
                       <a:r>
                         <a:rPr sz="1400" b="0">
                           <a:solidFill>
-                            <a:srgbClr val="2B2B2B"/>
+                            <a:srgbClr val="26231F"/>
                           </a:solidFill>
                         </a:rPr>
                         <a:t/>
@@ -5724,7 +5942,7 @@
                       <a:prstDash val="solid"/>
                     </a:lnB>
                     <a:solidFill>
-                      <a:srgbClr val="EEF8FC"/>
+                      <a:srgbClr val="EAF7FD"/>
                     </a:solidFill>
                   </a:tcPr>
                 </a:tc>
@@ -5737,7 +5955,7 @@
                       <a:r>
                         <a:rPr sz="1400" b="0">
                           <a:solidFill>
-                            <a:srgbClr val="2B2B2B"/>
+                            <a:srgbClr val="26231F"/>
                           </a:solidFill>
                         </a:rPr>
                         <a:t/>
@@ -5770,7 +5988,7 @@
                       <a:prstDash val="solid"/>
                     </a:lnB>
                     <a:solidFill>
-                      <a:srgbClr val="EEF8FC"/>
+                      <a:srgbClr val="EAF7FD"/>
                     </a:solidFill>
                   </a:tcPr>
                 </a:tc>
@@ -5785,7 +6003,7 @@
                       <a:r>
                         <a:rPr sz="1400" b="0">
                           <a:solidFill>
-                            <a:srgbClr val="2B2B2B"/>
+                            <a:srgbClr val="26231F"/>
                           </a:solidFill>
                         </a:rPr>
                         <a:t/>
@@ -5831,7 +6049,7 @@
                       <a:r>
                         <a:rPr sz="1400" b="0">
                           <a:solidFill>
-                            <a:srgbClr val="2B2B2B"/>
+                            <a:srgbClr val="26231F"/>
                           </a:solidFill>
                         </a:rPr>
                         <a:t/>
@@ -5877,7 +6095,7 @@
                       <a:r>
                         <a:rPr sz="1400" b="0">
                           <a:solidFill>
-                            <a:srgbClr val="2B2B2B"/>
+                            <a:srgbClr val="26231F"/>
                           </a:solidFill>
                         </a:rPr>
                         <a:t/>
@@ -5923,7 +6141,7 @@
                       <a:r>
                         <a:rPr sz="1400" b="0">
                           <a:solidFill>
-                            <a:srgbClr val="2B2B2B"/>
+                            <a:srgbClr val="26231F"/>
                           </a:solidFill>
                         </a:rPr>
                         <a:t/>
@@ -5969,7 +6187,7 @@
                       <a:r>
                         <a:rPr sz="1400" b="0">
                           <a:solidFill>
-                            <a:srgbClr val="2B2B2B"/>
+                            <a:srgbClr val="26231F"/>
                           </a:solidFill>
                         </a:rPr>
                         <a:t/>
@@ -6017,7 +6235,7 @@
                       <a:r>
                         <a:rPr sz="1400" b="0">
                           <a:solidFill>
-                            <a:srgbClr val="2B2B2B"/>
+                            <a:srgbClr val="26231F"/>
                           </a:solidFill>
                         </a:rPr>
                         <a:t/>
@@ -6050,7 +6268,7 @@
                       <a:prstDash val="solid"/>
                     </a:lnB>
                     <a:solidFill>
-                      <a:srgbClr val="EEF8FC"/>
+                      <a:srgbClr val="EAF7FD"/>
                     </a:solidFill>
                   </a:tcPr>
                 </a:tc>
@@ -6063,7 +6281,7 @@
                       <a:r>
                         <a:rPr sz="1400" b="0">
                           <a:solidFill>
-                            <a:srgbClr val="2B2B2B"/>
+                            <a:srgbClr val="26231F"/>
                           </a:solidFill>
                         </a:rPr>
                         <a:t/>
@@ -6096,7 +6314,7 @@
                       <a:prstDash val="solid"/>
                     </a:lnB>
                     <a:solidFill>
-                      <a:srgbClr val="EEF8FC"/>
+                      <a:srgbClr val="EAF7FD"/>
                     </a:solidFill>
                   </a:tcPr>
                 </a:tc>
@@ -6109,7 +6327,7 @@
                       <a:r>
                         <a:rPr sz="1400" b="0">
                           <a:solidFill>
-                            <a:srgbClr val="2B2B2B"/>
+                            <a:srgbClr val="26231F"/>
                           </a:solidFill>
                         </a:rPr>
                         <a:t/>
@@ -6142,7 +6360,7 @@
                       <a:prstDash val="solid"/>
                     </a:lnB>
                     <a:solidFill>
-                      <a:srgbClr val="EEF8FC"/>
+                      <a:srgbClr val="EAF7FD"/>
                     </a:solidFill>
                   </a:tcPr>
                 </a:tc>
@@ -6155,7 +6373,7 @@
                       <a:r>
                         <a:rPr sz="1400" b="0">
                           <a:solidFill>
-                            <a:srgbClr val="2B2B2B"/>
+                            <a:srgbClr val="26231F"/>
                           </a:solidFill>
                         </a:rPr>
                         <a:t/>
@@ -6188,7 +6406,7 @@
                       <a:prstDash val="solid"/>
                     </a:lnB>
                     <a:solidFill>
-                      <a:srgbClr val="EEF8FC"/>
+                      <a:srgbClr val="EAF7FD"/>
                     </a:solidFill>
                   </a:tcPr>
                 </a:tc>
@@ -6201,7 +6419,7 @@
                       <a:r>
                         <a:rPr sz="1400" b="0">
                           <a:solidFill>
-                            <a:srgbClr val="2B2B2B"/>
+                            <a:srgbClr val="26231F"/>
                           </a:solidFill>
                         </a:rPr>
                         <a:t/>
@@ -6234,7 +6452,7 @@
                       <a:prstDash val="solid"/>
                     </a:lnB>
                     <a:solidFill>
-                      <a:srgbClr val="EEF8FC"/>
+                      <a:srgbClr val="EAF7FD"/>
                     </a:solidFill>
                   </a:tcPr>
                 </a:tc>
@@ -6277,14 +6495,83 @@
         </p:nvSpPr>
         <p:spPr>
           <a:xfrm>
-            <a:off x="0" y="384048"/>
-            <a:ext cx="9509522" cy="896112"/>
-          </a:xfrm>
-          <a:prstGeom prst="homePlate">
+            <a:off x="640080" y="566928"/>
+            <a:ext cx="64008" cy="868680"/>
+          </a:xfrm>
+          <a:prstGeom prst="roundRect">
+            <a:avLst>
+              <a:gd name="adj" fmla="val 50000"/>
+            </a:avLst>
+          </a:prstGeom>
+          <a:solidFill>
+            <a:srgbClr val="7BC9EA"/>
+          </a:solidFill>
+          <a:ln>
+            <a:noFill/>
+          </a:ln>
+        </p:spPr>
+        <p:txBody>
+          <a:bodyPr rtlCol="0" anchor="ctr"/>
+          <a:lstStyle/>
+          <a:p>
+            <a:pPr algn="ctr"/>
+          </a:p>
+        </p:txBody>
+      </p:sp>
+      <p:sp>
+        <p:nvSpPr>
+          <p:cNvPr id="4" name="상단 라벨"/>
+          <p:cNvSpPr txBox="1"/>
+          <p:nvPr/>
+        </p:nvSpPr>
+        <p:spPr>
+          <a:xfrm>
+            <a:off x="868680" y="274320"/>
+            <a:ext cx="5486400" cy="274320"/>
+          </a:xfrm>
+          <a:prstGeom prst="rect">
+            <a:avLst/>
+          </a:prstGeom>
+          <a:noFill/>
+        </p:spPr>
+        <p:txBody>
+          <a:bodyPr wrap="square" lIns="54864" rIns="54864" tIns="27432" bIns="27432" anchor="ctr">
+            <a:noAutofit/>
+          </a:bodyPr>
+          <a:lstStyle/>
+          <a:p>
+            <a:pPr algn="l">
+              <a:lnSpc>
+                <a:spcPct val="115000"/>
+              </a:lnSpc>
+            </a:pPr>
+            <a:r>
+              <a:rPr sz="900" b="1" i="0" spc="250">
+                <a:solidFill>
+                  <a:srgbClr val="8E8780"/>
+                </a:solidFill>
+              </a:rPr>
+              <a:t>INSURANCE CHECK</a:t>
+            </a:r>
+          </a:p>
+        </p:txBody>
+      </p:sp>
+      <p:sp>
+        <p:nvSpPr>
+          <p:cNvPr id="5" name="포인트"/>
+          <p:cNvSpPr/>
+          <p:nvPr/>
+        </p:nvSpPr>
+        <p:spPr>
+          <a:xfrm>
+            <a:off x="11167567" y="667512"/>
+            <a:ext cx="310896" cy="310896"/>
+          </a:xfrm>
+          <a:prstGeom prst="heart">
             <a:avLst/>
           </a:prstGeom>
           <a:solidFill>
-            <a:srgbClr val="2695C5"/>
+            <a:srgbClr val="A5DCF3"/>
           </a:solidFill>
           <a:ln>
             <a:noFill/>
@@ -6310,8 +6597,8 @@
         </p:nvSpPr>
         <p:spPr>
           <a:xfrm>
-            <a:off x="640080" y="411480"/>
-            <a:ext cx="8412242" cy="822960"/>
+            <a:off x="868680" y="566928"/>
+            <a:ext cx="9448495" cy="868680"/>
           </a:xfrm>
         </p:spPr>
         <p:txBody>
@@ -6328,7 +6615,7 @@
             <a:r>
               <a:rPr sz="3000" b="1" i="0">
                 <a:solidFill>
-                  <a:srgbClr val="FFFFFF"/>
+                  <a:srgbClr val="26231F"/>
                 </a:solidFill>
               </a:rPr>
               <a:t>보장 항목 체크</a:t>
@@ -6338,14 +6625,14 @@
       </p:sp>
       <p:graphicFrame>
         <p:nvGraphicFramePr>
-          <p:cNvPr id="4" name="표"/>
+          <p:cNvPr id="6" name="표"/>
           <p:cNvGraphicFramePr>
             <a:graphicFrameLocks noGrp="1"/>
           </p:cNvGraphicFramePr>
           <p:nvPr/>
         </p:nvGraphicFramePr>
         <p:xfrm>
-          <a:off x="640080" y="1645920"/>
+          <a:off x="640080" y="1783080"/>
           <a:ext cx="10911534" cy="4773168"/>
         </p:xfrm>
         <a:graphic>
@@ -6370,7 +6657,7 @@
                       <a:r>
                         <a:rPr sz="1400" b="1">
                           <a:solidFill>
-                            <a:srgbClr val="FFFFFF"/>
+                            <a:srgbClr val="26231F"/>
                           </a:solidFill>
                         </a:rPr>
                         <a:t>보장 항목</a:t>
@@ -6380,30 +6667,30 @@
                   <a:tcPr anchor="ctr" marL="73152" marR="73152">
                     <a:lnL w="9525" cap="flat" cmpd="sng" algn="ctr">
                       <a:solidFill>
-                        <a:srgbClr val="2695C5"/>
+                        <a:srgbClr val="7BC9EA"/>
                       </a:solidFill>
                       <a:prstDash val="solid"/>
                     </a:lnL>
                     <a:lnR w="9525" cap="flat" cmpd="sng" algn="ctr">
                       <a:solidFill>
-                        <a:srgbClr val="2695C5"/>
+                        <a:srgbClr val="7BC9EA"/>
                       </a:solidFill>
                       <a:prstDash val="solid"/>
                     </a:lnR>
                     <a:lnT w="9525" cap="flat" cmpd="sng" algn="ctr">
                       <a:solidFill>
-                        <a:srgbClr val="2695C5"/>
+                        <a:srgbClr val="7BC9EA"/>
                       </a:solidFill>
                       <a:prstDash val="solid"/>
                     </a:lnT>
                     <a:lnB w="9525" cap="flat" cmpd="sng" algn="ctr">
                       <a:solidFill>
-                        <a:srgbClr val="2695C5"/>
+                        <a:srgbClr val="7BC9EA"/>
                       </a:solidFill>
                       <a:prstDash val="solid"/>
                     </a:lnB>
                     <a:solidFill>
-                      <a:srgbClr val="2695C5"/>
+                      <a:srgbClr val="7BC9EA"/>
                     </a:solidFill>
                   </a:tcPr>
                 </a:tc>
@@ -6416,7 +6703,7 @@
                       <a:r>
                         <a:rPr sz="1400" b="1">
                           <a:solidFill>
-                            <a:srgbClr val="FFFFFF"/>
+                            <a:srgbClr val="26231F"/>
                           </a:solidFill>
                         </a:rPr>
                         <a:t>가입 확인</a:t>
@@ -6426,30 +6713,30 @@
                   <a:tcPr anchor="ctr" marL="73152" marR="73152">
                     <a:lnL w="9525" cap="flat" cmpd="sng" algn="ctr">
                       <a:solidFill>
-                        <a:srgbClr val="2695C5"/>
+                        <a:srgbClr val="7BC9EA"/>
                       </a:solidFill>
                       <a:prstDash val="solid"/>
                     </a:lnL>
                     <a:lnR w="9525" cap="flat" cmpd="sng" algn="ctr">
                       <a:solidFill>
-                        <a:srgbClr val="2695C5"/>
+                        <a:srgbClr val="7BC9EA"/>
                       </a:solidFill>
                       <a:prstDash val="solid"/>
                     </a:lnR>
                     <a:lnT w="9525" cap="flat" cmpd="sng" algn="ctr">
                       <a:solidFill>
-                        <a:srgbClr val="2695C5"/>
+                        <a:srgbClr val="7BC9EA"/>
                       </a:solidFill>
                       <a:prstDash val="solid"/>
                     </a:lnT>
                     <a:lnB w="9525" cap="flat" cmpd="sng" algn="ctr">
                       <a:solidFill>
-                        <a:srgbClr val="2695C5"/>
+                        <a:srgbClr val="7BC9EA"/>
                       </a:solidFill>
                       <a:prstDash val="solid"/>
                     </a:lnB>
                     <a:solidFill>
-                      <a:srgbClr val="2695C5"/>
+                      <a:srgbClr val="7BC9EA"/>
                     </a:solidFill>
                   </a:tcPr>
                 </a:tc>
@@ -6462,7 +6749,7 @@
                       <a:r>
                         <a:rPr sz="1400" b="1">
                           <a:solidFill>
-                            <a:srgbClr val="FFFFFF"/>
+                            <a:srgbClr val="26231F"/>
                           </a:solidFill>
                         </a:rPr>
                         <a:t>확인 필요</a:t>
@@ -6472,30 +6759,30 @@
                   <a:tcPr anchor="ctr" marL="73152" marR="73152">
                     <a:lnL w="9525" cap="flat" cmpd="sng" algn="ctr">
                       <a:solidFill>
-                        <a:srgbClr val="2695C5"/>
+                        <a:srgbClr val="7BC9EA"/>
                       </a:solidFill>
                       <a:prstDash val="solid"/>
                     </a:lnL>
                     <a:lnR w="9525" cap="flat" cmpd="sng" algn="ctr">
                       <a:solidFill>
-                        <a:srgbClr val="2695C5"/>
+                        <a:srgbClr val="7BC9EA"/>
                       </a:solidFill>
                       <a:prstDash val="solid"/>
                     </a:lnR>
                     <a:lnT w="9525" cap="flat" cmpd="sng" algn="ctr">
                       <a:solidFill>
-                        <a:srgbClr val="2695C5"/>
+                        <a:srgbClr val="7BC9EA"/>
                       </a:solidFill>
                       <a:prstDash val="solid"/>
                     </a:lnT>
                     <a:lnB w="9525" cap="flat" cmpd="sng" algn="ctr">
                       <a:solidFill>
-                        <a:srgbClr val="2695C5"/>
+                        <a:srgbClr val="7BC9EA"/>
                       </a:solidFill>
                       <a:prstDash val="solid"/>
                     </a:lnB>
                     <a:solidFill>
-                      <a:srgbClr val="2695C5"/>
+                      <a:srgbClr val="7BC9EA"/>
                     </a:solidFill>
                   </a:tcPr>
                 </a:tc>
@@ -6508,7 +6795,7 @@
                       <a:r>
                         <a:rPr sz="1400" b="1">
                           <a:solidFill>
-                            <a:srgbClr val="FFFFFF"/>
+                            <a:srgbClr val="26231F"/>
                           </a:solidFill>
                         </a:rPr>
                         <a:t>해당 없음</a:t>
@@ -6518,30 +6805,30 @@
                   <a:tcPr anchor="ctr" marL="73152" marR="73152">
                     <a:lnL w="9525" cap="flat" cmpd="sng" algn="ctr">
                       <a:solidFill>
-                        <a:srgbClr val="2695C5"/>
+                        <a:srgbClr val="7BC9EA"/>
                       </a:solidFill>
                       <a:prstDash val="solid"/>
                     </a:lnL>
                     <a:lnR w="9525" cap="flat" cmpd="sng" algn="ctr">
                       <a:solidFill>
-                        <a:srgbClr val="2695C5"/>
+                        <a:srgbClr val="7BC9EA"/>
                       </a:solidFill>
                       <a:prstDash val="solid"/>
                     </a:lnR>
                     <a:lnT w="9525" cap="flat" cmpd="sng" algn="ctr">
                       <a:solidFill>
-                        <a:srgbClr val="2695C5"/>
+                        <a:srgbClr val="7BC9EA"/>
                       </a:solidFill>
                       <a:prstDash val="solid"/>
                     </a:lnT>
                     <a:lnB w="9525" cap="flat" cmpd="sng" algn="ctr">
                       <a:solidFill>
-                        <a:srgbClr val="2695C5"/>
+                        <a:srgbClr val="7BC9EA"/>
                       </a:solidFill>
                       <a:prstDash val="solid"/>
                     </a:lnB>
                     <a:solidFill>
-                      <a:srgbClr val="2695C5"/>
+                      <a:srgbClr val="7BC9EA"/>
                     </a:solidFill>
                   </a:tcPr>
                 </a:tc>
@@ -6556,7 +6843,7 @@
                       <a:r>
                         <a:rPr sz="1400" b="1">
                           <a:solidFill>
-                            <a:srgbClr val="11485F"/>
+                            <a:srgbClr val="273F49"/>
                           </a:solidFill>
                         </a:rPr>
                         <a:t>사망·재해</a:t>
@@ -6602,7 +6889,7 @@
                       <a:r>
                         <a:rPr sz="1400" b="0">
                           <a:solidFill>
-                            <a:srgbClr val="2B2B2B"/>
+                            <a:srgbClr val="26231F"/>
                           </a:solidFill>
                         </a:rPr>
                         <a:t>□</a:t>
@@ -6648,7 +6935,7 @@
                       <a:r>
                         <a:rPr sz="1400" b="0">
                           <a:solidFill>
-                            <a:srgbClr val="2B2B2B"/>
+                            <a:srgbClr val="26231F"/>
                           </a:solidFill>
                         </a:rPr>
                         <a:t>□</a:t>
@@ -6694,7 +6981,7 @@
                       <a:r>
                         <a:rPr sz="1400" b="0">
                           <a:solidFill>
-                            <a:srgbClr val="2B2B2B"/>
+                            <a:srgbClr val="26231F"/>
                           </a:solidFill>
                         </a:rPr>
                         <a:t>□</a:t>
@@ -6742,7 +7029,7 @@
                       <a:r>
                         <a:rPr sz="1400" b="1">
                           <a:solidFill>
-                            <a:srgbClr val="11485F"/>
+                            <a:srgbClr val="273F49"/>
                           </a:solidFill>
                         </a:rPr>
                         <a:t>질병 진단</a:t>
@@ -6788,7 +7075,7 @@
                       <a:r>
                         <a:rPr sz="1400" b="0">
                           <a:solidFill>
-                            <a:srgbClr val="2B2B2B"/>
+                            <a:srgbClr val="26231F"/>
                           </a:solidFill>
                         </a:rPr>
                         <a:t>□</a:t>
@@ -6821,7 +7108,7 @@
                       <a:prstDash val="solid"/>
                     </a:lnB>
                     <a:solidFill>
-                      <a:srgbClr val="EEF8FC"/>
+                      <a:srgbClr val="EAF7FD"/>
                     </a:solidFill>
                   </a:tcPr>
                 </a:tc>
@@ -6834,7 +7121,7 @@
                       <a:r>
                         <a:rPr sz="1400" b="0">
                           <a:solidFill>
-                            <a:srgbClr val="2B2B2B"/>
+                            <a:srgbClr val="26231F"/>
                           </a:solidFill>
                         </a:rPr>
                         <a:t>□</a:t>
@@ -6867,7 +7154,7 @@
                       <a:prstDash val="solid"/>
                     </a:lnB>
                     <a:solidFill>
-                      <a:srgbClr val="EEF8FC"/>
+                      <a:srgbClr val="EAF7FD"/>
                     </a:solidFill>
                   </a:tcPr>
                 </a:tc>
@@ -6880,7 +7167,7 @@
                       <a:r>
                         <a:rPr sz="1400" b="0">
                           <a:solidFill>
-                            <a:srgbClr val="2B2B2B"/>
+                            <a:srgbClr val="26231F"/>
                           </a:solidFill>
                         </a:rPr>
                         <a:t>□</a:t>
@@ -6913,7 +7200,7 @@
                       <a:prstDash val="solid"/>
                     </a:lnB>
                     <a:solidFill>
-                      <a:srgbClr val="EEF8FC"/>
+                      <a:srgbClr val="EAF7FD"/>
                     </a:solidFill>
                   </a:tcPr>
                 </a:tc>
@@ -6928,7 +7215,7 @@
                       <a:r>
                         <a:rPr sz="1400" b="1">
                           <a:solidFill>
-                            <a:srgbClr val="11485F"/>
+                            <a:srgbClr val="273F49"/>
                           </a:solidFill>
                         </a:rPr>
                         <a:t>암</a:t>
@@ -6974,7 +7261,7 @@
                       <a:r>
                         <a:rPr sz="1400" b="0">
                           <a:solidFill>
-                            <a:srgbClr val="2B2B2B"/>
+                            <a:srgbClr val="26231F"/>
                           </a:solidFill>
                         </a:rPr>
                         <a:t>□</a:t>
@@ -7020,7 +7307,7 @@
                       <a:r>
                         <a:rPr sz="1400" b="0">
                           <a:solidFill>
-                            <a:srgbClr val="2B2B2B"/>
+                            <a:srgbClr val="26231F"/>
                           </a:solidFill>
                         </a:rPr>
                         <a:t>□</a:t>
@@ -7066,7 +7353,7 @@
                       <a:r>
                         <a:rPr sz="1400" b="0">
                           <a:solidFill>
-                            <a:srgbClr val="2B2B2B"/>
+                            <a:srgbClr val="26231F"/>
                           </a:solidFill>
                         </a:rPr>
                         <a:t>□</a:t>
@@ -7114,7 +7401,7 @@
                       <a:r>
                         <a:rPr sz="1400" b="1">
                           <a:solidFill>
-                            <a:srgbClr val="11485F"/>
+                            <a:srgbClr val="273F49"/>
                           </a:solidFill>
                         </a:rPr>
                         <a:t>뇌·심장</a:t>
@@ -7160,7 +7447,7 @@
                       <a:r>
                         <a:rPr sz="1400" b="0">
                           <a:solidFill>
-                            <a:srgbClr val="2B2B2B"/>
+                            <a:srgbClr val="26231F"/>
                           </a:solidFill>
                         </a:rPr>
                         <a:t>□</a:t>
@@ -7193,7 +7480,7 @@
                       <a:prstDash val="solid"/>
                     </a:lnB>
                     <a:solidFill>
-                      <a:srgbClr val="EEF8FC"/>
+                      <a:srgbClr val="EAF7FD"/>
                     </a:solidFill>
                   </a:tcPr>
                 </a:tc>
@@ -7206,7 +7493,7 @@
                       <a:r>
                         <a:rPr sz="1400" b="0">
                           <a:solidFill>
-                            <a:srgbClr val="2B2B2B"/>
+                            <a:srgbClr val="26231F"/>
                           </a:solidFill>
                         </a:rPr>
                         <a:t>□</a:t>
@@ -7239,7 +7526,7 @@
                       <a:prstDash val="solid"/>
                     </a:lnB>
                     <a:solidFill>
-                      <a:srgbClr val="EEF8FC"/>
+                      <a:srgbClr val="EAF7FD"/>
                     </a:solidFill>
                   </a:tcPr>
                 </a:tc>
@@ -7252,7 +7539,7 @@
                       <a:r>
                         <a:rPr sz="1400" b="0">
                           <a:solidFill>
-                            <a:srgbClr val="2B2B2B"/>
+                            <a:srgbClr val="26231F"/>
                           </a:solidFill>
                         </a:rPr>
                         <a:t>□</a:t>
@@ -7285,7 +7572,7 @@
                       <a:prstDash val="solid"/>
                     </a:lnB>
                     <a:solidFill>
-                      <a:srgbClr val="EEF8FC"/>
+                      <a:srgbClr val="EAF7FD"/>
                     </a:solidFill>
                   </a:tcPr>
                 </a:tc>
@@ -7300,7 +7587,7 @@
                       <a:r>
                         <a:rPr sz="1400" b="1">
                           <a:solidFill>
-                            <a:srgbClr val="11485F"/>
+                            <a:srgbClr val="273F49"/>
                           </a:solidFill>
                         </a:rPr>
                         <a:t>입원·수술</a:t>
@@ -7346,7 +7633,7 @@
                       <a:r>
                         <a:rPr sz="1400" b="0">
                           <a:solidFill>
-                            <a:srgbClr val="2B2B2B"/>
+                            <a:srgbClr val="26231F"/>
                           </a:solidFill>
                         </a:rPr>
                         <a:t>□</a:t>
@@ -7392,7 +7679,7 @@
                       <a:r>
                         <a:rPr sz="1400" b="0">
                           <a:solidFill>
-                            <a:srgbClr val="2B2B2B"/>
+                            <a:srgbClr val="26231F"/>
                           </a:solidFill>
                         </a:rPr>
                         <a:t>□</a:t>
@@ -7438,7 +7725,7 @@
                       <a:r>
                         <a:rPr sz="1400" b="0">
                           <a:solidFill>
-                            <a:srgbClr val="2B2B2B"/>
+                            <a:srgbClr val="26231F"/>
                           </a:solidFill>
                         </a:rPr>
                         <a:t>□</a:t>
@@ -7486,7 +7773,7 @@
                       <a:r>
                         <a:rPr sz="1400" b="1">
                           <a:solidFill>
-                            <a:srgbClr val="11485F"/>
+                            <a:srgbClr val="273F49"/>
                           </a:solidFill>
                         </a:rPr>
                         <a:t>상해</a:t>
@@ -7532,7 +7819,7 @@
                       <a:r>
                         <a:rPr sz="1400" b="0">
                           <a:solidFill>
-                            <a:srgbClr val="2B2B2B"/>
+                            <a:srgbClr val="26231F"/>
                           </a:solidFill>
                         </a:rPr>
                         <a:t>□</a:t>
@@ -7565,7 +7852,7 @@
                       <a:prstDash val="solid"/>
                     </a:lnB>
                     <a:solidFill>
-                      <a:srgbClr val="EEF8FC"/>
+                      <a:srgbClr val="EAF7FD"/>
                     </a:solidFill>
                   </a:tcPr>
                 </a:tc>
@@ -7578,7 +7865,7 @@
                       <a:r>
                         <a:rPr sz="1400" b="0">
                           <a:solidFill>
-                            <a:srgbClr val="2B2B2B"/>
+                            <a:srgbClr val="26231F"/>
                           </a:solidFill>
                         </a:rPr>
                         <a:t>□</a:t>
@@ -7611,7 +7898,7 @@
                       <a:prstDash val="solid"/>
                     </a:lnB>
                     <a:solidFill>
-                      <a:srgbClr val="EEF8FC"/>
+                      <a:srgbClr val="EAF7FD"/>
                     </a:solidFill>
                   </a:tcPr>
                 </a:tc>
@@ -7624,7 +7911,7 @@
                       <a:r>
                         <a:rPr sz="1400" b="0">
                           <a:solidFill>
-                            <a:srgbClr val="2B2B2B"/>
+                            <a:srgbClr val="26231F"/>
                           </a:solidFill>
                         </a:rPr>
                         <a:t>□</a:t>
@@ -7657,7 +7944,7 @@
                       <a:prstDash val="solid"/>
                     </a:lnB>
                     <a:solidFill>
-                      <a:srgbClr val="EEF8FC"/>
+                      <a:srgbClr val="EAF7FD"/>
                     </a:solidFill>
                   </a:tcPr>
                 </a:tc>
@@ -7672,7 +7959,7 @@
                       <a:r>
                         <a:rPr sz="1400" b="1">
                           <a:solidFill>
-                            <a:srgbClr val="11485F"/>
+                            <a:srgbClr val="273F49"/>
                           </a:solidFill>
                         </a:rPr>
                         <a:t>실손의료</a:t>
@@ -7718,7 +8005,7 @@
                       <a:r>
                         <a:rPr sz="1400" b="0">
                           <a:solidFill>
-                            <a:srgbClr val="2B2B2B"/>
+                            <a:srgbClr val="26231F"/>
                           </a:solidFill>
                         </a:rPr>
                         <a:t>□</a:t>
@@ -7764,7 +8051,7 @@
                       <a:r>
                         <a:rPr sz="1400" b="0">
                           <a:solidFill>
-                            <a:srgbClr val="2B2B2B"/>
+                            <a:srgbClr val="26231F"/>
                           </a:solidFill>
                         </a:rPr>
                         <a:t>□</a:t>
@@ -7810,7 +8097,7 @@
                       <a:r>
                         <a:rPr sz="1400" b="0">
                           <a:solidFill>
-                            <a:srgbClr val="2B2B2B"/>
+                            <a:srgbClr val="26231F"/>
                           </a:solidFill>
                         </a:rPr>
                         <a:t>□</a:t>
@@ -7858,7 +8145,7 @@
                       <a:r>
                         <a:rPr sz="1400" b="1">
                           <a:solidFill>
-                            <a:srgbClr val="11485F"/>
+                            <a:srgbClr val="273F49"/>
                           </a:solidFill>
                         </a:rPr>
                         <a:t>연금·노후자금</a:t>
@@ -7904,7 +8191,7 @@
                       <a:r>
                         <a:rPr sz="1400" b="0">
                           <a:solidFill>
-                            <a:srgbClr val="2B2B2B"/>
+                            <a:srgbClr val="26231F"/>
                           </a:solidFill>
                         </a:rPr>
                         <a:t>□</a:t>
@@ -7937,7 +8224,7 @@
                       <a:prstDash val="solid"/>
                     </a:lnB>
                     <a:solidFill>
-                      <a:srgbClr val="EEF8FC"/>
+                      <a:srgbClr val="EAF7FD"/>
                     </a:solidFill>
                   </a:tcPr>
                 </a:tc>
@@ -7950,7 +8237,7 @@
                       <a:r>
                         <a:rPr sz="1400" b="0">
                           <a:solidFill>
-                            <a:srgbClr val="2B2B2B"/>
+                            <a:srgbClr val="26231F"/>
                           </a:solidFill>
                         </a:rPr>
                         <a:t>□</a:t>
@@ -7983,7 +8270,7 @@
                       <a:prstDash val="solid"/>
                     </a:lnB>
                     <a:solidFill>
-                      <a:srgbClr val="EEF8FC"/>
+                      <a:srgbClr val="EAF7FD"/>
                     </a:solidFill>
                   </a:tcPr>
                 </a:tc>
@@ -7996,7 +8283,7 @@
                       <a:r>
                         <a:rPr sz="1400" b="0">
                           <a:solidFill>
-                            <a:srgbClr val="2B2B2B"/>
+                            <a:srgbClr val="26231F"/>
                           </a:solidFill>
                         </a:rPr>
                         <a:t>□</a:t>
@@ -8029,7 +8316,7 @@
                       <a:prstDash val="solid"/>
                     </a:lnB>
                     <a:solidFill>
-                      <a:srgbClr val="EEF8FC"/>
+                      <a:srgbClr val="EAF7FD"/>
                     </a:solidFill>
                   </a:tcPr>
                 </a:tc>
@@ -8072,14 +8359,83 @@
         </p:nvSpPr>
         <p:spPr>
           <a:xfrm>
-            <a:off x="0" y="384048"/>
-            <a:ext cx="9509522" cy="896112"/>
-          </a:xfrm>
-          <a:prstGeom prst="homePlate">
+            <a:off x="640080" y="566928"/>
+            <a:ext cx="64008" cy="868680"/>
+          </a:xfrm>
+          <a:prstGeom prst="roundRect">
+            <a:avLst>
+              <a:gd name="adj" fmla="val 50000"/>
+            </a:avLst>
+          </a:prstGeom>
+          <a:solidFill>
+            <a:srgbClr val="7BC9EA"/>
+          </a:solidFill>
+          <a:ln>
+            <a:noFill/>
+          </a:ln>
+        </p:spPr>
+        <p:txBody>
+          <a:bodyPr rtlCol="0" anchor="ctr"/>
+          <a:lstStyle/>
+          <a:p>
+            <a:pPr algn="ctr"/>
+          </a:p>
+        </p:txBody>
+      </p:sp>
+      <p:sp>
+        <p:nvSpPr>
+          <p:cNvPr id="4" name="상단 라벨"/>
+          <p:cNvSpPr txBox="1"/>
+          <p:nvPr/>
+        </p:nvSpPr>
+        <p:spPr>
+          <a:xfrm>
+            <a:off x="868680" y="274320"/>
+            <a:ext cx="5486400" cy="274320"/>
+          </a:xfrm>
+          <a:prstGeom prst="rect">
+            <a:avLst/>
+          </a:prstGeom>
+          <a:noFill/>
+        </p:spPr>
+        <p:txBody>
+          <a:bodyPr wrap="square" lIns="54864" rIns="54864" tIns="27432" bIns="27432" anchor="ctr">
+            <a:noAutofit/>
+          </a:bodyPr>
+          <a:lstStyle/>
+          <a:p>
+            <a:pPr algn="l">
+              <a:lnSpc>
+                <a:spcPct val="115000"/>
+              </a:lnSpc>
+            </a:pPr>
+            <a:r>
+              <a:rPr sz="900" b="1" i="0" spc="250">
+                <a:solidFill>
+                  <a:srgbClr val="8E8780"/>
+                </a:solidFill>
+              </a:rPr>
+              <a:t>INSURANCE CHECK</a:t>
+            </a:r>
+          </a:p>
+        </p:txBody>
+      </p:sp>
+      <p:sp>
+        <p:nvSpPr>
+          <p:cNvPr id="5" name="포인트"/>
+          <p:cNvSpPr/>
+          <p:nvPr/>
+        </p:nvSpPr>
+        <p:spPr>
+          <a:xfrm>
+            <a:off x="11167567" y="667512"/>
+            <a:ext cx="310896" cy="310896"/>
+          </a:xfrm>
+          <a:prstGeom prst="heart">
             <a:avLst/>
           </a:prstGeom>
           <a:solidFill>
-            <a:srgbClr val="2695C5"/>
+            <a:srgbClr val="A5DCF3"/>
           </a:solidFill>
           <a:ln>
             <a:noFill/>
@@ -8105,8 +8461,8 @@
         </p:nvSpPr>
         <p:spPr>
           <a:xfrm>
-            <a:off x="640080" y="411480"/>
-            <a:ext cx="8412242" cy="822960"/>
+            <a:off x="868680" y="566928"/>
+            <a:ext cx="9448495" cy="868680"/>
           </a:xfrm>
         </p:spPr>
         <p:txBody>
@@ -8123,7 +8479,7 @@
             <a:r>
               <a:rPr sz="3000" b="1" i="0">
                 <a:solidFill>
-                  <a:srgbClr val="FFFFFF"/>
+                  <a:srgbClr val="26231F"/>
                 </a:solidFill>
               </a:rPr>
               <a:t>월 보험료 한눈에</a:t>
@@ -8133,27 +8489,25 @@
       </p:sp>
       <p:sp>
         <p:nvSpPr>
-          <p:cNvPr id="4" name="카드 1"/>
+          <p:cNvPr id="6" name="카드 1"/>
           <p:cNvSpPr/>
           <p:nvPr/>
         </p:nvSpPr>
         <p:spPr>
           <a:xfrm>
-            <a:off x="640080" y="1645920"/>
+            <a:off x="640080" y="1783080"/>
             <a:ext cx="3484778" cy="2926080"/>
           </a:xfrm>
           <a:prstGeom prst="roundRect">
             <a:avLst>
-              <a:gd name="adj" fmla="val 8000"/>
+              <a:gd name="adj" fmla="val 7000"/>
             </a:avLst>
           </a:prstGeom>
           <a:solidFill>
-            <a:srgbClr val="EEF8FC"/>
+            <a:srgbClr val="EAF7FD"/>
           </a:solidFill>
-          <a:ln w="15875">
-            <a:solidFill>
-              <a:srgbClr val="D1EEFA"/>
-            </a:solidFill>
+          <a:ln>
+            <a:noFill/>
           </a:ln>
         </p:spPr>
         <p:txBody>
@@ -8166,23 +8520,23 @@
       </p:sp>
       <p:sp>
         <p:nvSpPr>
-          <p:cNvPr id="5" name="번호 1"/>
+          <p:cNvPr id="7" name="번호 1"/>
           <p:cNvSpPr/>
           <p:nvPr/>
         </p:nvSpPr>
         <p:spPr>
           <a:xfrm>
-            <a:off x="822959" y="1828800"/>
+            <a:off x="822959" y="1965960"/>
             <a:ext cx="457200" cy="457200"/>
           </a:xfrm>
           <a:prstGeom prst="ellipse">
             <a:avLst/>
           </a:prstGeom>
-          <a:solidFill>
-            <a:srgbClr val="2695C5"/>
-          </a:solidFill>
-          <a:ln>
-            <a:noFill/>
+          <a:noFill/>
+          <a:ln w="19050">
+            <a:solidFill>
+              <a:srgbClr val="7BC9EA"/>
+            </a:solidFill>
           </a:ln>
         </p:spPr>
         <p:txBody>
@@ -8199,7 +8553,7 @@
             <a:r>
               <a:rPr sz="1600" b="1" i="0">
                 <a:solidFill>
-                  <a:srgbClr val="FFFFFF"/>
+                  <a:srgbClr val="273F49"/>
                 </a:solidFill>
               </a:rPr>
               <a:t>1</a:t>
@@ -8209,13 +8563,13 @@
       </p:sp>
       <p:sp>
         <p:nvSpPr>
-          <p:cNvPr id="6" name="TextBox 5"/>
+          <p:cNvPr id="8" name="TextBox 7"/>
           <p:cNvSpPr txBox="1"/>
           <p:nvPr/>
         </p:nvSpPr>
         <p:spPr>
           <a:xfrm>
-            <a:off x="777240" y="2423160"/>
+            <a:off x="777240" y="2560320"/>
             <a:ext cx="3210458" cy="640080"/>
           </a:xfrm>
           <a:prstGeom prst="rect">
@@ -8237,7 +8591,7 @@
             <a:r>
               <a:rPr sz="1700" b="1" i="0">
                 <a:solidFill>
-                  <a:srgbClr val="11485F"/>
+                  <a:srgbClr val="273F49"/>
                 </a:solidFill>
               </a:rPr>
               <a:t>월 보험료 합계</a:t>
@@ -8247,13 +8601,13 @@
       </p:sp>
       <p:sp>
         <p:nvSpPr>
-          <p:cNvPr id="7" name="TextBox 6"/>
+          <p:cNvPr id="9" name="TextBox 8"/>
           <p:cNvSpPr txBox="1"/>
           <p:nvPr/>
         </p:nvSpPr>
         <p:spPr>
           <a:xfrm>
-            <a:off x="777240" y="3108960"/>
+            <a:off x="777240" y="3246120"/>
             <a:ext cx="3210458" cy="1325880"/>
           </a:xfrm>
           <a:prstGeom prst="rect">
@@ -8275,7 +8629,7 @@
             <a:r>
               <a:rPr sz="3000" b="0" i="0">
                 <a:solidFill>
-                  <a:srgbClr val="2B2B2B"/>
+                  <a:srgbClr val="26231F"/>
                 </a:solidFill>
               </a:rPr>
               <a:t>0원</a:t>
@@ -8285,27 +8639,25 @@
       </p:sp>
       <p:sp>
         <p:nvSpPr>
-          <p:cNvPr id="8" name="카드 2"/>
+          <p:cNvPr id="10" name="카드 2"/>
           <p:cNvSpPr/>
           <p:nvPr/>
         </p:nvSpPr>
         <p:spPr>
           <a:xfrm>
-            <a:off x="4353458" y="1645920"/>
+            <a:off x="4353458" y="1783080"/>
             <a:ext cx="3484778" cy="2926080"/>
           </a:xfrm>
           <a:prstGeom prst="roundRect">
             <a:avLst>
-              <a:gd name="adj" fmla="val 8000"/>
+              <a:gd name="adj" fmla="val 7000"/>
             </a:avLst>
           </a:prstGeom>
           <a:solidFill>
-            <a:srgbClr val="EEF8FC"/>
+            <a:srgbClr val="EAF7FD"/>
           </a:solidFill>
-          <a:ln w="15875">
-            <a:solidFill>
-              <a:srgbClr val="D1EEFA"/>
-            </a:solidFill>
+          <a:ln>
+            <a:noFill/>
           </a:ln>
         </p:spPr>
         <p:txBody>
@@ -8318,23 +8670,23 @@
       </p:sp>
       <p:sp>
         <p:nvSpPr>
-          <p:cNvPr id="9" name="번호 2"/>
+          <p:cNvPr id="11" name="번호 2"/>
           <p:cNvSpPr/>
           <p:nvPr/>
         </p:nvSpPr>
         <p:spPr>
           <a:xfrm>
-            <a:off x="4536338" y="1828800"/>
+            <a:off x="4536338" y="1965960"/>
             <a:ext cx="457200" cy="457200"/>
           </a:xfrm>
           <a:prstGeom prst="ellipse">
             <a:avLst/>
           </a:prstGeom>
-          <a:solidFill>
-            <a:srgbClr val="2695C5"/>
-          </a:solidFill>
-          <a:ln>
-            <a:noFill/>
+          <a:noFill/>
+          <a:ln w="19050">
+            <a:solidFill>
+              <a:srgbClr val="7BC9EA"/>
+            </a:solidFill>
           </a:ln>
         </p:spPr>
         <p:txBody>
@@ -8351,7 +8703,7 @@
             <a:r>
               <a:rPr sz="1600" b="1" i="0">
                 <a:solidFill>
-                  <a:srgbClr val="FFFFFF"/>
+                  <a:srgbClr val="273F49"/>
                 </a:solidFill>
               </a:rPr>
               <a:t>2</a:t>
@@ -8361,13 +8713,13 @@
       </p:sp>
       <p:sp>
         <p:nvSpPr>
-          <p:cNvPr id="10" name="TextBox 9"/>
+          <p:cNvPr id="12" name="TextBox 11"/>
           <p:cNvSpPr txBox="1"/>
           <p:nvPr/>
         </p:nvSpPr>
         <p:spPr>
           <a:xfrm>
-            <a:off x="4490618" y="2423160"/>
+            <a:off x="4490618" y="2560320"/>
             <a:ext cx="3210458" cy="640080"/>
           </a:xfrm>
           <a:prstGeom prst="rect">
@@ -8389,7 +8741,7 @@
             <a:r>
               <a:rPr sz="1700" b="1" i="0">
                 <a:solidFill>
-                  <a:srgbClr val="11485F"/>
+                  <a:srgbClr val="273F49"/>
                 </a:solidFill>
               </a:rPr>
               <a:t>연 보험료 합계</a:t>
@@ -8399,13 +8751,13 @@
       </p:sp>
       <p:sp>
         <p:nvSpPr>
-          <p:cNvPr id="11" name="TextBox 10"/>
+          <p:cNvPr id="13" name="TextBox 12"/>
           <p:cNvSpPr txBox="1"/>
           <p:nvPr/>
         </p:nvSpPr>
         <p:spPr>
           <a:xfrm>
-            <a:off x="4490618" y="3108960"/>
+            <a:off x="4490618" y="3246120"/>
             <a:ext cx="3210458" cy="1325880"/>
           </a:xfrm>
           <a:prstGeom prst="rect">
@@ -8427,7 +8779,7 @@
             <a:r>
               <a:rPr sz="3000" b="0" i="0">
                 <a:solidFill>
-                  <a:srgbClr val="2B2B2B"/>
+                  <a:srgbClr val="26231F"/>
                 </a:solidFill>
               </a:rPr>
               <a:t>0원</a:t>
@@ -8437,27 +8789,25 @@
       </p:sp>
       <p:sp>
         <p:nvSpPr>
-          <p:cNvPr id="12" name="카드 3"/>
+          <p:cNvPr id="14" name="카드 3"/>
           <p:cNvSpPr/>
           <p:nvPr/>
         </p:nvSpPr>
         <p:spPr>
           <a:xfrm>
-            <a:off x="8066836" y="1645920"/>
+            <a:off x="8066836" y="1783080"/>
             <a:ext cx="3484778" cy="2926080"/>
           </a:xfrm>
           <a:prstGeom prst="roundRect">
             <a:avLst>
-              <a:gd name="adj" fmla="val 8000"/>
+              <a:gd name="adj" fmla="val 7000"/>
             </a:avLst>
           </a:prstGeom>
           <a:solidFill>
-            <a:srgbClr val="EEF8FC"/>
+            <a:srgbClr val="EAF7FD"/>
           </a:solidFill>
-          <a:ln w="15875">
-            <a:solidFill>
-              <a:srgbClr val="D1EEFA"/>
-            </a:solidFill>
+          <a:ln>
+            <a:noFill/>
           </a:ln>
         </p:spPr>
         <p:txBody>
@@ -8470,23 +8820,23 @@
       </p:sp>
       <p:sp>
         <p:nvSpPr>
-          <p:cNvPr id="13" name="번호 3"/>
+          <p:cNvPr id="15" name="번호 3"/>
           <p:cNvSpPr/>
           <p:nvPr/>
         </p:nvSpPr>
         <p:spPr>
           <a:xfrm>
-            <a:off x="8249716" y="1828800"/>
+            <a:off x="8249716" y="1965960"/>
             <a:ext cx="457200" cy="457200"/>
           </a:xfrm>
           <a:prstGeom prst="ellipse">
             <a:avLst/>
           </a:prstGeom>
-          <a:solidFill>
-            <a:srgbClr val="2695C5"/>
-          </a:solidFill>
-          <a:ln>
-            <a:noFill/>
+          <a:noFill/>
+          <a:ln w="19050">
+            <a:solidFill>
+              <a:srgbClr val="7BC9EA"/>
+            </a:solidFill>
           </a:ln>
         </p:spPr>
         <p:txBody>
@@ -8503,7 +8853,7 @@
             <a:r>
               <a:rPr sz="1600" b="1" i="0">
                 <a:solidFill>
-                  <a:srgbClr val="FFFFFF"/>
+                  <a:srgbClr val="273F49"/>
                 </a:solidFill>
               </a:rPr>
               <a:t>3</a:t>
@@ -8513,13 +8863,13 @@
       </p:sp>
       <p:sp>
         <p:nvSpPr>
-          <p:cNvPr id="14" name="TextBox 13"/>
+          <p:cNvPr id="16" name="TextBox 15"/>
           <p:cNvSpPr txBox="1"/>
           <p:nvPr/>
         </p:nvSpPr>
         <p:spPr>
           <a:xfrm>
-            <a:off x="8203996" y="2423160"/>
+            <a:off x="8203996" y="2560320"/>
             <a:ext cx="3210458" cy="640080"/>
           </a:xfrm>
           <a:prstGeom prst="rect">
@@ -8541,7 +8891,7 @@
             <a:r>
               <a:rPr sz="1700" b="1" i="0">
                 <a:solidFill>
-                  <a:srgbClr val="11485F"/>
+                  <a:srgbClr val="273F49"/>
                 </a:solidFill>
               </a:rPr>
               <a:t>월 소득 대비</a:t>
@@ -8551,13 +8901,13 @@
       </p:sp>
       <p:sp>
         <p:nvSpPr>
-          <p:cNvPr id="15" name="TextBox 14"/>
+          <p:cNvPr id="17" name="TextBox 16"/>
           <p:cNvSpPr txBox="1"/>
           <p:nvPr/>
         </p:nvSpPr>
         <p:spPr>
           <a:xfrm>
-            <a:off x="8203996" y="3108960"/>
+            <a:off x="8203996" y="3246120"/>
             <a:ext cx="3210458" cy="1325880"/>
           </a:xfrm>
           <a:prstGeom prst="rect">
@@ -8579,7 +8929,7 @@
             <a:r>
               <a:rPr sz="3000" b="0" i="0">
                 <a:solidFill>
-                  <a:srgbClr val="2B2B2B"/>
+                  <a:srgbClr val="26231F"/>
                 </a:solidFill>
               </a:rPr>
               <a:t>0 %</a:t>
@@ -8589,13 +8939,13 @@
       </p:sp>
       <p:sp>
         <p:nvSpPr>
-          <p:cNvPr id="16" name="안내"/>
+          <p:cNvPr id="18" name="안내"/>
           <p:cNvSpPr txBox="1"/>
           <p:nvPr/>
         </p:nvSpPr>
         <p:spPr>
           <a:xfrm>
-            <a:off x="640080" y="4754880"/>
+            <a:off x="640080" y="4892040"/>
             <a:ext cx="10911535" cy="365760"/>
           </a:xfrm>
           <a:prstGeom prst="rect">
@@ -8659,14 +9009,83 @@
         </p:nvSpPr>
         <p:spPr>
           <a:xfrm>
-            <a:off x="0" y="384048"/>
-            <a:ext cx="9509522" cy="896112"/>
-          </a:xfrm>
-          <a:prstGeom prst="homePlate">
+            <a:off x="640080" y="566928"/>
+            <a:ext cx="64008" cy="868680"/>
+          </a:xfrm>
+          <a:prstGeom prst="roundRect">
+            <a:avLst>
+              <a:gd name="adj" fmla="val 50000"/>
+            </a:avLst>
+          </a:prstGeom>
+          <a:solidFill>
+            <a:srgbClr val="7BC9EA"/>
+          </a:solidFill>
+          <a:ln>
+            <a:noFill/>
+          </a:ln>
+        </p:spPr>
+        <p:txBody>
+          <a:bodyPr rtlCol="0" anchor="ctr"/>
+          <a:lstStyle/>
+          <a:p>
+            <a:pPr algn="ctr"/>
+          </a:p>
+        </p:txBody>
+      </p:sp>
+      <p:sp>
+        <p:nvSpPr>
+          <p:cNvPr id="4" name="상단 라벨"/>
+          <p:cNvSpPr txBox="1"/>
+          <p:nvPr/>
+        </p:nvSpPr>
+        <p:spPr>
+          <a:xfrm>
+            <a:off x="868680" y="274320"/>
+            <a:ext cx="5486400" cy="274320"/>
+          </a:xfrm>
+          <a:prstGeom prst="rect">
+            <a:avLst/>
+          </a:prstGeom>
+          <a:noFill/>
+        </p:spPr>
+        <p:txBody>
+          <a:bodyPr wrap="square" lIns="54864" rIns="54864" tIns="27432" bIns="27432" anchor="ctr">
+            <a:noAutofit/>
+          </a:bodyPr>
+          <a:lstStyle/>
+          <a:p>
+            <a:pPr algn="l">
+              <a:lnSpc>
+                <a:spcPct val="115000"/>
+              </a:lnSpc>
+            </a:pPr>
+            <a:r>
+              <a:rPr sz="900" b="1" i="0" spc="250">
+                <a:solidFill>
+                  <a:srgbClr val="8E8780"/>
+                </a:solidFill>
+              </a:rPr>
+              <a:t>INSURANCE CHECK</a:t>
+            </a:r>
+          </a:p>
+        </p:txBody>
+      </p:sp>
+      <p:sp>
+        <p:nvSpPr>
+          <p:cNvPr id="5" name="포인트"/>
+          <p:cNvSpPr/>
+          <p:nvPr/>
+        </p:nvSpPr>
+        <p:spPr>
+          <a:xfrm>
+            <a:off x="11167567" y="667512"/>
+            <a:ext cx="310896" cy="310896"/>
+          </a:xfrm>
+          <a:prstGeom prst="heart">
             <a:avLst/>
           </a:prstGeom>
           <a:solidFill>
-            <a:srgbClr val="2695C5"/>
+            <a:srgbClr val="A5DCF3"/>
           </a:solidFill>
           <a:ln>
             <a:noFill/>
@@ -8692,8 +9111,8 @@
         </p:nvSpPr>
         <p:spPr>
           <a:xfrm>
-            <a:off x="640080" y="411480"/>
-            <a:ext cx="8412242" cy="822960"/>
+            <a:off x="868680" y="566928"/>
+            <a:ext cx="9448495" cy="868680"/>
           </a:xfrm>
         </p:spPr>
         <p:txBody>
@@ -8710,7 +9129,7 @@
             <a:r>
               <a:rPr sz="3000" b="1" i="0">
                 <a:solidFill>
-                  <a:srgbClr val="FFFFFF"/>
+                  <a:srgbClr val="26231F"/>
                 </a:solidFill>
               </a:rPr>
               <a:t>점검 메모와 다음 할 일</a:t>
@@ -8720,27 +9139,25 @@
       </p:sp>
       <p:sp>
         <p:nvSpPr>
-          <p:cNvPr id="4" name="카드 1"/>
+          <p:cNvPr id="6" name="카드 1"/>
           <p:cNvSpPr/>
           <p:nvPr/>
         </p:nvSpPr>
         <p:spPr>
           <a:xfrm>
-            <a:off x="640080" y="1645920"/>
-            <a:ext cx="3484778" cy="4114800"/>
+            <a:off x="640080" y="1783080"/>
+            <a:ext cx="3484778" cy="3931920"/>
           </a:xfrm>
           <a:prstGeom prst="roundRect">
             <a:avLst>
-              <a:gd name="adj" fmla="val 8000"/>
+              <a:gd name="adj" fmla="val 7000"/>
             </a:avLst>
           </a:prstGeom>
           <a:solidFill>
-            <a:srgbClr val="EEF8FC"/>
+            <a:srgbClr val="EAF7FD"/>
           </a:solidFill>
-          <a:ln w="15875">
-            <a:solidFill>
-              <a:srgbClr val="D1EEFA"/>
-            </a:solidFill>
+          <a:ln>
+            <a:noFill/>
           </a:ln>
         </p:spPr>
         <p:txBody>
@@ -8753,23 +9170,23 @@
       </p:sp>
       <p:sp>
         <p:nvSpPr>
-          <p:cNvPr id="5" name="번호 1"/>
+          <p:cNvPr id="7" name="번호 1"/>
           <p:cNvSpPr/>
           <p:nvPr/>
         </p:nvSpPr>
         <p:spPr>
           <a:xfrm>
-            <a:off x="822959" y="1828800"/>
+            <a:off x="822959" y="1965960"/>
             <a:ext cx="457200" cy="457200"/>
           </a:xfrm>
           <a:prstGeom prst="ellipse">
             <a:avLst/>
           </a:prstGeom>
-          <a:solidFill>
-            <a:srgbClr val="2695C5"/>
-          </a:solidFill>
-          <a:ln>
-            <a:noFill/>
+          <a:noFill/>
+          <a:ln w="19050">
+            <a:solidFill>
+              <a:srgbClr val="7BC9EA"/>
+            </a:solidFill>
           </a:ln>
         </p:spPr>
         <p:txBody>
@@ -8786,7 +9203,7 @@
             <a:r>
               <a:rPr sz="1600" b="1" i="0">
                 <a:solidFill>
-                  <a:srgbClr val="FFFFFF"/>
+                  <a:srgbClr val="273F49"/>
                 </a:solidFill>
               </a:rPr>
               <a:t>1</a:t>
@@ -8796,13 +9213,13 @@
       </p:sp>
       <p:sp>
         <p:nvSpPr>
-          <p:cNvPr id="6" name="TextBox 5"/>
+          <p:cNvPr id="8" name="TextBox 7"/>
           <p:cNvSpPr txBox="1"/>
           <p:nvPr/>
         </p:nvSpPr>
         <p:spPr>
           <a:xfrm>
-            <a:off x="777240" y="2423160"/>
+            <a:off x="777240" y="2560320"/>
             <a:ext cx="3210458" cy="640080"/>
           </a:xfrm>
           <a:prstGeom prst="rect">
@@ -8824,7 +9241,7 @@
             <a:r>
               <a:rPr sz="1800" b="1" i="0">
                 <a:solidFill>
-                  <a:srgbClr val="11485F"/>
+                  <a:srgbClr val="273F49"/>
                 </a:solidFill>
               </a:rPr>
               <a:t>확인할 것</a:t>
@@ -8834,14 +9251,14 @@
       </p:sp>
       <p:sp>
         <p:nvSpPr>
-          <p:cNvPr id="7" name="TextBox 6"/>
+          <p:cNvPr id="9" name="TextBox 8"/>
           <p:cNvSpPr txBox="1"/>
           <p:nvPr/>
         </p:nvSpPr>
         <p:spPr>
           <a:xfrm>
-            <a:off x="777240" y="3108960"/>
-            <a:ext cx="3210458" cy="2514600"/>
+            <a:off x="777240" y="3246120"/>
+            <a:ext cx="3210458" cy="2331720"/>
           </a:xfrm>
           <a:prstGeom prst="rect">
             <a:avLst/>
@@ -8862,7 +9279,7 @@
             <a:r>
               <a:rPr sz="1500" b="0" i="0">
                 <a:solidFill>
-                  <a:srgbClr val="2B2B2B"/>
+                  <a:srgbClr val="26231F"/>
                 </a:solidFill>
               </a:rPr>
               <a:t>내용을 입력하세요</a:t>
@@ -8872,27 +9289,25 @@
       </p:sp>
       <p:sp>
         <p:nvSpPr>
-          <p:cNvPr id="8" name="카드 2"/>
+          <p:cNvPr id="10" name="카드 2"/>
           <p:cNvSpPr/>
           <p:nvPr/>
         </p:nvSpPr>
         <p:spPr>
           <a:xfrm>
-            <a:off x="4353458" y="1645920"/>
-            <a:ext cx="3484778" cy="4114800"/>
+            <a:off x="4353458" y="1783080"/>
+            <a:ext cx="3484778" cy="3931920"/>
           </a:xfrm>
           <a:prstGeom prst="roundRect">
             <a:avLst>
-              <a:gd name="adj" fmla="val 8000"/>
+              <a:gd name="adj" fmla="val 7000"/>
             </a:avLst>
           </a:prstGeom>
           <a:solidFill>
-            <a:srgbClr val="EEF8FC"/>
+            <a:srgbClr val="EAF7FD"/>
           </a:solidFill>
-          <a:ln w="15875">
-            <a:solidFill>
-              <a:srgbClr val="D1EEFA"/>
-            </a:solidFill>
+          <a:ln>
+            <a:noFill/>
           </a:ln>
         </p:spPr>
         <p:txBody>
@@ -8905,23 +9320,23 @@
       </p:sp>
       <p:sp>
         <p:nvSpPr>
-          <p:cNvPr id="9" name="번호 2"/>
+          <p:cNvPr id="11" name="번호 2"/>
           <p:cNvSpPr/>
           <p:nvPr/>
         </p:nvSpPr>
         <p:spPr>
           <a:xfrm>
-            <a:off x="4536338" y="1828800"/>
+            <a:off x="4536338" y="1965960"/>
             <a:ext cx="457200" cy="457200"/>
           </a:xfrm>
           <a:prstGeom prst="ellipse">
             <a:avLst/>
           </a:prstGeom>
-          <a:solidFill>
-            <a:srgbClr val="2695C5"/>
-          </a:solidFill>
-          <a:ln>
-            <a:noFill/>
+          <a:noFill/>
+          <a:ln w="19050">
+            <a:solidFill>
+              <a:srgbClr val="7BC9EA"/>
+            </a:solidFill>
           </a:ln>
         </p:spPr>
         <p:txBody>
@@ -8938,7 +9353,7 @@
             <a:r>
               <a:rPr sz="1600" b="1" i="0">
                 <a:solidFill>
-                  <a:srgbClr val="FFFFFF"/>
+                  <a:srgbClr val="273F49"/>
                 </a:solidFill>
               </a:rPr>
               <a:t>2</a:t>
@@ -8948,13 +9363,13 @@
       </p:sp>
       <p:sp>
         <p:nvSpPr>
-          <p:cNvPr id="10" name="TextBox 9"/>
+          <p:cNvPr id="12" name="TextBox 11"/>
           <p:cNvSpPr txBox="1"/>
           <p:nvPr/>
         </p:nvSpPr>
         <p:spPr>
           <a:xfrm>
-            <a:off x="4490618" y="2423160"/>
+            <a:off x="4490618" y="2560320"/>
             <a:ext cx="3210458" cy="640080"/>
           </a:xfrm>
           <a:prstGeom prst="rect">
@@ -8976,7 +9391,7 @@
             <a:r>
               <a:rPr sz="1800" b="1" i="0">
                 <a:solidFill>
-                  <a:srgbClr val="11485F"/>
+                  <a:srgbClr val="273F49"/>
                 </a:solidFill>
               </a:rPr>
               <a:t>문의할 것</a:t>
@@ -8986,14 +9401,14 @@
       </p:sp>
       <p:sp>
         <p:nvSpPr>
-          <p:cNvPr id="11" name="TextBox 10"/>
+          <p:cNvPr id="13" name="TextBox 12"/>
           <p:cNvSpPr txBox="1"/>
           <p:nvPr/>
         </p:nvSpPr>
         <p:spPr>
           <a:xfrm>
-            <a:off x="4490618" y="3108960"/>
-            <a:ext cx="3210458" cy="2514600"/>
+            <a:off x="4490618" y="3246120"/>
+            <a:ext cx="3210458" cy="2331720"/>
           </a:xfrm>
           <a:prstGeom prst="rect">
             <a:avLst/>
@@ -9014,7 +9429,7 @@
             <a:r>
               <a:rPr sz="1500" b="0" i="0">
                 <a:solidFill>
-                  <a:srgbClr val="2B2B2B"/>
+                  <a:srgbClr val="26231F"/>
                 </a:solidFill>
               </a:rPr>
               <a:t>내용을 입력하세요</a:t>
@@ -9024,27 +9439,25 @@
       </p:sp>
       <p:sp>
         <p:nvSpPr>
-          <p:cNvPr id="12" name="카드 3"/>
+          <p:cNvPr id="14" name="카드 3"/>
           <p:cNvSpPr/>
           <p:nvPr/>
         </p:nvSpPr>
         <p:spPr>
           <a:xfrm>
-            <a:off x="8066836" y="1645920"/>
-            <a:ext cx="3484778" cy="4114800"/>
+            <a:off x="8066836" y="1783080"/>
+            <a:ext cx="3484778" cy="3931920"/>
           </a:xfrm>
           <a:prstGeom prst="roundRect">
             <a:avLst>
-              <a:gd name="adj" fmla="val 8000"/>
+              <a:gd name="adj" fmla="val 7000"/>
             </a:avLst>
           </a:prstGeom>
           <a:solidFill>
-            <a:srgbClr val="EEF8FC"/>
+            <a:srgbClr val="EAF7FD"/>
           </a:solidFill>
-          <a:ln w="15875">
-            <a:solidFill>
-              <a:srgbClr val="D1EEFA"/>
-            </a:solidFill>
+          <a:ln>
+            <a:noFill/>
           </a:ln>
         </p:spPr>
         <p:txBody>
@@ -9057,23 +9470,23 @@
       </p:sp>
       <p:sp>
         <p:nvSpPr>
-          <p:cNvPr id="13" name="번호 3"/>
+          <p:cNvPr id="15" name="번호 3"/>
           <p:cNvSpPr/>
           <p:nvPr/>
         </p:nvSpPr>
         <p:spPr>
           <a:xfrm>
-            <a:off x="8249716" y="1828800"/>
+            <a:off x="8249716" y="1965960"/>
             <a:ext cx="457200" cy="457200"/>
           </a:xfrm>
           <a:prstGeom prst="ellipse">
             <a:avLst/>
           </a:prstGeom>
-          <a:solidFill>
-            <a:srgbClr val="2695C5"/>
-          </a:solidFill>
-          <a:ln>
-            <a:noFill/>
+          <a:noFill/>
+          <a:ln w="19050">
+            <a:solidFill>
+              <a:srgbClr val="7BC9EA"/>
+            </a:solidFill>
           </a:ln>
         </p:spPr>
         <p:txBody>
@@ -9090,7 +9503,7 @@
             <a:r>
               <a:rPr sz="1600" b="1" i="0">
                 <a:solidFill>
-                  <a:srgbClr val="FFFFFF"/>
+                  <a:srgbClr val="273F49"/>
                 </a:solidFill>
               </a:rPr>
               <a:t>3</a:t>
@@ -9100,13 +9513,13 @@
       </p:sp>
       <p:sp>
         <p:nvSpPr>
-          <p:cNvPr id="14" name="TextBox 13"/>
+          <p:cNvPr id="16" name="TextBox 15"/>
           <p:cNvSpPr txBox="1"/>
           <p:nvPr/>
         </p:nvSpPr>
         <p:spPr>
           <a:xfrm>
-            <a:off x="8203996" y="2423160"/>
+            <a:off x="8203996" y="2560320"/>
             <a:ext cx="3210458" cy="640080"/>
           </a:xfrm>
           <a:prstGeom prst="rect">
@@ -9128,7 +9541,7 @@
             <a:r>
               <a:rPr sz="1800" b="1" i="0">
                 <a:solidFill>
-                  <a:srgbClr val="11485F"/>
+                  <a:srgbClr val="273F49"/>
                 </a:solidFill>
               </a:rPr>
               <a:t>정리할 날짜</a:t>
@@ -9138,14 +9551,14 @@
       </p:sp>
       <p:sp>
         <p:nvSpPr>
-          <p:cNvPr id="15" name="TextBox 14"/>
+          <p:cNvPr id="17" name="TextBox 16"/>
           <p:cNvSpPr txBox="1"/>
           <p:nvPr/>
         </p:nvSpPr>
         <p:spPr>
           <a:xfrm>
-            <a:off x="8203996" y="3108960"/>
-            <a:ext cx="3210458" cy="2514600"/>
+            <a:off x="8203996" y="3246120"/>
+            <a:ext cx="3210458" cy="2331720"/>
           </a:xfrm>
           <a:prstGeom prst="rect">
             <a:avLst/>
@@ -9166,7 +9579,7 @@
             <a:r>
               <a:rPr sz="1500" b="0" i="0">
                 <a:solidFill>
-                  <a:srgbClr val="2B2B2B"/>
+                  <a:srgbClr val="26231F"/>
                 </a:solidFill>
               </a:rPr>
               <a:t>내용을 입력하세요</a:t>
@@ -9176,13 +9589,13 @@
       </p:sp>
       <p:sp>
         <p:nvSpPr>
-          <p:cNvPr id="16" name="안내 문구"/>
+          <p:cNvPr id="18" name="안내 문구"/>
           <p:cNvSpPr txBox="1"/>
           <p:nvPr/>
         </p:nvSpPr>
         <p:spPr>
           <a:xfrm>
-            <a:off x="640080" y="5852160"/>
+            <a:off x="640080" y="5806440"/>
             <a:ext cx="10911535" cy="548640"/>
           </a:xfrm>
           <a:prstGeom prst="rect">
@@ -9231,34 +9644,34 @@
         <a:sysClr val="window" lastClr="FFFFFF"/>
       </a:lt1>
       <a:dk2>
-        <a:srgbClr val="11485F"/>
+        <a:srgbClr val="273F49"/>
       </a:dk2>
       <a:lt2>
-        <a:srgbClr val="EEF8FC"/>
+        <a:srgbClr val="EAF7FD"/>
       </a:lt2>
       <a:accent1>
-        <a:srgbClr val="2695C5"/>
+        <a:srgbClr val="7BC9EA"/>
       </a:accent1>
       <a:accent2>
-        <a:srgbClr val="209DB6"/>
+        <a:srgbClr val="9FB1EF"/>
       </a:accent2>
       <a:accent3>
-        <a:srgbClr val="11485F"/>
+        <a:srgbClr val="273F49"/>
       </a:accent3>
       <a:accent4>
         <a:srgbClr val="D1EEFA"/>
       </a:accent4>
       <a:accent5>
-        <a:srgbClr val="2399BE"/>
+        <a:srgbClr val="8DBDEC"/>
       </a:accent5>
       <a:accent6>
-        <a:srgbClr val="70919F"/>
+        <a:srgbClr val="7D8C92"/>
       </a:accent6>
       <a:hlink>
-        <a:srgbClr val="2695C5"/>
+        <a:srgbClr val="7BC9EA"/>
       </a:hlink>
       <a:folHlink>
-        <a:srgbClr val="11485F"/>
+        <a:srgbClr val="273F49"/>
       </a:folHlink>
     </a:clrScheme>
     <a:fontScheme name="Office">
